--- a/Analysis WHR_Innar.pptx
+++ b/Analysis WHR_Innar.pptx
@@ -1,34 +1,34 @@
 
 <file path=ppt/presentation.xml><?xml version="1.0" encoding="utf-8"?>
-<p:presentation xmlns:a="http://schemas.openxmlformats.org/drawingml/2006/main" xmlns:r="http://schemas.openxmlformats.org/officeDocument/2006/relationships" xmlns:mc="http://schemas.openxmlformats.org/markup-compatibility/2006" xmlns:mv="urn:schemas-microsoft-com:mac:vml" xmlns:p="http://schemas.openxmlformats.org/presentationml/2006/main" xmlns:c="http://schemas.openxmlformats.org/drawingml/2006/chart" xmlns:dgm="http://schemas.openxmlformats.org/drawingml/2006/diagram" xmlns:o="urn:schemas-microsoft-com:office:office" xmlns:v="urn:schemas-microsoft-com:vml" xmlns:pvml="urn:schemas-microsoft-com:office:powerpoint" xmlns:com="http://schemas.openxmlformats.org/drawingml/2006/compatibility" xmlns:p14="http://schemas.microsoft.com/office/powerpoint/2010/main" xmlns:p15="http://schemas.microsoft.com/office/powerpoint/2012/main" xmlns:ahyp="http://schemas.microsoft.com/office/drawing/2018/hyperlinkcolor" autoCompressPictures="0" embedTrueTypeFonts="1" strictFirstAndLastChars="0" saveSubsetFonts="1">
+<p:presentation xmlns:a="http://schemas.openxmlformats.org/drawingml/2006/main" xmlns:r="http://schemas.openxmlformats.org/officeDocument/2006/relationships" xmlns:p="http://schemas.openxmlformats.org/presentationml/2006/main" strictFirstAndLastChars="0" embedTrueTypeFonts="1" saveSubsetFonts="1" autoCompressPictures="0">
   <p:sldMasterIdLst>
-    <p:sldMasterId id="2147483659" r:id="rId4"/>
+    <p:sldMasterId id="2147483659" r:id="rId1"/>
   </p:sldMasterIdLst>
   <p:notesMasterIdLst>
-    <p:notesMasterId r:id="rId5"/>
+    <p:notesMasterId r:id="rId9"/>
   </p:notesMasterIdLst>
   <p:sldIdLst>
-    <p:sldId id="256" r:id="rId6"/>
-    <p:sldId id="257" r:id="rId7"/>
-    <p:sldId id="258" r:id="rId8"/>
-    <p:sldId id="259" r:id="rId9"/>
-    <p:sldId id="260" r:id="rId10"/>
-    <p:sldId id="261" r:id="rId11"/>
-    <p:sldId id="262" r:id="rId12"/>
+    <p:sldId id="256" r:id="rId2"/>
+    <p:sldId id="257" r:id="rId3"/>
+    <p:sldId id="258" r:id="rId4"/>
+    <p:sldId id="259" r:id="rId5"/>
+    <p:sldId id="260" r:id="rId6"/>
+    <p:sldId id="261" r:id="rId7"/>
+    <p:sldId id="262" r:id="rId8"/>
   </p:sldIdLst>
-  <p:sldSz cy="5143500" cx="9144000"/>
+  <p:sldSz cx="9144000" cy="5143500" type="screen16x9"/>
   <p:notesSz cx="6858000" cy="9144000"/>
   <p:embeddedFontLst>
     <p:embeddedFont>
-      <p:font typeface="Lora"/>
-      <p:regular r:id="rId13"/>
-      <p:bold r:id="rId14"/>
-      <p:italic r:id="rId15"/>
-      <p:boldItalic r:id="rId16"/>
+      <p:font typeface="Lora" pitchFamily="2" charset="0"/>
+      <p:regular r:id="rId10"/>
+      <p:bold r:id="rId11"/>
+      <p:italic r:id="rId12"/>
+      <p:boldItalic r:id="rId13"/>
     </p:embeddedFont>
   </p:embeddedFontLst>
   <p:defaultTextStyle>
-    <a:defPPr lvl="0" marR="0" rtl="0" algn="l">
+    <a:defPPr marR="0" lvl="0" algn="l" rtl="0">
       <a:lnSpc>
         <a:spcPct val="100000"/>
       </a:lnSpc>
@@ -39,7 +39,7 @@
         <a:spcPts val="0"/>
       </a:spcAft>
     </a:defPPr>
-    <a:lvl1pPr lvl="0" marR="0" rtl="0" algn="l">
+    <a:lvl1pPr marR="0" lvl="0" algn="l" rtl="0">
       <a:lnSpc>
         <a:spcPct val="100000"/>
       </a:lnSpc>
@@ -53,7 +53,7 @@
         <a:srgbClr val="000000"/>
       </a:buClr>
       <a:buFont typeface="Arial"/>
-      <a:defRPr b="0" i="0" spc="0" sz="1400" u="none" cap="none" strike="noStrike">
+      <a:defRPr sz="1400" b="0" i="0" u="none" strike="noStrike" cap="none" spc="0">
         <a:solidFill>
           <a:srgbClr val="000000"/>
         </a:solidFill>
@@ -63,7 +63,7 @@
         <a:sym typeface="Arial"/>
       </a:defRPr>
     </a:lvl1pPr>
-    <a:lvl2pPr lvl="1" marR="0" rtl="0" algn="l">
+    <a:lvl2pPr marR="0" lvl="1" algn="l" rtl="0">
       <a:lnSpc>
         <a:spcPct val="100000"/>
       </a:lnSpc>
@@ -77,7 +77,7 @@
         <a:srgbClr val="000000"/>
       </a:buClr>
       <a:buFont typeface="Arial"/>
-      <a:defRPr b="0" i="0" spc="0" sz="1400" u="none" cap="none" strike="noStrike">
+      <a:defRPr sz="1400" b="0" i="0" u="none" strike="noStrike" cap="none" spc="0">
         <a:solidFill>
           <a:srgbClr val="000000"/>
         </a:solidFill>
@@ -87,7 +87,7 @@
         <a:sym typeface="Arial"/>
       </a:defRPr>
     </a:lvl2pPr>
-    <a:lvl3pPr lvl="2" marR="0" rtl="0" algn="l">
+    <a:lvl3pPr marR="0" lvl="2" algn="l" rtl="0">
       <a:lnSpc>
         <a:spcPct val="100000"/>
       </a:lnSpc>
@@ -101,7 +101,7 @@
         <a:srgbClr val="000000"/>
       </a:buClr>
       <a:buFont typeface="Arial"/>
-      <a:defRPr b="0" i="0" spc="0" sz="1400" u="none" cap="none" strike="noStrike">
+      <a:defRPr sz="1400" b="0" i="0" u="none" strike="noStrike" cap="none" spc="0">
         <a:solidFill>
           <a:srgbClr val="000000"/>
         </a:solidFill>
@@ -111,7 +111,7 @@
         <a:sym typeface="Arial"/>
       </a:defRPr>
     </a:lvl3pPr>
-    <a:lvl4pPr lvl="3" marR="0" rtl="0" algn="l">
+    <a:lvl4pPr marR="0" lvl="3" algn="l" rtl="0">
       <a:lnSpc>
         <a:spcPct val="100000"/>
       </a:lnSpc>
@@ -125,7 +125,7 @@
         <a:srgbClr val="000000"/>
       </a:buClr>
       <a:buFont typeface="Arial"/>
-      <a:defRPr b="0" i="0" spc="0" sz="1400" u="none" cap="none" strike="noStrike">
+      <a:defRPr sz="1400" b="0" i="0" u="none" strike="noStrike" cap="none" spc="0">
         <a:solidFill>
           <a:srgbClr val="000000"/>
         </a:solidFill>
@@ -135,7 +135,7 @@
         <a:sym typeface="Arial"/>
       </a:defRPr>
     </a:lvl4pPr>
-    <a:lvl5pPr lvl="4" marR="0" rtl="0" algn="l">
+    <a:lvl5pPr marR="0" lvl="4" algn="l" rtl="0">
       <a:lnSpc>
         <a:spcPct val="100000"/>
       </a:lnSpc>
@@ -149,7 +149,7 @@
         <a:srgbClr val="000000"/>
       </a:buClr>
       <a:buFont typeface="Arial"/>
-      <a:defRPr b="0" i="0" spc="0" sz="1400" u="none" cap="none" strike="noStrike">
+      <a:defRPr sz="1400" b="0" i="0" u="none" strike="noStrike" cap="none" spc="0">
         <a:solidFill>
           <a:srgbClr val="000000"/>
         </a:solidFill>
@@ -159,7 +159,7 @@
         <a:sym typeface="Arial"/>
       </a:defRPr>
     </a:lvl5pPr>
-    <a:lvl6pPr lvl="5" marR="0" rtl="0" algn="l">
+    <a:lvl6pPr marR="0" lvl="5" algn="l" rtl="0">
       <a:lnSpc>
         <a:spcPct val="100000"/>
       </a:lnSpc>
@@ -173,7 +173,7 @@
         <a:srgbClr val="000000"/>
       </a:buClr>
       <a:buFont typeface="Arial"/>
-      <a:defRPr b="0" i="0" spc="0" sz="1400" u="none" cap="none" strike="noStrike">
+      <a:defRPr sz="1400" b="0" i="0" u="none" strike="noStrike" cap="none" spc="0">
         <a:solidFill>
           <a:srgbClr val="000000"/>
         </a:solidFill>
@@ -183,7 +183,7 @@
         <a:sym typeface="Arial"/>
       </a:defRPr>
     </a:lvl6pPr>
-    <a:lvl7pPr lvl="6" marR="0" rtl="0" algn="l">
+    <a:lvl7pPr marR="0" lvl="6" algn="l" rtl="0">
       <a:lnSpc>
         <a:spcPct val="100000"/>
       </a:lnSpc>
@@ -197,7 +197,7 @@
         <a:srgbClr val="000000"/>
       </a:buClr>
       <a:buFont typeface="Arial"/>
-      <a:defRPr b="0" i="0" spc="0" sz="1400" u="none" cap="none" strike="noStrike">
+      <a:defRPr sz="1400" b="0" i="0" u="none" strike="noStrike" cap="none" spc="0">
         <a:solidFill>
           <a:srgbClr val="000000"/>
         </a:solidFill>
@@ -207,7 +207,7 @@
         <a:sym typeface="Arial"/>
       </a:defRPr>
     </a:lvl7pPr>
-    <a:lvl8pPr lvl="7" marR="0" rtl="0" algn="l">
+    <a:lvl8pPr marR="0" lvl="7" algn="l" rtl="0">
       <a:lnSpc>
         <a:spcPct val="100000"/>
       </a:lnSpc>
@@ -221,7 +221,7 @@
         <a:srgbClr val="000000"/>
       </a:buClr>
       <a:buFont typeface="Arial"/>
-      <a:defRPr b="0" i="0" spc="0" sz="1400" u="none" cap="none" strike="noStrike">
+      <a:defRPr sz="1400" b="0" i="0" u="none" strike="noStrike" cap="none" spc="0">
         <a:solidFill>
           <a:srgbClr val="000000"/>
         </a:solidFill>
@@ -231,7 +231,7 @@
         <a:sym typeface="Arial"/>
       </a:defRPr>
     </a:lvl8pPr>
-    <a:lvl9pPr lvl="8" marR="0" rtl="0" algn="l">
+    <a:lvl9pPr marR="0" lvl="8" algn="l" rtl="0">
       <a:lnSpc>
         <a:spcPct val="100000"/>
       </a:lnSpc>
@@ -245,7 +245,7 @@
         <a:srgbClr val="000000"/>
       </a:buClr>
       <a:buFont typeface="Arial"/>
-      <a:defRPr b="0" i="0" spc="0" sz="1400" u="none" cap="none" strike="noStrike">
+      <a:defRPr sz="1400" b="0" i="0" u="none" strike="noStrike" cap="none" spc="0">
         <a:solidFill>
           <a:srgbClr val="000000"/>
         </a:solidFill>
@@ -258,7 +258,7 @@
   </p:defaultTextStyle>
   <p:extLst>
     <p:ext uri="{EFAFB233-063F-42B5-8137-9DF3F51BA10A}">
-      <p15:sldGuideLst>
+      <p15:sldGuideLst xmlns:p15="http://schemas.microsoft.com/office/powerpoint/2012/main">
         <p15:guide id="1" orient="horz" pos="1620">
           <p15:clr>
             <a:srgbClr val="747775"/>
@@ -276,11 +276,16 @@
 </file>
 
 <file path=ppt/notesMasters/notesMaster1.xml><?xml version="1.0" encoding="utf-8"?>
-<p:notesMaster xmlns:a="http://schemas.openxmlformats.org/drawingml/2006/main" xmlns:r="http://schemas.openxmlformats.org/officeDocument/2006/relationships" xmlns:mc="http://schemas.openxmlformats.org/markup-compatibility/2006" xmlns:mv="urn:schemas-microsoft-com:mac:vml" xmlns:p="http://schemas.openxmlformats.org/presentationml/2006/main" xmlns:c="http://schemas.openxmlformats.org/drawingml/2006/chart" xmlns:dgm="http://schemas.openxmlformats.org/drawingml/2006/diagram" xmlns:o="urn:schemas-microsoft-com:office:office" xmlns:v="urn:schemas-microsoft-com:vml" xmlns:pvml="urn:schemas-microsoft-com:office:powerpoint" xmlns:com="http://schemas.openxmlformats.org/drawingml/2006/compatibility" xmlns:p14="http://schemas.microsoft.com/office/powerpoint/2010/main" xmlns:p15="http://schemas.microsoft.com/office/powerpoint/2012/main" xmlns:ahyp="http://schemas.microsoft.com/office/drawing/2018/hyperlinkcolor">
+<p:notesMaster xmlns:a="http://schemas.openxmlformats.org/drawingml/2006/main" xmlns:r="http://schemas.openxmlformats.org/officeDocument/2006/relationships" xmlns:p="http://schemas.openxmlformats.org/presentationml/2006/main">
   <p:cSld>
+    <p:bg>
+      <p:bgRef idx="1001">
+        <a:schemeClr val="bg1"/>
+      </p:bgRef>
+    </p:bg>
     <p:spTree>
       <p:nvGrpSpPr>
-        <p:cNvPr id="2" name="Shape 2"/>
+        <p:cNvPr id="1" name="Shape 2"/>
         <p:cNvGrpSpPr/>
         <p:nvPr/>
       </p:nvGrpSpPr>
@@ -295,9 +300,11 @@
       <p:sp>
         <p:nvSpPr>
           <p:cNvPr id="3" name="Google Shape;3;n"/>
-          <p:cNvSpPr/>
+          <p:cNvSpPr>
+            <a:spLocks noGrp="1" noRot="1" noChangeAspect="1"/>
+          </p:cNvSpPr>
           <p:nvPr>
-            <p:ph idx="2" type="sldImg"/>
+            <p:ph type="sldImg" idx="2"/>
           </p:nvPr>
         </p:nvSpPr>
         <p:spPr>
@@ -306,9 +313,13 @@
             <a:ext cx="6096075" cy="3429000"/>
           </a:xfrm>
           <a:custGeom>
-            <a:rect b="b" l="l" r="r" t="t"/>
+            <a:avLst/>
+            <a:gdLst/>
+            <a:ahLst/>
+            <a:cxnLst/>
+            <a:rect l="l" t="t" r="r" b="b"/>
             <a:pathLst>
-              <a:path extrusionOk="0" h="120000" w="120000">
+              <a:path w="120000" h="120000" extrusionOk="0">
                 <a:moveTo>
                   <a:pt x="0" y="0"/>
                 </a:moveTo>
@@ -326,23 +337,25 @@
             </a:pathLst>
           </a:custGeom>
           <a:noFill/>
-          <a:ln cap="flat" cmpd="sng" w="9525">
+          <a:ln w="9525" cap="flat" cmpd="sng">
             <a:solidFill>
               <a:srgbClr val="000000"/>
             </a:solidFill>
             <a:prstDash val="solid"/>
             <a:round/>
-            <a:headEnd len="sm" w="sm" type="none"/>
-            <a:tailEnd len="sm" w="sm" type="none"/>
+            <a:headEnd type="none" w="sm" len="sm"/>
+            <a:tailEnd type="none" w="sm" len="sm"/>
           </a:ln>
         </p:spPr>
       </p:sp>
       <p:sp>
         <p:nvSpPr>
           <p:cNvPr id="4" name="Google Shape;4;n"/>
-          <p:cNvSpPr txBox="1"/>
+          <p:cNvSpPr txBox="1">
+            <a:spLocks noGrp="1"/>
+          </p:cNvSpPr>
           <p:nvPr>
-            <p:ph idx="1" type="body"/>
+            <p:ph type="body" idx="1"/>
           </p:nvPr>
         </p:nvSpPr>
         <p:spPr>
@@ -359,11 +372,11 @@
           </a:ln>
         </p:spPr>
         <p:txBody>
-          <a:bodyPr anchorCtr="0" anchor="t" bIns="91425" lIns="91425" spcFirstLastPara="1" rIns="91425" wrap="square" tIns="91425">
+          <a:bodyPr spcFirstLastPara="1" wrap="square" lIns="91425" tIns="91425" rIns="91425" bIns="91425" anchor="t" anchorCtr="0">
             <a:noAutofit/>
           </a:bodyPr>
           <a:lstStyle>
-            <a:lvl1pPr indent="-298450" lvl="0" marL="457200">
+            <a:lvl1pPr marL="457200" lvl="0" indent="-298450">
               <a:spcBef>
                 <a:spcPts val="0"/>
               </a:spcBef>
@@ -374,7 +387,7 @@
               <a:buChar char="●"/>
               <a:defRPr sz="1100"/>
             </a:lvl1pPr>
-            <a:lvl2pPr indent="-298450" lvl="1" marL="914400">
+            <a:lvl2pPr marL="914400" lvl="1" indent="-298450">
               <a:spcBef>
                 <a:spcPts val="0"/>
               </a:spcBef>
@@ -385,7 +398,7 @@
               <a:buChar char="○"/>
               <a:defRPr sz="1100"/>
             </a:lvl2pPr>
-            <a:lvl3pPr indent="-298450" lvl="2" marL="1371600">
+            <a:lvl3pPr marL="1371600" lvl="2" indent="-298450">
               <a:spcBef>
                 <a:spcPts val="0"/>
               </a:spcBef>
@@ -396,7 +409,7 @@
               <a:buChar char="■"/>
               <a:defRPr sz="1100"/>
             </a:lvl3pPr>
-            <a:lvl4pPr indent="-298450" lvl="3" marL="1828800">
+            <a:lvl4pPr marL="1828800" lvl="3" indent="-298450">
               <a:spcBef>
                 <a:spcPts val="0"/>
               </a:spcBef>
@@ -407,7 +420,7 @@
               <a:buChar char="●"/>
               <a:defRPr sz="1100"/>
             </a:lvl4pPr>
-            <a:lvl5pPr indent="-298450" lvl="4" marL="2286000">
+            <a:lvl5pPr marL="2286000" lvl="4" indent="-298450">
               <a:spcBef>
                 <a:spcPts val="0"/>
               </a:spcBef>
@@ -418,7 +431,7 @@
               <a:buChar char="○"/>
               <a:defRPr sz="1100"/>
             </a:lvl5pPr>
-            <a:lvl6pPr indent="-298450" lvl="5" marL="2743200">
+            <a:lvl6pPr marL="2743200" lvl="5" indent="-298450">
               <a:spcBef>
                 <a:spcPts val="0"/>
               </a:spcBef>
@@ -429,7 +442,7 @@
               <a:buChar char="■"/>
               <a:defRPr sz="1100"/>
             </a:lvl6pPr>
-            <a:lvl7pPr indent="-298450" lvl="6" marL="3200400">
+            <a:lvl7pPr marL="3200400" lvl="6" indent="-298450">
               <a:spcBef>
                 <a:spcPts val="0"/>
               </a:spcBef>
@@ -440,7 +453,7 @@
               <a:buChar char="●"/>
               <a:defRPr sz="1100"/>
             </a:lvl7pPr>
-            <a:lvl8pPr indent="-298450" lvl="7" marL="3657600">
+            <a:lvl8pPr marL="3657600" lvl="7" indent="-298450">
               <a:spcBef>
                 <a:spcPts val="0"/>
               </a:spcBef>
@@ -451,7 +464,7 @@
               <a:buChar char="○"/>
               <a:defRPr sz="1100"/>
             </a:lvl8pPr>
-            <a:lvl9pPr indent="-298450" lvl="8" marL="4114800">
+            <a:lvl9pPr marL="4114800" lvl="8" indent="-298450">
               <a:spcBef>
                 <a:spcPts val="0"/>
               </a:spcBef>
@@ -463,14 +476,16 @@
               <a:defRPr sz="1100"/>
             </a:lvl9pPr>
           </a:lstStyle>
-          <a:p/>
+          <a:p>
+            <a:endParaRPr/>
+          </a:p>
         </p:txBody>
       </p:sp>
     </p:spTree>
   </p:cSld>
-  <p:clrMap accent1="accent1" accent2="accent2" accent3="accent3" accent4="accent4" accent5="accent5" accent6="accent6" bg1="lt1" bg2="dk2" tx1="dk1" tx2="lt2" folHlink="folHlink" hlink="hlink"/>
+  <p:clrMap bg1="lt1" tx1="dk1" bg2="dk2" tx2="lt2" accent1="accent1" accent2="accent2" accent3="accent3" accent4="accent4" accent5="accent5" accent6="accent6" hlink="hlink" folHlink="folHlink"/>
   <p:notesStyle>
-    <a:defPPr lvl="0" marR="0" rtl="0" algn="l">
+    <a:defPPr marR="0" lvl="0" algn="l" rtl="0">
       <a:lnSpc>
         <a:spcPct val="100000"/>
       </a:lnSpc>
@@ -481,7 +496,7 @@
         <a:spcPts val="0"/>
       </a:spcAft>
     </a:defPPr>
-    <a:lvl1pPr lvl="0" marR="0" rtl="0" algn="l">
+    <a:lvl1pPr marR="0" lvl="0" algn="l" rtl="0">
       <a:lnSpc>
         <a:spcPct val="100000"/>
       </a:lnSpc>
@@ -495,7 +510,7 @@
         <a:srgbClr val="000000"/>
       </a:buClr>
       <a:buFont typeface="Arial"/>
-      <a:defRPr b="0" i="0" spc="0" sz="1400" u="none" cap="none" strike="noStrike">
+      <a:defRPr sz="1400" b="0" i="0" u="none" strike="noStrike" cap="none" spc="0">
         <a:solidFill>
           <a:srgbClr val="000000"/>
         </a:solidFill>
@@ -505,7 +520,7 @@
         <a:sym typeface="Arial"/>
       </a:defRPr>
     </a:lvl1pPr>
-    <a:lvl2pPr lvl="1" marR="0" rtl="0" algn="l">
+    <a:lvl2pPr marR="0" lvl="1" algn="l" rtl="0">
       <a:lnSpc>
         <a:spcPct val="100000"/>
       </a:lnSpc>
@@ -519,7 +534,7 @@
         <a:srgbClr val="000000"/>
       </a:buClr>
       <a:buFont typeface="Arial"/>
-      <a:defRPr b="0" i="0" spc="0" sz="1400" u="none" cap="none" strike="noStrike">
+      <a:defRPr sz="1400" b="0" i="0" u="none" strike="noStrike" cap="none" spc="0">
         <a:solidFill>
           <a:srgbClr val="000000"/>
         </a:solidFill>
@@ -529,7 +544,7 @@
         <a:sym typeface="Arial"/>
       </a:defRPr>
     </a:lvl2pPr>
-    <a:lvl3pPr lvl="2" marR="0" rtl="0" algn="l">
+    <a:lvl3pPr marR="0" lvl="2" algn="l" rtl="0">
       <a:lnSpc>
         <a:spcPct val="100000"/>
       </a:lnSpc>
@@ -543,7 +558,7 @@
         <a:srgbClr val="000000"/>
       </a:buClr>
       <a:buFont typeface="Arial"/>
-      <a:defRPr b="0" i="0" spc="0" sz="1400" u="none" cap="none" strike="noStrike">
+      <a:defRPr sz="1400" b="0" i="0" u="none" strike="noStrike" cap="none" spc="0">
         <a:solidFill>
           <a:srgbClr val="000000"/>
         </a:solidFill>
@@ -553,7 +568,7 @@
         <a:sym typeface="Arial"/>
       </a:defRPr>
     </a:lvl3pPr>
-    <a:lvl4pPr lvl="3" marR="0" rtl="0" algn="l">
+    <a:lvl4pPr marR="0" lvl="3" algn="l" rtl="0">
       <a:lnSpc>
         <a:spcPct val="100000"/>
       </a:lnSpc>
@@ -567,7 +582,7 @@
         <a:srgbClr val="000000"/>
       </a:buClr>
       <a:buFont typeface="Arial"/>
-      <a:defRPr b="0" i="0" spc="0" sz="1400" u="none" cap="none" strike="noStrike">
+      <a:defRPr sz="1400" b="0" i="0" u="none" strike="noStrike" cap="none" spc="0">
         <a:solidFill>
           <a:srgbClr val="000000"/>
         </a:solidFill>
@@ -577,7 +592,7 @@
         <a:sym typeface="Arial"/>
       </a:defRPr>
     </a:lvl4pPr>
-    <a:lvl5pPr lvl="4" marR="0" rtl="0" algn="l">
+    <a:lvl5pPr marR="0" lvl="4" algn="l" rtl="0">
       <a:lnSpc>
         <a:spcPct val="100000"/>
       </a:lnSpc>
@@ -591,7 +606,7 @@
         <a:srgbClr val="000000"/>
       </a:buClr>
       <a:buFont typeface="Arial"/>
-      <a:defRPr b="0" i="0" spc="0" sz="1400" u="none" cap="none" strike="noStrike">
+      <a:defRPr sz="1400" b="0" i="0" u="none" strike="noStrike" cap="none" spc="0">
         <a:solidFill>
           <a:srgbClr val="000000"/>
         </a:solidFill>
@@ -601,7 +616,7 @@
         <a:sym typeface="Arial"/>
       </a:defRPr>
     </a:lvl5pPr>
-    <a:lvl6pPr lvl="5" marR="0" rtl="0" algn="l">
+    <a:lvl6pPr marR="0" lvl="5" algn="l" rtl="0">
       <a:lnSpc>
         <a:spcPct val="100000"/>
       </a:lnSpc>
@@ -615,7 +630,7 @@
         <a:srgbClr val="000000"/>
       </a:buClr>
       <a:buFont typeface="Arial"/>
-      <a:defRPr b="0" i="0" spc="0" sz="1400" u="none" cap="none" strike="noStrike">
+      <a:defRPr sz="1400" b="0" i="0" u="none" strike="noStrike" cap="none" spc="0">
         <a:solidFill>
           <a:srgbClr val="000000"/>
         </a:solidFill>
@@ -625,7 +640,7 @@
         <a:sym typeface="Arial"/>
       </a:defRPr>
     </a:lvl6pPr>
-    <a:lvl7pPr lvl="6" marR="0" rtl="0" algn="l">
+    <a:lvl7pPr marR="0" lvl="6" algn="l" rtl="0">
       <a:lnSpc>
         <a:spcPct val="100000"/>
       </a:lnSpc>
@@ -639,7 +654,7 @@
         <a:srgbClr val="000000"/>
       </a:buClr>
       <a:buFont typeface="Arial"/>
-      <a:defRPr b="0" i="0" spc="0" sz="1400" u="none" cap="none" strike="noStrike">
+      <a:defRPr sz="1400" b="0" i="0" u="none" strike="noStrike" cap="none" spc="0">
         <a:solidFill>
           <a:srgbClr val="000000"/>
         </a:solidFill>
@@ -649,7 +664,7 @@
         <a:sym typeface="Arial"/>
       </a:defRPr>
     </a:lvl7pPr>
-    <a:lvl8pPr lvl="7" marR="0" rtl="0" algn="l">
+    <a:lvl8pPr marR="0" lvl="7" algn="l" rtl="0">
       <a:lnSpc>
         <a:spcPct val="100000"/>
       </a:lnSpc>
@@ -663,7 +678,7 @@
         <a:srgbClr val="000000"/>
       </a:buClr>
       <a:buFont typeface="Arial"/>
-      <a:defRPr b="0" i="0" spc="0" sz="1400" u="none" cap="none" strike="noStrike">
+      <a:defRPr sz="1400" b="0" i="0" u="none" strike="noStrike" cap="none" spc="0">
         <a:solidFill>
           <a:srgbClr val="000000"/>
         </a:solidFill>
@@ -673,7 +688,7 @@
         <a:sym typeface="Arial"/>
       </a:defRPr>
     </a:lvl8pPr>
-    <a:lvl9pPr lvl="8" marR="0" rtl="0" algn="l">
+    <a:lvl9pPr marR="0" lvl="8" algn="l" rtl="0">
       <a:lnSpc>
         <a:spcPct val="100000"/>
       </a:lnSpc>
@@ -687,7 +702,7 @@
         <a:srgbClr val="000000"/>
       </a:buClr>
       <a:buFont typeface="Arial"/>
-      <a:defRPr b="0" i="0" spc="0" sz="1400" u="none" cap="none" strike="noStrike">
+      <a:defRPr sz="1400" b="0" i="0" u="none" strike="noStrike" cap="none" spc="0">
         <a:solidFill>
           <a:srgbClr val="000000"/>
         </a:solidFill>
@@ -702,11 +717,11 @@
 </file>
 
 <file path=ppt/notesSlides/notesSlide1.xml><?xml version="1.0" encoding="utf-8"?>
-<p:notes xmlns:a="http://schemas.openxmlformats.org/drawingml/2006/main" xmlns:r="http://schemas.openxmlformats.org/officeDocument/2006/relationships" xmlns:mc="http://schemas.openxmlformats.org/markup-compatibility/2006" xmlns:mv="urn:schemas-microsoft-com:mac:vml" xmlns:p="http://schemas.openxmlformats.org/presentationml/2006/main" xmlns:c="http://schemas.openxmlformats.org/drawingml/2006/chart" xmlns:dgm="http://schemas.openxmlformats.org/drawingml/2006/diagram" xmlns:o="urn:schemas-microsoft-com:office:office" xmlns:v="urn:schemas-microsoft-com:vml" xmlns:pvml="urn:schemas-microsoft-com:office:powerpoint" xmlns:com="http://schemas.openxmlformats.org/drawingml/2006/compatibility" xmlns:p14="http://schemas.microsoft.com/office/powerpoint/2010/main" xmlns:p15="http://schemas.microsoft.com/office/powerpoint/2012/main" xmlns:ahyp="http://schemas.microsoft.com/office/drawing/2018/hyperlinkcolor" showMasterPhAnim="0" showMasterSp="0">
+<p:notes xmlns:a="http://schemas.openxmlformats.org/drawingml/2006/main" xmlns:r="http://schemas.openxmlformats.org/officeDocument/2006/relationships" xmlns:p="http://schemas.openxmlformats.org/presentationml/2006/main" showMasterSp="0" showMasterPhAnim="0">
   <p:cSld>
     <p:spTree>
       <p:nvGrpSpPr>
-        <p:cNvPr id="50" name="Shape 50"/>
+        <p:cNvPr id="1" name="Shape 50"/>
         <p:cNvGrpSpPr/>
         <p:nvPr/>
       </p:nvGrpSpPr>
@@ -721,20 +736,26 @@
       <p:sp>
         <p:nvSpPr>
           <p:cNvPr id="51" name="Google Shape;51;p:notes"/>
-          <p:cNvSpPr/>
+          <p:cNvSpPr>
+            <a:spLocks noGrp="1" noRot="1" noChangeAspect="1"/>
+          </p:cNvSpPr>
           <p:nvPr>
-            <p:ph idx="2" type="sldImg"/>
+            <p:ph type="sldImg" idx="2"/>
           </p:nvPr>
         </p:nvSpPr>
         <p:spPr>
           <a:xfrm>
-            <a:off x="381300" y="685800"/>
-            <a:ext cx="6096075" cy="3429000"/>
+            <a:off x="381000" y="685800"/>
+            <a:ext cx="6096000" cy="3429000"/>
           </a:xfrm>
           <a:custGeom>
-            <a:rect b="b" l="l" r="r" t="t"/>
+            <a:avLst/>
+            <a:gdLst/>
+            <a:ahLst/>
+            <a:cxnLst/>
+            <a:rect l="l" t="t" r="r" b="b"/>
             <a:pathLst>
-              <a:path extrusionOk="0" h="120000" w="120000">
+              <a:path w="120000" h="120000" extrusionOk="0">
                 <a:moveTo>
                   <a:pt x="0" y="0"/>
                 </a:moveTo>
@@ -756,9 +777,11 @@
       <p:sp>
         <p:nvSpPr>
           <p:cNvPr id="52" name="Google Shape;52;p:notes"/>
-          <p:cNvSpPr txBox="1"/>
+          <p:cNvSpPr txBox="1">
+            <a:spLocks noGrp="1"/>
+          </p:cNvSpPr>
           <p:nvPr>
-            <p:ph idx="1" type="body"/>
+            <p:ph type="body" idx="1"/>
           </p:nvPr>
         </p:nvSpPr>
         <p:spPr>
@@ -771,12 +794,12 @@
           </a:prstGeom>
         </p:spPr>
         <p:txBody>
-          <a:bodyPr anchorCtr="0" anchor="t" bIns="91425" lIns="91425" spcFirstLastPara="1" rIns="91425" wrap="square" tIns="91425">
+          <a:bodyPr spcFirstLastPara="1" wrap="square" lIns="91425" tIns="91425" rIns="91425" bIns="91425" anchor="t" anchorCtr="0">
             <a:noAutofit/>
           </a:bodyPr>
           <a:lstStyle/>
           <a:p>
-            <a:pPr indent="0" lvl="0" marL="0" rtl="0" algn="l">
+            <a:pPr marL="0" lvl="0" indent="0" algn="l" rtl="0">
               <a:spcBef>
                 <a:spcPts val="0"/>
               </a:spcBef>
@@ -785,9 +808,6 @@
               </a:spcAft>
               <a:buNone/>
             </a:pPr>
-            <a:r>
-              <a:t/>
-            </a:r>
             <a:endParaRPr/>
           </a:p>
         </p:txBody>
@@ -801,11 +821,11 @@
 </file>
 
 <file path=ppt/notesSlides/notesSlide2.xml><?xml version="1.0" encoding="utf-8"?>
-<p:notes xmlns:a="http://schemas.openxmlformats.org/drawingml/2006/main" xmlns:r="http://schemas.openxmlformats.org/officeDocument/2006/relationships" xmlns:mc="http://schemas.openxmlformats.org/markup-compatibility/2006" xmlns:mv="urn:schemas-microsoft-com:mac:vml" xmlns:p="http://schemas.openxmlformats.org/presentationml/2006/main" xmlns:c="http://schemas.openxmlformats.org/drawingml/2006/chart" xmlns:dgm="http://schemas.openxmlformats.org/drawingml/2006/diagram" xmlns:o="urn:schemas-microsoft-com:office:office" xmlns:v="urn:schemas-microsoft-com:vml" xmlns:pvml="urn:schemas-microsoft-com:office:powerpoint" xmlns:com="http://schemas.openxmlformats.org/drawingml/2006/compatibility" xmlns:p14="http://schemas.microsoft.com/office/powerpoint/2010/main" xmlns:p15="http://schemas.microsoft.com/office/powerpoint/2012/main" xmlns:ahyp="http://schemas.microsoft.com/office/drawing/2018/hyperlinkcolor" showMasterPhAnim="0" showMasterSp="0">
+<p:notes xmlns:a="http://schemas.openxmlformats.org/drawingml/2006/main" xmlns:r="http://schemas.openxmlformats.org/officeDocument/2006/relationships" xmlns:p="http://schemas.openxmlformats.org/presentationml/2006/main" showMasterSp="0" showMasterPhAnim="0">
   <p:cSld>
     <p:spTree>
       <p:nvGrpSpPr>
-        <p:cNvPr id="57" name="Shape 57"/>
+        <p:cNvPr id="1" name="Shape 57"/>
         <p:cNvGrpSpPr/>
         <p:nvPr/>
       </p:nvGrpSpPr>
@@ -820,20 +840,26 @@
       <p:sp>
         <p:nvSpPr>
           <p:cNvPr id="58" name="Google Shape;58;h781656fa7bbe7aee_0_0:notes"/>
-          <p:cNvSpPr/>
+          <p:cNvSpPr>
+            <a:spLocks noGrp="1" noRot="1" noChangeAspect="1"/>
+          </p:cNvSpPr>
           <p:nvPr>
-            <p:ph idx="2" type="sldImg"/>
+            <p:ph type="sldImg" idx="2"/>
           </p:nvPr>
         </p:nvSpPr>
         <p:spPr>
           <a:xfrm>
-            <a:off x="381300" y="685800"/>
+            <a:off x="381000" y="685800"/>
             <a:ext cx="6096000" cy="3429000"/>
           </a:xfrm>
           <a:custGeom>
-            <a:rect b="b" l="l" r="r" t="t"/>
+            <a:avLst/>
+            <a:gdLst/>
+            <a:ahLst/>
+            <a:cxnLst/>
+            <a:rect l="l" t="t" r="r" b="b"/>
             <a:pathLst>
-              <a:path extrusionOk="0" h="120000" w="120000">
+              <a:path w="120000" h="120000" extrusionOk="0">
                 <a:moveTo>
                   <a:pt x="0" y="0"/>
                 </a:moveTo>
@@ -855,9 +881,11 @@
       <p:sp>
         <p:nvSpPr>
           <p:cNvPr id="59" name="Google Shape;59;h781656fa7bbe7aee_0_0:notes"/>
-          <p:cNvSpPr txBox="1"/>
+          <p:cNvSpPr txBox="1">
+            <a:spLocks noGrp="1"/>
+          </p:cNvSpPr>
           <p:nvPr>
-            <p:ph idx="1" type="body"/>
+            <p:ph type="body" idx="1"/>
           </p:nvPr>
         </p:nvSpPr>
         <p:spPr>
@@ -870,12 +898,12 @@
           </a:prstGeom>
         </p:spPr>
         <p:txBody>
-          <a:bodyPr anchorCtr="0" anchor="t" bIns="91425" lIns="91425" spcFirstLastPara="1" rIns="91425" wrap="square" tIns="91425">
+          <a:bodyPr spcFirstLastPara="1" wrap="square" lIns="91425" tIns="91425" rIns="91425" bIns="91425" anchor="t" anchorCtr="0">
             <a:noAutofit/>
           </a:bodyPr>
           <a:lstStyle/>
           <a:p>
-            <a:pPr indent="0" lvl="0" marL="0" rtl="0" algn="l">
+            <a:pPr marL="0" lvl="0" indent="0" algn="l" rtl="0">
               <a:spcBef>
                 <a:spcPts val="0"/>
               </a:spcBef>
@@ -884,9 +912,6 @@
               </a:spcAft>
               <a:buNone/>
             </a:pPr>
-            <a:r>
-              <a:t/>
-            </a:r>
             <a:endParaRPr/>
           </a:p>
         </p:txBody>
@@ -900,11 +925,11 @@
 </file>
 
 <file path=ppt/notesSlides/notesSlide3.xml><?xml version="1.0" encoding="utf-8"?>
-<p:notes xmlns:a="http://schemas.openxmlformats.org/drawingml/2006/main" xmlns:r="http://schemas.openxmlformats.org/officeDocument/2006/relationships" xmlns:mc="http://schemas.openxmlformats.org/markup-compatibility/2006" xmlns:mv="urn:schemas-microsoft-com:mac:vml" xmlns:p="http://schemas.openxmlformats.org/presentationml/2006/main" xmlns:c="http://schemas.openxmlformats.org/drawingml/2006/chart" xmlns:dgm="http://schemas.openxmlformats.org/drawingml/2006/diagram" xmlns:o="urn:schemas-microsoft-com:office:office" xmlns:v="urn:schemas-microsoft-com:vml" xmlns:pvml="urn:schemas-microsoft-com:office:powerpoint" xmlns:com="http://schemas.openxmlformats.org/drawingml/2006/compatibility" xmlns:p14="http://schemas.microsoft.com/office/powerpoint/2010/main" xmlns:p15="http://schemas.microsoft.com/office/powerpoint/2012/main" xmlns:ahyp="http://schemas.microsoft.com/office/drawing/2018/hyperlinkcolor" showMasterPhAnim="0" showMasterSp="0">
+<p:notes xmlns:a="http://schemas.openxmlformats.org/drawingml/2006/main" xmlns:r="http://schemas.openxmlformats.org/officeDocument/2006/relationships" xmlns:p="http://schemas.openxmlformats.org/presentationml/2006/main" showMasterSp="0" showMasterPhAnim="0">
   <p:cSld>
     <p:spTree>
       <p:nvGrpSpPr>
-        <p:cNvPr id="72" name="Shape 72"/>
+        <p:cNvPr id="1" name="Shape 72"/>
         <p:cNvGrpSpPr/>
         <p:nvPr/>
       </p:nvGrpSpPr>
@@ -919,20 +944,26 @@
       <p:sp>
         <p:nvSpPr>
           <p:cNvPr id="73" name="Google Shape;73;h781656fa7bbe7aee_0_5:notes"/>
-          <p:cNvSpPr/>
+          <p:cNvSpPr>
+            <a:spLocks noGrp="1" noRot="1" noChangeAspect="1"/>
+          </p:cNvSpPr>
           <p:nvPr>
-            <p:ph idx="2" type="sldImg"/>
+            <p:ph type="sldImg" idx="2"/>
           </p:nvPr>
         </p:nvSpPr>
         <p:spPr>
           <a:xfrm>
-            <a:off x="381300" y="685800"/>
+            <a:off x="381000" y="685800"/>
             <a:ext cx="6096000" cy="3429000"/>
           </a:xfrm>
           <a:custGeom>
-            <a:rect b="b" l="l" r="r" t="t"/>
+            <a:avLst/>
+            <a:gdLst/>
+            <a:ahLst/>
+            <a:cxnLst/>
+            <a:rect l="l" t="t" r="r" b="b"/>
             <a:pathLst>
-              <a:path extrusionOk="0" h="120000" w="120000">
+              <a:path w="120000" h="120000" extrusionOk="0">
                 <a:moveTo>
                   <a:pt x="0" y="0"/>
                 </a:moveTo>
@@ -954,9 +985,11 @@
       <p:sp>
         <p:nvSpPr>
           <p:cNvPr id="74" name="Google Shape;74;h781656fa7bbe7aee_0_5:notes"/>
-          <p:cNvSpPr txBox="1"/>
+          <p:cNvSpPr txBox="1">
+            <a:spLocks noGrp="1"/>
+          </p:cNvSpPr>
           <p:nvPr>
-            <p:ph idx="1" type="body"/>
+            <p:ph type="body" idx="1"/>
           </p:nvPr>
         </p:nvSpPr>
         <p:spPr>
@@ -969,12 +1002,12 @@
           </a:prstGeom>
         </p:spPr>
         <p:txBody>
-          <a:bodyPr anchorCtr="0" anchor="t" bIns="91425" lIns="91425" spcFirstLastPara="1" rIns="91425" wrap="square" tIns="91425">
+          <a:bodyPr spcFirstLastPara="1" wrap="square" lIns="91425" tIns="91425" rIns="91425" bIns="91425" anchor="t" anchorCtr="0">
             <a:noAutofit/>
           </a:bodyPr>
           <a:lstStyle/>
           <a:p>
-            <a:pPr indent="0" lvl="0" marL="0" rtl="0" algn="l">
+            <a:pPr marL="0" lvl="0" indent="0" algn="l" rtl="0">
               <a:spcBef>
                 <a:spcPts val="0"/>
               </a:spcBef>
@@ -983,9 +1016,6 @@
               </a:spcAft>
               <a:buNone/>
             </a:pPr>
-            <a:r>
-              <a:t/>
-            </a:r>
             <a:endParaRPr/>
           </a:p>
         </p:txBody>
@@ -999,11 +1029,11 @@
 </file>
 
 <file path=ppt/notesSlides/notesSlide4.xml><?xml version="1.0" encoding="utf-8"?>
-<p:notes xmlns:a="http://schemas.openxmlformats.org/drawingml/2006/main" xmlns:r="http://schemas.openxmlformats.org/officeDocument/2006/relationships" xmlns:mc="http://schemas.openxmlformats.org/markup-compatibility/2006" xmlns:mv="urn:schemas-microsoft-com:mac:vml" xmlns:p="http://schemas.openxmlformats.org/presentationml/2006/main" xmlns:c="http://schemas.openxmlformats.org/drawingml/2006/chart" xmlns:dgm="http://schemas.openxmlformats.org/drawingml/2006/diagram" xmlns:o="urn:schemas-microsoft-com:office:office" xmlns:v="urn:schemas-microsoft-com:vml" xmlns:pvml="urn:schemas-microsoft-com:office:powerpoint" xmlns:com="http://schemas.openxmlformats.org/drawingml/2006/compatibility" xmlns:p14="http://schemas.microsoft.com/office/powerpoint/2010/main" xmlns:p15="http://schemas.microsoft.com/office/powerpoint/2012/main" xmlns:ahyp="http://schemas.microsoft.com/office/drawing/2018/hyperlinkcolor" showMasterPhAnim="0" showMasterSp="0">
+<p:notes xmlns:a="http://schemas.openxmlformats.org/drawingml/2006/main" xmlns:r="http://schemas.openxmlformats.org/officeDocument/2006/relationships" xmlns:p="http://schemas.openxmlformats.org/presentationml/2006/main" showMasterSp="0" showMasterPhAnim="0">
   <p:cSld>
     <p:spTree>
       <p:nvGrpSpPr>
-        <p:cNvPr id="85" name="Shape 85"/>
+        <p:cNvPr id="1" name="Shape 85"/>
         <p:cNvGrpSpPr/>
         <p:nvPr/>
       </p:nvGrpSpPr>
@@ -1018,20 +1048,26 @@
       <p:sp>
         <p:nvSpPr>
           <p:cNvPr id="86" name="Google Shape;86;h781656fa7bbe7aee_0_10:notes"/>
-          <p:cNvSpPr/>
+          <p:cNvSpPr>
+            <a:spLocks noGrp="1" noRot="1" noChangeAspect="1"/>
+          </p:cNvSpPr>
           <p:nvPr>
-            <p:ph idx="2" type="sldImg"/>
+            <p:ph type="sldImg" idx="2"/>
           </p:nvPr>
         </p:nvSpPr>
         <p:spPr>
           <a:xfrm>
-            <a:off x="381300" y="685800"/>
+            <a:off x="381000" y="685800"/>
             <a:ext cx="6096000" cy="3429000"/>
           </a:xfrm>
           <a:custGeom>
-            <a:rect b="b" l="l" r="r" t="t"/>
+            <a:avLst/>
+            <a:gdLst/>
+            <a:ahLst/>
+            <a:cxnLst/>
+            <a:rect l="l" t="t" r="r" b="b"/>
             <a:pathLst>
-              <a:path extrusionOk="0" h="120000" w="120000">
+              <a:path w="120000" h="120000" extrusionOk="0">
                 <a:moveTo>
                   <a:pt x="0" y="0"/>
                 </a:moveTo>
@@ -1053,9 +1089,11 @@
       <p:sp>
         <p:nvSpPr>
           <p:cNvPr id="87" name="Google Shape;87;h781656fa7bbe7aee_0_10:notes"/>
-          <p:cNvSpPr txBox="1"/>
+          <p:cNvSpPr txBox="1">
+            <a:spLocks noGrp="1"/>
+          </p:cNvSpPr>
           <p:nvPr>
-            <p:ph idx="1" type="body"/>
+            <p:ph type="body" idx="1"/>
           </p:nvPr>
         </p:nvSpPr>
         <p:spPr>
@@ -1068,12 +1106,12 @@
           </a:prstGeom>
         </p:spPr>
         <p:txBody>
-          <a:bodyPr anchorCtr="0" anchor="t" bIns="91425" lIns="91425" spcFirstLastPara="1" rIns="91425" wrap="square" tIns="91425">
+          <a:bodyPr spcFirstLastPara="1" wrap="square" lIns="91425" tIns="91425" rIns="91425" bIns="91425" anchor="t" anchorCtr="0">
             <a:noAutofit/>
           </a:bodyPr>
           <a:lstStyle/>
           <a:p>
-            <a:pPr indent="0" lvl="0" marL="0" rtl="0" algn="l">
+            <a:pPr marL="0" lvl="0" indent="0" algn="l" rtl="0">
               <a:spcBef>
                 <a:spcPts val="0"/>
               </a:spcBef>
@@ -1082,9 +1120,6 @@
               </a:spcAft>
               <a:buNone/>
             </a:pPr>
-            <a:r>
-              <a:t/>
-            </a:r>
             <a:endParaRPr/>
           </a:p>
         </p:txBody>
@@ -1098,11 +1133,11 @@
 </file>
 
 <file path=ppt/notesSlides/notesSlide5.xml><?xml version="1.0" encoding="utf-8"?>
-<p:notes xmlns:a="http://schemas.openxmlformats.org/drawingml/2006/main" xmlns:r="http://schemas.openxmlformats.org/officeDocument/2006/relationships" xmlns:mc="http://schemas.openxmlformats.org/markup-compatibility/2006" xmlns:mv="urn:schemas-microsoft-com:mac:vml" xmlns:p="http://schemas.openxmlformats.org/presentationml/2006/main" xmlns:c="http://schemas.openxmlformats.org/drawingml/2006/chart" xmlns:dgm="http://schemas.openxmlformats.org/drawingml/2006/diagram" xmlns:o="urn:schemas-microsoft-com:office:office" xmlns:v="urn:schemas-microsoft-com:vml" xmlns:pvml="urn:schemas-microsoft-com:office:powerpoint" xmlns:com="http://schemas.openxmlformats.org/drawingml/2006/compatibility" xmlns:p14="http://schemas.microsoft.com/office/powerpoint/2010/main" xmlns:p15="http://schemas.microsoft.com/office/powerpoint/2012/main" xmlns:ahyp="http://schemas.microsoft.com/office/drawing/2018/hyperlinkcolor" showMasterPhAnim="0" showMasterSp="0">
+<p:notes xmlns:a="http://schemas.openxmlformats.org/drawingml/2006/main" xmlns:r="http://schemas.openxmlformats.org/officeDocument/2006/relationships" xmlns:p="http://schemas.openxmlformats.org/presentationml/2006/main" showMasterSp="0" showMasterPhAnim="0">
   <p:cSld>
     <p:spTree>
       <p:nvGrpSpPr>
-        <p:cNvPr id="95" name="Shape 95"/>
+        <p:cNvPr id="1" name="Shape 95"/>
         <p:cNvGrpSpPr/>
         <p:nvPr/>
       </p:nvGrpSpPr>
@@ -1117,20 +1152,26 @@
       <p:sp>
         <p:nvSpPr>
           <p:cNvPr id="96" name="Google Shape;96;h776e57e1fef725df_2_36:notes"/>
-          <p:cNvSpPr/>
+          <p:cNvSpPr>
+            <a:spLocks noGrp="1" noRot="1" noChangeAspect="1"/>
+          </p:cNvSpPr>
           <p:nvPr>
-            <p:ph idx="2" type="sldImg"/>
+            <p:ph type="sldImg" idx="2"/>
           </p:nvPr>
         </p:nvSpPr>
         <p:spPr>
           <a:xfrm>
-            <a:off x="381300" y="685800"/>
+            <a:off x="381000" y="685800"/>
             <a:ext cx="6096000" cy="3429000"/>
           </a:xfrm>
           <a:custGeom>
-            <a:rect b="b" l="l" r="r" t="t"/>
+            <a:avLst/>
+            <a:gdLst/>
+            <a:ahLst/>
+            <a:cxnLst/>
+            <a:rect l="l" t="t" r="r" b="b"/>
             <a:pathLst>
-              <a:path extrusionOk="0" h="120000" w="120000">
+              <a:path w="120000" h="120000" extrusionOk="0">
                 <a:moveTo>
                   <a:pt x="0" y="0"/>
                 </a:moveTo>
@@ -1152,9 +1193,11 @@
       <p:sp>
         <p:nvSpPr>
           <p:cNvPr id="97" name="Google Shape;97;h776e57e1fef725df_2_36:notes"/>
-          <p:cNvSpPr txBox="1"/>
+          <p:cNvSpPr txBox="1">
+            <a:spLocks noGrp="1"/>
+          </p:cNvSpPr>
           <p:nvPr>
-            <p:ph idx="1" type="body"/>
+            <p:ph type="body" idx="1"/>
           </p:nvPr>
         </p:nvSpPr>
         <p:spPr>
@@ -1167,12 +1210,12 @@
           </a:prstGeom>
         </p:spPr>
         <p:txBody>
-          <a:bodyPr anchorCtr="0" anchor="t" bIns="91425" lIns="91425" spcFirstLastPara="1" rIns="91425" wrap="square" tIns="91425">
+          <a:bodyPr spcFirstLastPara="1" wrap="square" lIns="91425" tIns="91425" rIns="91425" bIns="91425" anchor="t" anchorCtr="0">
             <a:noAutofit/>
           </a:bodyPr>
           <a:lstStyle/>
           <a:p>
-            <a:pPr indent="0" lvl="0" marL="0" rtl="0" algn="l">
+            <a:pPr marL="0" lvl="0" indent="0" algn="l" rtl="0">
               <a:spcBef>
                 <a:spcPts val="0"/>
               </a:spcBef>
@@ -1181,9 +1224,6 @@
               </a:spcAft>
               <a:buNone/>
             </a:pPr>
-            <a:r>
-              <a:t/>
-            </a:r>
             <a:endParaRPr/>
           </a:p>
         </p:txBody>
@@ -1197,11 +1237,11 @@
 </file>
 
 <file path=ppt/notesSlides/notesSlide6.xml><?xml version="1.0" encoding="utf-8"?>
-<p:notes xmlns:a="http://schemas.openxmlformats.org/drawingml/2006/main" xmlns:r="http://schemas.openxmlformats.org/officeDocument/2006/relationships" xmlns:mc="http://schemas.openxmlformats.org/markup-compatibility/2006" xmlns:mv="urn:schemas-microsoft-com:mac:vml" xmlns:p="http://schemas.openxmlformats.org/presentationml/2006/main" xmlns:c="http://schemas.openxmlformats.org/drawingml/2006/chart" xmlns:dgm="http://schemas.openxmlformats.org/drawingml/2006/diagram" xmlns:o="urn:schemas-microsoft-com:office:office" xmlns:v="urn:schemas-microsoft-com:vml" xmlns:pvml="urn:schemas-microsoft-com:office:powerpoint" xmlns:com="http://schemas.openxmlformats.org/drawingml/2006/compatibility" xmlns:p14="http://schemas.microsoft.com/office/powerpoint/2010/main" xmlns:p15="http://schemas.microsoft.com/office/powerpoint/2012/main" xmlns:ahyp="http://schemas.microsoft.com/office/drawing/2018/hyperlinkcolor" showMasterPhAnim="0" showMasterSp="0">
+<p:notes xmlns:a="http://schemas.openxmlformats.org/drawingml/2006/main" xmlns:r="http://schemas.openxmlformats.org/officeDocument/2006/relationships" xmlns:p="http://schemas.openxmlformats.org/presentationml/2006/main" showMasterSp="0" showMasterPhAnim="0">
   <p:cSld>
     <p:spTree>
       <p:nvGrpSpPr>
-        <p:cNvPr id="105" name="Shape 105"/>
+        <p:cNvPr id="1" name="Shape 105"/>
         <p:cNvGrpSpPr/>
         <p:nvPr/>
       </p:nvGrpSpPr>
@@ -1216,20 +1256,26 @@
       <p:sp>
         <p:nvSpPr>
           <p:cNvPr id="106" name="Google Shape;106;h776e57e1fef725df_2_57:notes"/>
-          <p:cNvSpPr/>
+          <p:cNvSpPr>
+            <a:spLocks noGrp="1" noRot="1" noChangeAspect="1"/>
+          </p:cNvSpPr>
           <p:nvPr>
-            <p:ph idx="2" type="sldImg"/>
+            <p:ph type="sldImg" idx="2"/>
           </p:nvPr>
         </p:nvSpPr>
         <p:spPr>
           <a:xfrm>
-            <a:off x="381300" y="685800"/>
+            <a:off x="381000" y="685800"/>
             <a:ext cx="6096000" cy="3429000"/>
           </a:xfrm>
           <a:custGeom>
-            <a:rect b="b" l="l" r="r" t="t"/>
+            <a:avLst/>
+            <a:gdLst/>
+            <a:ahLst/>
+            <a:cxnLst/>
+            <a:rect l="l" t="t" r="r" b="b"/>
             <a:pathLst>
-              <a:path extrusionOk="0" h="120000" w="120000">
+              <a:path w="120000" h="120000" extrusionOk="0">
                 <a:moveTo>
                   <a:pt x="0" y="0"/>
                 </a:moveTo>
@@ -1251,9 +1297,11 @@
       <p:sp>
         <p:nvSpPr>
           <p:cNvPr id="107" name="Google Shape;107;h776e57e1fef725df_2_57:notes"/>
-          <p:cNvSpPr txBox="1"/>
+          <p:cNvSpPr txBox="1">
+            <a:spLocks noGrp="1"/>
+          </p:cNvSpPr>
           <p:nvPr>
-            <p:ph idx="1" type="body"/>
+            <p:ph type="body" idx="1"/>
           </p:nvPr>
         </p:nvSpPr>
         <p:spPr>
@@ -1266,12 +1314,12 @@
           </a:prstGeom>
         </p:spPr>
         <p:txBody>
-          <a:bodyPr anchorCtr="0" anchor="t" bIns="91425" lIns="91425" spcFirstLastPara="1" rIns="91425" wrap="square" tIns="91425">
+          <a:bodyPr spcFirstLastPara="1" wrap="square" lIns="91425" tIns="91425" rIns="91425" bIns="91425" anchor="t" anchorCtr="0">
             <a:noAutofit/>
           </a:bodyPr>
           <a:lstStyle/>
           <a:p>
-            <a:pPr indent="0" lvl="0" marL="0" rtl="0" algn="l">
+            <a:pPr marL="0" lvl="0" indent="0" algn="l" rtl="0">
               <a:spcBef>
                 <a:spcPts val="0"/>
               </a:spcBef>
@@ -1280,9 +1328,6 @@
               </a:spcAft>
               <a:buNone/>
             </a:pPr>
-            <a:r>
-              <a:t/>
-            </a:r>
             <a:endParaRPr/>
           </a:p>
         </p:txBody>
@@ -1296,11 +1341,11 @@
 </file>
 
 <file path=ppt/notesSlides/notesSlide7.xml><?xml version="1.0" encoding="utf-8"?>
-<p:notes xmlns:a="http://schemas.openxmlformats.org/drawingml/2006/main" xmlns:r="http://schemas.openxmlformats.org/officeDocument/2006/relationships" xmlns:mc="http://schemas.openxmlformats.org/markup-compatibility/2006" xmlns:mv="urn:schemas-microsoft-com:mac:vml" xmlns:p="http://schemas.openxmlformats.org/presentationml/2006/main" xmlns:c="http://schemas.openxmlformats.org/drawingml/2006/chart" xmlns:dgm="http://schemas.openxmlformats.org/drawingml/2006/diagram" xmlns:o="urn:schemas-microsoft-com:office:office" xmlns:v="urn:schemas-microsoft-com:vml" xmlns:pvml="urn:schemas-microsoft-com:office:powerpoint" xmlns:com="http://schemas.openxmlformats.org/drawingml/2006/compatibility" xmlns:p14="http://schemas.microsoft.com/office/powerpoint/2010/main" xmlns:p15="http://schemas.microsoft.com/office/powerpoint/2012/main" xmlns:ahyp="http://schemas.microsoft.com/office/drawing/2018/hyperlinkcolor" showMasterPhAnim="0" showMasterSp="0">
+<p:notes xmlns:a="http://schemas.openxmlformats.org/drawingml/2006/main" xmlns:r="http://schemas.openxmlformats.org/officeDocument/2006/relationships" xmlns:p="http://schemas.openxmlformats.org/presentationml/2006/main" showMasterSp="0" showMasterPhAnim="0">
   <p:cSld>
     <p:spTree>
       <p:nvGrpSpPr>
-        <p:cNvPr id="115" name="Shape 115"/>
+        <p:cNvPr id="1" name="Shape 115"/>
         <p:cNvGrpSpPr/>
         <p:nvPr/>
       </p:nvGrpSpPr>
@@ -1315,20 +1360,26 @@
       <p:sp>
         <p:nvSpPr>
           <p:cNvPr id="116" name="Google Shape;116;h433ea73c57905e34_8_7:notes"/>
-          <p:cNvSpPr/>
+          <p:cNvSpPr>
+            <a:spLocks noGrp="1" noRot="1" noChangeAspect="1"/>
+          </p:cNvSpPr>
           <p:nvPr>
-            <p:ph idx="2" type="sldImg"/>
+            <p:ph type="sldImg" idx="2"/>
           </p:nvPr>
         </p:nvSpPr>
         <p:spPr>
           <a:xfrm>
-            <a:off x="381300" y="685800"/>
+            <a:off x="381000" y="685800"/>
             <a:ext cx="6096000" cy="3429000"/>
           </a:xfrm>
           <a:custGeom>
-            <a:rect b="b" l="l" r="r" t="t"/>
+            <a:avLst/>
+            <a:gdLst/>
+            <a:ahLst/>
+            <a:cxnLst/>
+            <a:rect l="l" t="t" r="r" b="b"/>
             <a:pathLst>
-              <a:path extrusionOk="0" h="120000" w="120000">
+              <a:path w="120000" h="120000" extrusionOk="0">
                 <a:moveTo>
                   <a:pt x="0" y="0"/>
                 </a:moveTo>
@@ -1350,9 +1401,11 @@
       <p:sp>
         <p:nvSpPr>
           <p:cNvPr id="117" name="Google Shape;117;h433ea73c57905e34_8_7:notes"/>
-          <p:cNvSpPr txBox="1"/>
+          <p:cNvSpPr txBox="1">
+            <a:spLocks noGrp="1"/>
+          </p:cNvSpPr>
           <p:nvPr>
-            <p:ph idx="1" type="body"/>
+            <p:ph type="body" idx="1"/>
           </p:nvPr>
         </p:nvSpPr>
         <p:spPr>
@@ -1365,12 +1418,12 @@
           </a:prstGeom>
         </p:spPr>
         <p:txBody>
-          <a:bodyPr anchorCtr="0" anchor="t" bIns="91425" lIns="91425" spcFirstLastPara="1" rIns="91425" wrap="square" tIns="91425">
+          <a:bodyPr spcFirstLastPara="1" wrap="square" lIns="91425" tIns="91425" rIns="91425" bIns="91425" anchor="t" anchorCtr="0">
             <a:noAutofit/>
           </a:bodyPr>
           <a:lstStyle/>
           <a:p>
-            <a:pPr indent="0" lvl="0" marL="0" rtl="0" algn="l">
+            <a:pPr marL="0" lvl="0" indent="0" algn="l" rtl="0">
               <a:spcBef>
                 <a:spcPts val="0"/>
               </a:spcBef>
@@ -1379,9 +1432,6 @@
               </a:spcAft>
               <a:buNone/>
             </a:pPr>
-            <a:r>
-              <a:t/>
-            </a:r>
             <a:endParaRPr/>
           </a:p>
         </p:txBody>
@@ -1395,11 +1445,11 @@
 </file>
 
 <file path=ppt/slideLayouts/slideLayout1.xml><?xml version="1.0" encoding="utf-8"?>
-<p:sldLayout xmlns:a="http://schemas.openxmlformats.org/drawingml/2006/main" xmlns:r="http://schemas.openxmlformats.org/officeDocument/2006/relationships" xmlns:mc="http://schemas.openxmlformats.org/markup-compatibility/2006" xmlns:mv="urn:schemas-microsoft-com:mac:vml" xmlns:p="http://schemas.openxmlformats.org/presentationml/2006/main" xmlns:c="http://schemas.openxmlformats.org/drawingml/2006/chart" xmlns:dgm="http://schemas.openxmlformats.org/drawingml/2006/diagram" xmlns:o="urn:schemas-microsoft-com:office:office" xmlns:v="urn:schemas-microsoft-com:vml" xmlns:pvml="urn:schemas-microsoft-com:office:powerpoint" xmlns:com="http://schemas.openxmlformats.org/drawingml/2006/compatibility" xmlns:p14="http://schemas.microsoft.com/office/powerpoint/2010/main" xmlns:p15="http://schemas.microsoft.com/office/powerpoint/2012/main" xmlns:ahyp="http://schemas.microsoft.com/office/drawing/2018/hyperlinkcolor" matchingName="Title slide" type="title">
+<p:sldLayout xmlns:a="http://schemas.openxmlformats.org/drawingml/2006/main" xmlns:r="http://schemas.openxmlformats.org/officeDocument/2006/relationships" xmlns:p="http://schemas.openxmlformats.org/presentationml/2006/main" matchingName="Title slide" type="title">
   <p:cSld name="TITLE">
     <p:spTree>
       <p:nvGrpSpPr>
-        <p:cNvPr id="9" name="Shape 9"/>
+        <p:cNvPr id="1" name="Shape 9"/>
         <p:cNvGrpSpPr/>
         <p:nvPr/>
       </p:nvGrpSpPr>
@@ -1414,7 +1464,9 @@
       <p:sp>
         <p:nvSpPr>
           <p:cNvPr id="10" name="Google Shape;10;p2"/>
-          <p:cNvSpPr txBox="1"/>
+          <p:cNvSpPr txBox="1">
+            <a:spLocks noGrp="1"/>
+          </p:cNvSpPr>
           <p:nvPr>
             <p:ph type="ctrTitle"/>
           </p:nvPr>
@@ -1429,7 +1481,7 @@
           </a:prstGeom>
         </p:spPr>
         <p:txBody>
-          <a:bodyPr anchorCtr="0" anchor="b" bIns="91425" lIns="91425" spcFirstLastPara="1" rIns="91425" wrap="square" tIns="91425">
+          <a:bodyPr spcFirstLastPara="1" wrap="square" lIns="91425" tIns="91425" rIns="91425" bIns="91425" anchor="b" anchorCtr="0">
             <a:normAutofit/>
           </a:bodyPr>
           <a:lstStyle>
@@ -1533,15 +1585,19 @@
               <a:defRPr sz="5200"/>
             </a:lvl9pPr>
           </a:lstStyle>
-          <a:p/>
+          <a:p>
+            <a:endParaRPr/>
+          </a:p>
         </p:txBody>
       </p:sp>
       <p:sp>
         <p:nvSpPr>
           <p:cNvPr id="11" name="Google Shape;11;p2"/>
-          <p:cNvSpPr txBox="1"/>
+          <p:cNvSpPr txBox="1">
+            <a:spLocks noGrp="1"/>
+          </p:cNvSpPr>
           <p:nvPr>
-            <p:ph idx="1" type="subTitle"/>
+            <p:ph type="subTitle" idx="1"/>
           </p:nvPr>
         </p:nvSpPr>
         <p:spPr>
@@ -1554,7 +1610,7 @@
           </a:prstGeom>
         </p:spPr>
         <p:txBody>
-          <a:bodyPr anchorCtr="0" anchor="t" bIns="91425" lIns="91425" spcFirstLastPara="1" rIns="91425" wrap="square" tIns="91425">
+          <a:bodyPr spcFirstLastPara="1" wrap="square" lIns="91425" tIns="91425" rIns="91425" bIns="91425" anchor="t" anchorCtr="0">
             <a:normAutofit/>
           </a:bodyPr>
           <a:lstStyle>
@@ -1685,15 +1741,19 @@
               <a:defRPr sz="2800"/>
             </a:lvl9pPr>
           </a:lstStyle>
-          <a:p/>
+          <a:p>
+            <a:endParaRPr/>
+          </a:p>
         </p:txBody>
       </p:sp>
       <p:sp>
         <p:nvSpPr>
           <p:cNvPr id="12" name="Google Shape;12;p2"/>
-          <p:cNvSpPr txBox="1"/>
+          <p:cNvSpPr txBox="1">
+            <a:spLocks noGrp="1"/>
+          </p:cNvSpPr>
           <p:nvPr>
-            <p:ph idx="12" type="sldNum"/>
+            <p:ph type="sldNum" idx="12"/>
           </p:nvPr>
         </p:nvSpPr>
         <p:spPr>
@@ -1706,7 +1766,7 @@
           </a:prstGeom>
         </p:spPr>
         <p:txBody>
-          <a:bodyPr anchorCtr="0" anchor="ctr" bIns="91425" lIns="91425" spcFirstLastPara="1" rIns="91425" wrap="square" tIns="91425">
+          <a:bodyPr spcFirstLastPara="1" wrap="square" lIns="91425" tIns="91425" rIns="91425" bIns="91425" anchor="ctr" anchorCtr="0">
             <a:normAutofit/>
           </a:bodyPr>
           <a:lstStyle>
@@ -1748,7 +1808,7 @@
             </a:lvl9pPr>
           </a:lstStyle>
           <a:p>
-            <a:pPr indent="0" lvl="0" marL="0" rtl="0" algn="r">
+            <a:pPr marL="0" lvl="0" indent="0" algn="r" rtl="0">
               <a:spcBef>
                 <a:spcPts val="0"/>
               </a:spcBef>
@@ -1774,11 +1834,11 @@
 </file>
 
 <file path=ppt/slideLayouts/slideLayout10.xml><?xml version="1.0" encoding="utf-8"?>
-<p:sldLayout xmlns:a="http://schemas.openxmlformats.org/drawingml/2006/main" xmlns:r="http://schemas.openxmlformats.org/officeDocument/2006/relationships" xmlns:mc="http://schemas.openxmlformats.org/markup-compatibility/2006" xmlns:mv="urn:schemas-microsoft-com:mac:vml" xmlns:p="http://schemas.openxmlformats.org/presentationml/2006/main" xmlns:c="http://schemas.openxmlformats.org/drawingml/2006/chart" xmlns:dgm="http://schemas.openxmlformats.org/drawingml/2006/diagram" xmlns:o="urn:schemas-microsoft-com:office:office" xmlns:v="urn:schemas-microsoft-com:vml" xmlns:pvml="urn:schemas-microsoft-com:office:powerpoint" xmlns:com="http://schemas.openxmlformats.org/drawingml/2006/compatibility" xmlns:p14="http://schemas.microsoft.com/office/powerpoint/2010/main" xmlns:p15="http://schemas.microsoft.com/office/powerpoint/2012/main" xmlns:ahyp="http://schemas.microsoft.com/office/drawing/2018/hyperlinkcolor" matchingName="Big number">
+<p:sldLayout xmlns:a="http://schemas.openxmlformats.org/drawingml/2006/main" xmlns:r="http://schemas.openxmlformats.org/officeDocument/2006/relationships" xmlns:p="http://schemas.openxmlformats.org/presentationml/2006/main" matchingName="Big number">
   <p:cSld name="BIG_NUMBER">
     <p:spTree>
       <p:nvGrpSpPr>
-        <p:cNvPr id="44" name="Shape 44"/>
+        <p:cNvPr id="1" name="Shape 44"/>
         <p:cNvGrpSpPr/>
         <p:nvPr/>
       </p:nvGrpSpPr>
@@ -1793,9 +1853,11 @@
       <p:sp>
         <p:nvSpPr>
           <p:cNvPr id="45" name="Google Shape;45;p11"/>
-          <p:cNvSpPr txBox="1"/>
+          <p:cNvSpPr txBox="1">
+            <a:spLocks noGrp="1"/>
+          </p:cNvSpPr>
           <p:nvPr>
-            <p:ph hasCustomPrompt="1" type="title"/>
+            <p:ph type="title" hasCustomPrompt="1"/>
           </p:nvPr>
         </p:nvSpPr>
         <p:spPr>
@@ -1808,7 +1870,7 @@
           </a:prstGeom>
         </p:spPr>
         <p:txBody>
-          <a:bodyPr anchorCtr="0" anchor="b" bIns="91425" lIns="91425" spcFirstLastPara="1" rIns="91425" wrap="square" tIns="91425">
+          <a:bodyPr spcFirstLastPara="1" wrap="square" lIns="91425" tIns="91425" rIns="91425" bIns="91425" anchor="b" anchorCtr="0">
             <a:normAutofit/>
           </a:bodyPr>
           <a:lstStyle>
@@ -1922,9 +1984,11 @@
       <p:sp>
         <p:nvSpPr>
           <p:cNvPr id="46" name="Google Shape;46;p11"/>
-          <p:cNvSpPr txBox="1"/>
+          <p:cNvSpPr txBox="1">
+            <a:spLocks noGrp="1"/>
+          </p:cNvSpPr>
           <p:nvPr>
-            <p:ph idx="1" type="body"/>
+            <p:ph type="body" idx="1"/>
           </p:nvPr>
         </p:nvSpPr>
         <p:spPr>
@@ -1937,11 +2001,11 @@
           </a:prstGeom>
         </p:spPr>
         <p:txBody>
-          <a:bodyPr anchorCtr="0" anchor="t" bIns="91425" lIns="91425" spcFirstLastPara="1" rIns="91425" wrap="square" tIns="91425">
+          <a:bodyPr spcFirstLastPara="1" wrap="square" lIns="91425" tIns="91425" rIns="91425" bIns="91425" anchor="t" anchorCtr="0">
             <a:normAutofit/>
           </a:bodyPr>
           <a:lstStyle>
-            <a:lvl1pPr indent="-342900" lvl="0" marL="457200" algn="ctr">
+            <a:lvl1pPr marL="457200" lvl="0" indent="-342900" algn="ctr">
               <a:spcBef>
                 <a:spcPts val="0"/>
               </a:spcBef>
@@ -1952,7 +2016,7 @@
               <a:buChar char="●"/>
               <a:defRPr/>
             </a:lvl1pPr>
-            <a:lvl2pPr indent="-317500" lvl="1" marL="914400" algn="ctr">
+            <a:lvl2pPr marL="914400" lvl="1" indent="-317500" algn="ctr">
               <a:spcBef>
                 <a:spcPts val="0"/>
               </a:spcBef>
@@ -1963,7 +2027,7 @@
               <a:buChar char="○"/>
               <a:defRPr/>
             </a:lvl2pPr>
-            <a:lvl3pPr indent="-317500" lvl="2" marL="1371600" algn="ctr">
+            <a:lvl3pPr marL="1371600" lvl="2" indent="-317500" algn="ctr">
               <a:spcBef>
                 <a:spcPts val="0"/>
               </a:spcBef>
@@ -1974,7 +2038,7 @@
               <a:buChar char="■"/>
               <a:defRPr/>
             </a:lvl3pPr>
-            <a:lvl4pPr indent="-317500" lvl="3" marL="1828800" algn="ctr">
+            <a:lvl4pPr marL="1828800" lvl="3" indent="-317500" algn="ctr">
               <a:spcBef>
                 <a:spcPts val="0"/>
               </a:spcBef>
@@ -1985,7 +2049,7 @@
               <a:buChar char="●"/>
               <a:defRPr/>
             </a:lvl4pPr>
-            <a:lvl5pPr indent="-317500" lvl="4" marL="2286000" algn="ctr">
+            <a:lvl5pPr marL="2286000" lvl="4" indent="-317500" algn="ctr">
               <a:spcBef>
                 <a:spcPts val="0"/>
               </a:spcBef>
@@ -1996,7 +2060,7 @@
               <a:buChar char="○"/>
               <a:defRPr/>
             </a:lvl5pPr>
-            <a:lvl6pPr indent="-317500" lvl="5" marL="2743200" algn="ctr">
+            <a:lvl6pPr marL="2743200" lvl="5" indent="-317500" algn="ctr">
               <a:spcBef>
                 <a:spcPts val="0"/>
               </a:spcBef>
@@ -2007,7 +2071,7 @@
               <a:buChar char="■"/>
               <a:defRPr/>
             </a:lvl6pPr>
-            <a:lvl7pPr indent="-317500" lvl="6" marL="3200400" algn="ctr">
+            <a:lvl7pPr marL="3200400" lvl="6" indent="-317500" algn="ctr">
               <a:spcBef>
                 <a:spcPts val="0"/>
               </a:spcBef>
@@ -2018,7 +2082,7 @@
               <a:buChar char="●"/>
               <a:defRPr/>
             </a:lvl7pPr>
-            <a:lvl8pPr indent="-317500" lvl="7" marL="3657600" algn="ctr">
+            <a:lvl8pPr marL="3657600" lvl="7" indent="-317500" algn="ctr">
               <a:spcBef>
                 <a:spcPts val="0"/>
               </a:spcBef>
@@ -2029,7 +2093,7 @@
               <a:buChar char="○"/>
               <a:defRPr/>
             </a:lvl8pPr>
-            <a:lvl9pPr indent="-317500" lvl="8" marL="4114800" algn="ctr">
+            <a:lvl9pPr marL="4114800" lvl="8" indent="-317500" algn="ctr">
               <a:spcBef>
                 <a:spcPts val="0"/>
               </a:spcBef>
@@ -2041,15 +2105,19 @@
               <a:defRPr/>
             </a:lvl9pPr>
           </a:lstStyle>
-          <a:p/>
+          <a:p>
+            <a:endParaRPr/>
+          </a:p>
         </p:txBody>
       </p:sp>
       <p:sp>
         <p:nvSpPr>
           <p:cNvPr id="47" name="Google Shape;47;p11"/>
-          <p:cNvSpPr txBox="1"/>
+          <p:cNvSpPr txBox="1">
+            <a:spLocks noGrp="1"/>
+          </p:cNvSpPr>
           <p:nvPr>
-            <p:ph idx="12" type="sldNum"/>
+            <p:ph type="sldNum" idx="12"/>
           </p:nvPr>
         </p:nvSpPr>
         <p:spPr>
@@ -2062,7 +2130,7 @@
           </a:prstGeom>
         </p:spPr>
         <p:txBody>
-          <a:bodyPr anchorCtr="0" anchor="ctr" bIns="91425" lIns="91425" spcFirstLastPara="1" rIns="91425" wrap="square" tIns="91425">
+          <a:bodyPr spcFirstLastPara="1" wrap="square" lIns="91425" tIns="91425" rIns="91425" bIns="91425" anchor="ctr" anchorCtr="0">
             <a:normAutofit/>
           </a:bodyPr>
           <a:lstStyle>
@@ -2104,7 +2172,7 @@
             </a:lvl9pPr>
           </a:lstStyle>
           <a:p>
-            <a:pPr indent="0" lvl="0" marL="0" rtl="0" algn="r">
+            <a:pPr marL="0" lvl="0" indent="0" algn="r" rtl="0">
               <a:spcBef>
                 <a:spcPts val="0"/>
               </a:spcBef>
@@ -2130,11 +2198,11 @@
 </file>
 
 <file path=ppt/slideLayouts/slideLayout11.xml><?xml version="1.0" encoding="utf-8"?>
-<p:sldLayout xmlns:a="http://schemas.openxmlformats.org/drawingml/2006/main" xmlns:r="http://schemas.openxmlformats.org/officeDocument/2006/relationships" xmlns:mc="http://schemas.openxmlformats.org/markup-compatibility/2006" xmlns:mv="urn:schemas-microsoft-com:mac:vml" xmlns:p="http://schemas.openxmlformats.org/presentationml/2006/main" xmlns:c="http://schemas.openxmlformats.org/drawingml/2006/chart" xmlns:dgm="http://schemas.openxmlformats.org/drawingml/2006/diagram" xmlns:o="urn:schemas-microsoft-com:office:office" xmlns:v="urn:schemas-microsoft-com:vml" xmlns:pvml="urn:schemas-microsoft-com:office:powerpoint" xmlns:com="http://schemas.openxmlformats.org/drawingml/2006/compatibility" xmlns:p14="http://schemas.microsoft.com/office/powerpoint/2010/main" xmlns:p15="http://schemas.microsoft.com/office/powerpoint/2012/main" xmlns:ahyp="http://schemas.microsoft.com/office/drawing/2018/hyperlinkcolor" matchingName="Blank" type="blank">
+<p:sldLayout xmlns:a="http://schemas.openxmlformats.org/drawingml/2006/main" xmlns:r="http://schemas.openxmlformats.org/officeDocument/2006/relationships" xmlns:p="http://schemas.openxmlformats.org/presentationml/2006/main" matchingName="Blank" type="blank">
   <p:cSld name="BLANK">
     <p:spTree>
       <p:nvGrpSpPr>
-        <p:cNvPr id="48" name="Shape 48"/>
+        <p:cNvPr id="1" name="Shape 48"/>
         <p:cNvGrpSpPr/>
         <p:nvPr/>
       </p:nvGrpSpPr>
@@ -2149,9 +2217,11 @@
       <p:sp>
         <p:nvSpPr>
           <p:cNvPr id="49" name="Google Shape;49;p12"/>
-          <p:cNvSpPr txBox="1"/>
+          <p:cNvSpPr txBox="1">
+            <a:spLocks noGrp="1"/>
+          </p:cNvSpPr>
           <p:nvPr>
-            <p:ph idx="12" type="sldNum"/>
+            <p:ph type="sldNum" idx="12"/>
           </p:nvPr>
         </p:nvSpPr>
         <p:spPr>
@@ -2164,7 +2234,7 @@
           </a:prstGeom>
         </p:spPr>
         <p:txBody>
-          <a:bodyPr anchorCtr="0" anchor="ctr" bIns="91425" lIns="91425" spcFirstLastPara="1" rIns="91425" wrap="square" tIns="91425">
+          <a:bodyPr spcFirstLastPara="1" wrap="square" lIns="91425" tIns="91425" rIns="91425" bIns="91425" anchor="ctr" anchorCtr="0">
             <a:normAutofit/>
           </a:bodyPr>
           <a:lstStyle>
@@ -2206,7 +2276,7 @@
             </a:lvl9pPr>
           </a:lstStyle>
           <a:p>
-            <a:pPr indent="0" lvl="0" marL="0" rtl="0" algn="r">
+            <a:pPr marL="0" lvl="0" indent="0" algn="r" rtl="0">
               <a:spcBef>
                 <a:spcPts val="0"/>
               </a:spcBef>
@@ -2232,11 +2302,11 @@
 </file>
 
 <file path=ppt/slideLayouts/slideLayout2.xml><?xml version="1.0" encoding="utf-8"?>
-<p:sldLayout xmlns:a="http://schemas.openxmlformats.org/drawingml/2006/main" xmlns:r="http://schemas.openxmlformats.org/officeDocument/2006/relationships" xmlns:mc="http://schemas.openxmlformats.org/markup-compatibility/2006" xmlns:mv="urn:schemas-microsoft-com:mac:vml" xmlns:p="http://schemas.openxmlformats.org/presentationml/2006/main" xmlns:c="http://schemas.openxmlformats.org/drawingml/2006/chart" xmlns:dgm="http://schemas.openxmlformats.org/drawingml/2006/diagram" xmlns:o="urn:schemas-microsoft-com:office:office" xmlns:v="urn:schemas-microsoft-com:vml" xmlns:pvml="urn:schemas-microsoft-com:office:powerpoint" xmlns:com="http://schemas.openxmlformats.org/drawingml/2006/compatibility" xmlns:p14="http://schemas.microsoft.com/office/powerpoint/2010/main" xmlns:p15="http://schemas.microsoft.com/office/powerpoint/2012/main" xmlns:ahyp="http://schemas.microsoft.com/office/drawing/2018/hyperlinkcolor" matchingName="Section header" type="secHead">
+<p:sldLayout xmlns:a="http://schemas.openxmlformats.org/drawingml/2006/main" xmlns:r="http://schemas.openxmlformats.org/officeDocument/2006/relationships" xmlns:p="http://schemas.openxmlformats.org/presentationml/2006/main" matchingName="Section header" type="secHead">
   <p:cSld name="SECTION_HEADER">
     <p:spTree>
       <p:nvGrpSpPr>
-        <p:cNvPr id="13" name="Shape 13"/>
+        <p:cNvPr id="1" name="Shape 13"/>
         <p:cNvGrpSpPr/>
         <p:nvPr/>
       </p:nvGrpSpPr>
@@ -2251,7 +2321,9 @@
       <p:sp>
         <p:nvSpPr>
           <p:cNvPr id="14" name="Google Shape;14;p3"/>
-          <p:cNvSpPr txBox="1"/>
+          <p:cNvSpPr txBox="1">
+            <a:spLocks noGrp="1"/>
+          </p:cNvSpPr>
           <p:nvPr>
             <p:ph type="title"/>
           </p:nvPr>
@@ -2266,7 +2338,7 @@
           </a:prstGeom>
         </p:spPr>
         <p:txBody>
-          <a:bodyPr anchorCtr="0" anchor="ctr" bIns="91425" lIns="91425" spcFirstLastPara="1" rIns="91425" wrap="square" tIns="91425">
+          <a:bodyPr spcFirstLastPara="1" wrap="square" lIns="91425" tIns="91425" rIns="91425" bIns="91425" anchor="ctr" anchorCtr="0">
             <a:normAutofit/>
           </a:bodyPr>
           <a:lstStyle>
@@ -2370,15 +2442,19 @@
               <a:defRPr sz="3600"/>
             </a:lvl9pPr>
           </a:lstStyle>
-          <a:p/>
+          <a:p>
+            <a:endParaRPr/>
+          </a:p>
         </p:txBody>
       </p:sp>
       <p:sp>
         <p:nvSpPr>
           <p:cNvPr id="15" name="Google Shape;15;p3"/>
-          <p:cNvSpPr txBox="1"/>
+          <p:cNvSpPr txBox="1">
+            <a:spLocks noGrp="1"/>
+          </p:cNvSpPr>
           <p:nvPr>
-            <p:ph idx="12" type="sldNum"/>
+            <p:ph type="sldNum" idx="12"/>
           </p:nvPr>
         </p:nvSpPr>
         <p:spPr>
@@ -2391,7 +2467,7 @@
           </a:prstGeom>
         </p:spPr>
         <p:txBody>
-          <a:bodyPr anchorCtr="0" anchor="ctr" bIns="91425" lIns="91425" spcFirstLastPara="1" rIns="91425" wrap="square" tIns="91425">
+          <a:bodyPr spcFirstLastPara="1" wrap="square" lIns="91425" tIns="91425" rIns="91425" bIns="91425" anchor="ctr" anchorCtr="0">
             <a:normAutofit/>
           </a:bodyPr>
           <a:lstStyle>
@@ -2433,7 +2509,7 @@
             </a:lvl9pPr>
           </a:lstStyle>
           <a:p>
-            <a:pPr indent="0" lvl="0" marL="0" rtl="0" algn="r">
+            <a:pPr marL="0" lvl="0" indent="0" algn="r" rtl="0">
               <a:spcBef>
                 <a:spcPts val="0"/>
               </a:spcBef>
@@ -2459,11 +2535,11 @@
 </file>
 
 <file path=ppt/slideLayouts/slideLayout3.xml><?xml version="1.0" encoding="utf-8"?>
-<p:sldLayout xmlns:a="http://schemas.openxmlformats.org/drawingml/2006/main" xmlns:r="http://schemas.openxmlformats.org/officeDocument/2006/relationships" xmlns:mc="http://schemas.openxmlformats.org/markup-compatibility/2006" xmlns:mv="urn:schemas-microsoft-com:mac:vml" xmlns:p="http://schemas.openxmlformats.org/presentationml/2006/main" xmlns:c="http://schemas.openxmlformats.org/drawingml/2006/chart" xmlns:dgm="http://schemas.openxmlformats.org/drawingml/2006/diagram" xmlns:o="urn:schemas-microsoft-com:office:office" xmlns:v="urn:schemas-microsoft-com:vml" xmlns:pvml="urn:schemas-microsoft-com:office:powerpoint" xmlns:com="http://schemas.openxmlformats.org/drawingml/2006/compatibility" xmlns:p14="http://schemas.microsoft.com/office/powerpoint/2010/main" xmlns:p15="http://schemas.microsoft.com/office/powerpoint/2012/main" xmlns:ahyp="http://schemas.microsoft.com/office/drawing/2018/hyperlinkcolor" matchingName="Title and body" type="tx">
+<p:sldLayout xmlns:a="http://schemas.openxmlformats.org/drawingml/2006/main" xmlns:r="http://schemas.openxmlformats.org/officeDocument/2006/relationships" xmlns:p="http://schemas.openxmlformats.org/presentationml/2006/main" matchingName="Title and body" type="tx">
   <p:cSld name="TITLE_AND_BODY">
     <p:spTree>
       <p:nvGrpSpPr>
-        <p:cNvPr id="16" name="Shape 16"/>
+        <p:cNvPr id="1" name="Shape 16"/>
         <p:cNvGrpSpPr/>
         <p:nvPr/>
       </p:nvGrpSpPr>
@@ -2478,7 +2554,9 @@
       <p:sp>
         <p:nvSpPr>
           <p:cNvPr id="17" name="Google Shape;17;p4"/>
-          <p:cNvSpPr txBox="1"/>
+          <p:cNvSpPr txBox="1">
+            <a:spLocks noGrp="1"/>
+          </p:cNvSpPr>
           <p:nvPr>
             <p:ph type="title"/>
           </p:nvPr>
@@ -2493,7 +2571,7 @@
           </a:prstGeom>
         </p:spPr>
         <p:txBody>
-          <a:bodyPr anchorCtr="0" anchor="t" bIns="91425" lIns="91425" spcFirstLastPara="1" rIns="91425" wrap="square" tIns="91425">
+          <a:bodyPr spcFirstLastPara="1" wrap="square" lIns="91425" tIns="91425" rIns="91425" bIns="91425" anchor="t" anchorCtr="0">
             <a:normAutofit/>
           </a:bodyPr>
           <a:lstStyle>
@@ -2597,15 +2675,19 @@
               <a:defRPr/>
             </a:lvl9pPr>
           </a:lstStyle>
-          <a:p/>
+          <a:p>
+            <a:endParaRPr/>
+          </a:p>
         </p:txBody>
       </p:sp>
       <p:sp>
         <p:nvSpPr>
           <p:cNvPr id="18" name="Google Shape;18;p4"/>
-          <p:cNvSpPr txBox="1"/>
+          <p:cNvSpPr txBox="1">
+            <a:spLocks noGrp="1"/>
+          </p:cNvSpPr>
           <p:nvPr>
-            <p:ph idx="1" type="body"/>
+            <p:ph type="body" idx="1"/>
           </p:nvPr>
         </p:nvSpPr>
         <p:spPr>
@@ -2618,11 +2700,11 @@
           </a:prstGeom>
         </p:spPr>
         <p:txBody>
-          <a:bodyPr anchorCtr="0" anchor="t" bIns="91425" lIns="91425" spcFirstLastPara="1" rIns="91425" wrap="square" tIns="91425">
+          <a:bodyPr spcFirstLastPara="1" wrap="square" lIns="91425" tIns="91425" rIns="91425" bIns="91425" anchor="t" anchorCtr="0">
             <a:normAutofit/>
           </a:bodyPr>
           <a:lstStyle>
-            <a:lvl1pPr indent="-342900" lvl="0" marL="457200">
+            <a:lvl1pPr marL="457200" lvl="0" indent="-342900">
               <a:spcBef>
                 <a:spcPts val="0"/>
               </a:spcBef>
@@ -2633,7 +2715,7 @@
               <a:buChar char="●"/>
               <a:defRPr/>
             </a:lvl1pPr>
-            <a:lvl2pPr indent="-317500" lvl="1" marL="914400">
+            <a:lvl2pPr marL="914400" lvl="1" indent="-317500">
               <a:spcBef>
                 <a:spcPts val="0"/>
               </a:spcBef>
@@ -2644,7 +2726,7 @@
               <a:buChar char="○"/>
               <a:defRPr/>
             </a:lvl2pPr>
-            <a:lvl3pPr indent="-317500" lvl="2" marL="1371600">
+            <a:lvl3pPr marL="1371600" lvl="2" indent="-317500">
               <a:spcBef>
                 <a:spcPts val="0"/>
               </a:spcBef>
@@ -2655,7 +2737,7 @@
               <a:buChar char="■"/>
               <a:defRPr/>
             </a:lvl3pPr>
-            <a:lvl4pPr indent="-317500" lvl="3" marL="1828800">
+            <a:lvl4pPr marL="1828800" lvl="3" indent="-317500">
               <a:spcBef>
                 <a:spcPts val="0"/>
               </a:spcBef>
@@ -2666,7 +2748,7 @@
               <a:buChar char="●"/>
               <a:defRPr/>
             </a:lvl4pPr>
-            <a:lvl5pPr indent="-317500" lvl="4" marL="2286000">
+            <a:lvl5pPr marL="2286000" lvl="4" indent="-317500">
               <a:spcBef>
                 <a:spcPts val="0"/>
               </a:spcBef>
@@ -2677,7 +2759,7 @@
               <a:buChar char="○"/>
               <a:defRPr/>
             </a:lvl5pPr>
-            <a:lvl6pPr indent="-317500" lvl="5" marL="2743200">
+            <a:lvl6pPr marL="2743200" lvl="5" indent="-317500">
               <a:spcBef>
                 <a:spcPts val="0"/>
               </a:spcBef>
@@ -2688,7 +2770,7 @@
               <a:buChar char="■"/>
               <a:defRPr/>
             </a:lvl6pPr>
-            <a:lvl7pPr indent="-317500" lvl="6" marL="3200400">
+            <a:lvl7pPr marL="3200400" lvl="6" indent="-317500">
               <a:spcBef>
                 <a:spcPts val="0"/>
               </a:spcBef>
@@ -2699,7 +2781,7 @@
               <a:buChar char="●"/>
               <a:defRPr/>
             </a:lvl7pPr>
-            <a:lvl8pPr indent="-317500" lvl="7" marL="3657600">
+            <a:lvl8pPr marL="3657600" lvl="7" indent="-317500">
               <a:spcBef>
                 <a:spcPts val="0"/>
               </a:spcBef>
@@ -2710,7 +2792,7 @@
               <a:buChar char="○"/>
               <a:defRPr/>
             </a:lvl8pPr>
-            <a:lvl9pPr indent="-317500" lvl="8" marL="4114800">
+            <a:lvl9pPr marL="4114800" lvl="8" indent="-317500">
               <a:spcBef>
                 <a:spcPts val="0"/>
               </a:spcBef>
@@ -2722,15 +2804,19 @@
               <a:defRPr/>
             </a:lvl9pPr>
           </a:lstStyle>
-          <a:p/>
+          <a:p>
+            <a:endParaRPr/>
+          </a:p>
         </p:txBody>
       </p:sp>
       <p:sp>
         <p:nvSpPr>
           <p:cNvPr id="19" name="Google Shape;19;p4"/>
-          <p:cNvSpPr txBox="1"/>
+          <p:cNvSpPr txBox="1">
+            <a:spLocks noGrp="1"/>
+          </p:cNvSpPr>
           <p:nvPr>
-            <p:ph idx="12" type="sldNum"/>
+            <p:ph type="sldNum" idx="12"/>
           </p:nvPr>
         </p:nvSpPr>
         <p:spPr>
@@ -2743,7 +2829,7 @@
           </a:prstGeom>
         </p:spPr>
         <p:txBody>
-          <a:bodyPr anchorCtr="0" anchor="ctr" bIns="91425" lIns="91425" spcFirstLastPara="1" rIns="91425" wrap="square" tIns="91425">
+          <a:bodyPr spcFirstLastPara="1" wrap="square" lIns="91425" tIns="91425" rIns="91425" bIns="91425" anchor="ctr" anchorCtr="0">
             <a:normAutofit/>
           </a:bodyPr>
           <a:lstStyle>
@@ -2785,7 +2871,7 @@
             </a:lvl9pPr>
           </a:lstStyle>
           <a:p>
-            <a:pPr indent="0" lvl="0" marL="0" rtl="0" algn="r">
+            <a:pPr marL="0" lvl="0" indent="0" algn="r" rtl="0">
               <a:spcBef>
                 <a:spcPts val="0"/>
               </a:spcBef>
@@ -2811,11 +2897,11 @@
 </file>
 
 <file path=ppt/slideLayouts/slideLayout4.xml><?xml version="1.0" encoding="utf-8"?>
-<p:sldLayout xmlns:a="http://schemas.openxmlformats.org/drawingml/2006/main" xmlns:r="http://schemas.openxmlformats.org/officeDocument/2006/relationships" xmlns:mc="http://schemas.openxmlformats.org/markup-compatibility/2006" xmlns:mv="urn:schemas-microsoft-com:mac:vml" xmlns:p="http://schemas.openxmlformats.org/presentationml/2006/main" xmlns:c="http://schemas.openxmlformats.org/drawingml/2006/chart" xmlns:dgm="http://schemas.openxmlformats.org/drawingml/2006/diagram" xmlns:o="urn:schemas-microsoft-com:office:office" xmlns:v="urn:schemas-microsoft-com:vml" xmlns:pvml="urn:schemas-microsoft-com:office:powerpoint" xmlns:com="http://schemas.openxmlformats.org/drawingml/2006/compatibility" xmlns:p14="http://schemas.microsoft.com/office/powerpoint/2010/main" xmlns:p15="http://schemas.microsoft.com/office/powerpoint/2012/main" xmlns:ahyp="http://schemas.microsoft.com/office/drawing/2018/hyperlinkcolor" matchingName="Title and two columns" type="twoColTx">
+<p:sldLayout xmlns:a="http://schemas.openxmlformats.org/drawingml/2006/main" xmlns:r="http://schemas.openxmlformats.org/officeDocument/2006/relationships" xmlns:p="http://schemas.openxmlformats.org/presentationml/2006/main" matchingName="Title and two columns" type="twoColTx">
   <p:cSld name="TITLE_AND_TWO_COLUMNS">
     <p:spTree>
       <p:nvGrpSpPr>
-        <p:cNvPr id="20" name="Shape 20"/>
+        <p:cNvPr id="1" name="Shape 20"/>
         <p:cNvGrpSpPr/>
         <p:nvPr/>
       </p:nvGrpSpPr>
@@ -2830,7 +2916,9 @@
       <p:sp>
         <p:nvSpPr>
           <p:cNvPr id="21" name="Google Shape;21;p5"/>
-          <p:cNvSpPr txBox="1"/>
+          <p:cNvSpPr txBox="1">
+            <a:spLocks noGrp="1"/>
+          </p:cNvSpPr>
           <p:nvPr>
             <p:ph type="title"/>
           </p:nvPr>
@@ -2845,7 +2933,7 @@
           </a:prstGeom>
         </p:spPr>
         <p:txBody>
-          <a:bodyPr anchorCtr="0" anchor="t" bIns="91425" lIns="91425" spcFirstLastPara="1" rIns="91425" wrap="square" tIns="91425">
+          <a:bodyPr spcFirstLastPara="1" wrap="square" lIns="91425" tIns="91425" rIns="91425" bIns="91425" anchor="t" anchorCtr="0">
             <a:normAutofit/>
           </a:bodyPr>
           <a:lstStyle>
@@ -2949,15 +3037,19 @@
               <a:defRPr/>
             </a:lvl9pPr>
           </a:lstStyle>
-          <a:p/>
+          <a:p>
+            <a:endParaRPr/>
+          </a:p>
         </p:txBody>
       </p:sp>
       <p:sp>
         <p:nvSpPr>
           <p:cNvPr id="22" name="Google Shape;22;p5"/>
-          <p:cNvSpPr txBox="1"/>
+          <p:cNvSpPr txBox="1">
+            <a:spLocks noGrp="1"/>
+          </p:cNvSpPr>
           <p:nvPr>
-            <p:ph idx="1" type="body"/>
+            <p:ph type="body" idx="1"/>
           </p:nvPr>
         </p:nvSpPr>
         <p:spPr>
@@ -2970,11 +3062,11 @@
           </a:prstGeom>
         </p:spPr>
         <p:txBody>
-          <a:bodyPr anchorCtr="0" anchor="t" bIns="91425" lIns="91425" spcFirstLastPara="1" rIns="91425" wrap="square" tIns="91425">
+          <a:bodyPr spcFirstLastPara="1" wrap="square" lIns="91425" tIns="91425" rIns="91425" bIns="91425" anchor="t" anchorCtr="0">
             <a:normAutofit/>
           </a:bodyPr>
           <a:lstStyle>
-            <a:lvl1pPr indent="-317500" lvl="0" marL="457200">
+            <a:lvl1pPr marL="457200" lvl="0" indent="-317500">
               <a:spcBef>
                 <a:spcPts val="0"/>
               </a:spcBef>
@@ -2985,7 +3077,7 @@
               <a:buChar char="●"/>
               <a:defRPr sz="1400"/>
             </a:lvl1pPr>
-            <a:lvl2pPr indent="-304800" lvl="1" marL="914400">
+            <a:lvl2pPr marL="914400" lvl="1" indent="-304800">
               <a:spcBef>
                 <a:spcPts val="0"/>
               </a:spcBef>
@@ -2996,7 +3088,7 @@
               <a:buChar char="○"/>
               <a:defRPr sz="1200"/>
             </a:lvl2pPr>
-            <a:lvl3pPr indent="-304800" lvl="2" marL="1371600">
+            <a:lvl3pPr marL="1371600" lvl="2" indent="-304800">
               <a:spcBef>
                 <a:spcPts val="0"/>
               </a:spcBef>
@@ -3007,7 +3099,7 @@
               <a:buChar char="■"/>
               <a:defRPr sz="1200"/>
             </a:lvl3pPr>
-            <a:lvl4pPr indent="-304800" lvl="3" marL="1828800">
+            <a:lvl4pPr marL="1828800" lvl="3" indent="-304800">
               <a:spcBef>
                 <a:spcPts val="0"/>
               </a:spcBef>
@@ -3018,7 +3110,7 @@
               <a:buChar char="●"/>
               <a:defRPr sz="1200"/>
             </a:lvl4pPr>
-            <a:lvl5pPr indent="-304800" lvl="4" marL="2286000">
+            <a:lvl5pPr marL="2286000" lvl="4" indent="-304800">
               <a:spcBef>
                 <a:spcPts val="0"/>
               </a:spcBef>
@@ -3029,7 +3121,7 @@
               <a:buChar char="○"/>
               <a:defRPr sz="1200"/>
             </a:lvl5pPr>
-            <a:lvl6pPr indent="-304800" lvl="5" marL="2743200">
+            <a:lvl6pPr marL="2743200" lvl="5" indent="-304800">
               <a:spcBef>
                 <a:spcPts val="0"/>
               </a:spcBef>
@@ -3040,7 +3132,7 @@
               <a:buChar char="■"/>
               <a:defRPr sz="1200"/>
             </a:lvl6pPr>
-            <a:lvl7pPr indent="-304800" lvl="6" marL="3200400">
+            <a:lvl7pPr marL="3200400" lvl="6" indent="-304800">
               <a:spcBef>
                 <a:spcPts val="0"/>
               </a:spcBef>
@@ -3051,7 +3143,7 @@
               <a:buChar char="●"/>
               <a:defRPr sz="1200"/>
             </a:lvl7pPr>
-            <a:lvl8pPr indent="-304800" lvl="7" marL="3657600">
+            <a:lvl8pPr marL="3657600" lvl="7" indent="-304800">
               <a:spcBef>
                 <a:spcPts val="0"/>
               </a:spcBef>
@@ -3062,7 +3154,7 @@
               <a:buChar char="○"/>
               <a:defRPr sz="1200"/>
             </a:lvl8pPr>
-            <a:lvl9pPr indent="-304800" lvl="8" marL="4114800">
+            <a:lvl9pPr marL="4114800" lvl="8" indent="-304800">
               <a:spcBef>
                 <a:spcPts val="0"/>
               </a:spcBef>
@@ -3074,15 +3166,19 @@
               <a:defRPr sz="1200"/>
             </a:lvl9pPr>
           </a:lstStyle>
-          <a:p/>
+          <a:p>
+            <a:endParaRPr/>
+          </a:p>
         </p:txBody>
       </p:sp>
       <p:sp>
         <p:nvSpPr>
           <p:cNvPr id="23" name="Google Shape;23;p5"/>
-          <p:cNvSpPr txBox="1"/>
+          <p:cNvSpPr txBox="1">
+            <a:spLocks noGrp="1"/>
+          </p:cNvSpPr>
           <p:nvPr>
-            <p:ph idx="2" type="body"/>
+            <p:ph type="body" idx="2"/>
           </p:nvPr>
         </p:nvSpPr>
         <p:spPr>
@@ -3095,11 +3191,11 @@
           </a:prstGeom>
         </p:spPr>
         <p:txBody>
-          <a:bodyPr anchorCtr="0" anchor="t" bIns="91425" lIns="91425" spcFirstLastPara="1" rIns="91425" wrap="square" tIns="91425">
+          <a:bodyPr spcFirstLastPara="1" wrap="square" lIns="91425" tIns="91425" rIns="91425" bIns="91425" anchor="t" anchorCtr="0">
             <a:normAutofit/>
           </a:bodyPr>
           <a:lstStyle>
-            <a:lvl1pPr indent="-317500" lvl="0" marL="457200">
+            <a:lvl1pPr marL="457200" lvl="0" indent="-317500">
               <a:spcBef>
                 <a:spcPts val="0"/>
               </a:spcBef>
@@ -3110,7 +3206,7 @@
               <a:buChar char="●"/>
               <a:defRPr sz="1400"/>
             </a:lvl1pPr>
-            <a:lvl2pPr indent="-304800" lvl="1" marL="914400">
+            <a:lvl2pPr marL="914400" lvl="1" indent="-304800">
               <a:spcBef>
                 <a:spcPts val="0"/>
               </a:spcBef>
@@ -3121,7 +3217,7 @@
               <a:buChar char="○"/>
               <a:defRPr sz="1200"/>
             </a:lvl2pPr>
-            <a:lvl3pPr indent="-304800" lvl="2" marL="1371600">
+            <a:lvl3pPr marL="1371600" lvl="2" indent="-304800">
               <a:spcBef>
                 <a:spcPts val="0"/>
               </a:spcBef>
@@ -3132,7 +3228,7 @@
               <a:buChar char="■"/>
               <a:defRPr sz="1200"/>
             </a:lvl3pPr>
-            <a:lvl4pPr indent="-304800" lvl="3" marL="1828800">
+            <a:lvl4pPr marL="1828800" lvl="3" indent="-304800">
               <a:spcBef>
                 <a:spcPts val="0"/>
               </a:spcBef>
@@ -3143,7 +3239,7 @@
               <a:buChar char="●"/>
               <a:defRPr sz="1200"/>
             </a:lvl4pPr>
-            <a:lvl5pPr indent="-304800" lvl="4" marL="2286000">
+            <a:lvl5pPr marL="2286000" lvl="4" indent="-304800">
               <a:spcBef>
                 <a:spcPts val="0"/>
               </a:spcBef>
@@ -3154,7 +3250,7 @@
               <a:buChar char="○"/>
               <a:defRPr sz="1200"/>
             </a:lvl5pPr>
-            <a:lvl6pPr indent="-304800" lvl="5" marL="2743200">
+            <a:lvl6pPr marL="2743200" lvl="5" indent="-304800">
               <a:spcBef>
                 <a:spcPts val="0"/>
               </a:spcBef>
@@ -3165,7 +3261,7 @@
               <a:buChar char="■"/>
               <a:defRPr sz="1200"/>
             </a:lvl6pPr>
-            <a:lvl7pPr indent="-304800" lvl="6" marL="3200400">
+            <a:lvl7pPr marL="3200400" lvl="6" indent="-304800">
               <a:spcBef>
                 <a:spcPts val="0"/>
               </a:spcBef>
@@ -3176,7 +3272,7 @@
               <a:buChar char="●"/>
               <a:defRPr sz="1200"/>
             </a:lvl7pPr>
-            <a:lvl8pPr indent="-304800" lvl="7" marL="3657600">
+            <a:lvl8pPr marL="3657600" lvl="7" indent="-304800">
               <a:spcBef>
                 <a:spcPts val="0"/>
               </a:spcBef>
@@ -3187,7 +3283,7 @@
               <a:buChar char="○"/>
               <a:defRPr sz="1200"/>
             </a:lvl8pPr>
-            <a:lvl9pPr indent="-304800" lvl="8" marL="4114800">
+            <a:lvl9pPr marL="4114800" lvl="8" indent="-304800">
               <a:spcBef>
                 <a:spcPts val="0"/>
               </a:spcBef>
@@ -3199,15 +3295,19 @@
               <a:defRPr sz="1200"/>
             </a:lvl9pPr>
           </a:lstStyle>
-          <a:p/>
+          <a:p>
+            <a:endParaRPr/>
+          </a:p>
         </p:txBody>
       </p:sp>
       <p:sp>
         <p:nvSpPr>
           <p:cNvPr id="24" name="Google Shape;24;p5"/>
-          <p:cNvSpPr txBox="1"/>
+          <p:cNvSpPr txBox="1">
+            <a:spLocks noGrp="1"/>
+          </p:cNvSpPr>
           <p:nvPr>
-            <p:ph idx="12" type="sldNum"/>
+            <p:ph type="sldNum" idx="12"/>
           </p:nvPr>
         </p:nvSpPr>
         <p:spPr>
@@ -3220,7 +3320,7 @@
           </a:prstGeom>
         </p:spPr>
         <p:txBody>
-          <a:bodyPr anchorCtr="0" anchor="ctr" bIns="91425" lIns="91425" spcFirstLastPara="1" rIns="91425" wrap="square" tIns="91425">
+          <a:bodyPr spcFirstLastPara="1" wrap="square" lIns="91425" tIns="91425" rIns="91425" bIns="91425" anchor="ctr" anchorCtr="0">
             <a:normAutofit/>
           </a:bodyPr>
           <a:lstStyle>
@@ -3262,7 +3362,7 @@
             </a:lvl9pPr>
           </a:lstStyle>
           <a:p>
-            <a:pPr indent="0" lvl="0" marL="0" rtl="0" algn="r">
+            <a:pPr marL="0" lvl="0" indent="0" algn="r" rtl="0">
               <a:spcBef>
                 <a:spcPts val="0"/>
               </a:spcBef>
@@ -3288,11 +3388,11 @@
 </file>
 
 <file path=ppt/slideLayouts/slideLayout5.xml><?xml version="1.0" encoding="utf-8"?>
-<p:sldLayout xmlns:a="http://schemas.openxmlformats.org/drawingml/2006/main" xmlns:r="http://schemas.openxmlformats.org/officeDocument/2006/relationships" xmlns:mc="http://schemas.openxmlformats.org/markup-compatibility/2006" xmlns:mv="urn:schemas-microsoft-com:mac:vml" xmlns:p="http://schemas.openxmlformats.org/presentationml/2006/main" xmlns:c="http://schemas.openxmlformats.org/drawingml/2006/chart" xmlns:dgm="http://schemas.openxmlformats.org/drawingml/2006/diagram" xmlns:o="urn:schemas-microsoft-com:office:office" xmlns:v="urn:schemas-microsoft-com:vml" xmlns:pvml="urn:schemas-microsoft-com:office:powerpoint" xmlns:com="http://schemas.openxmlformats.org/drawingml/2006/compatibility" xmlns:p14="http://schemas.microsoft.com/office/powerpoint/2010/main" xmlns:p15="http://schemas.microsoft.com/office/powerpoint/2012/main" xmlns:ahyp="http://schemas.microsoft.com/office/drawing/2018/hyperlinkcolor" matchingName="Title only" type="titleOnly">
+<p:sldLayout xmlns:a="http://schemas.openxmlformats.org/drawingml/2006/main" xmlns:r="http://schemas.openxmlformats.org/officeDocument/2006/relationships" xmlns:p="http://schemas.openxmlformats.org/presentationml/2006/main" matchingName="Title only" type="titleOnly">
   <p:cSld name="TITLE_ONLY">
     <p:spTree>
       <p:nvGrpSpPr>
-        <p:cNvPr id="25" name="Shape 25"/>
+        <p:cNvPr id="1" name="Shape 25"/>
         <p:cNvGrpSpPr/>
         <p:nvPr/>
       </p:nvGrpSpPr>
@@ -3307,7 +3407,9 @@
       <p:sp>
         <p:nvSpPr>
           <p:cNvPr id="26" name="Google Shape;26;p6"/>
-          <p:cNvSpPr txBox="1"/>
+          <p:cNvSpPr txBox="1">
+            <a:spLocks noGrp="1"/>
+          </p:cNvSpPr>
           <p:nvPr>
             <p:ph type="title"/>
           </p:nvPr>
@@ -3322,7 +3424,7 @@
           </a:prstGeom>
         </p:spPr>
         <p:txBody>
-          <a:bodyPr anchorCtr="0" anchor="t" bIns="91425" lIns="91425" spcFirstLastPara="1" rIns="91425" wrap="square" tIns="91425">
+          <a:bodyPr spcFirstLastPara="1" wrap="square" lIns="91425" tIns="91425" rIns="91425" bIns="91425" anchor="t" anchorCtr="0">
             <a:normAutofit/>
           </a:bodyPr>
           <a:lstStyle>
@@ -3426,15 +3528,19 @@
               <a:defRPr/>
             </a:lvl9pPr>
           </a:lstStyle>
-          <a:p/>
+          <a:p>
+            <a:endParaRPr/>
+          </a:p>
         </p:txBody>
       </p:sp>
       <p:sp>
         <p:nvSpPr>
           <p:cNvPr id="27" name="Google Shape;27;p6"/>
-          <p:cNvSpPr txBox="1"/>
+          <p:cNvSpPr txBox="1">
+            <a:spLocks noGrp="1"/>
+          </p:cNvSpPr>
           <p:nvPr>
-            <p:ph idx="12" type="sldNum"/>
+            <p:ph type="sldNum" idx="12"/>
           </p:nvPr>
         </p:nvSpPr>
         <p:spPr>
@@ -3447,7 +3553,7 @@
           </a:prstGeom>
         </p:spPr>
         <p:txBody>
-          <a:bodyPr anchorCtr="0" anchor="ctr" bIns="91425" lIns="91425" spcFirstLastPara="1" rIns="91425" wrap="square" tIns="91425">
+          <a:bodyPr spcFirstLastPara="1" wrap="square" lIns="91425" tIns="91425" rIns="91425" bIns="91425" anchor="ctr" anchorCtr="0">
             <a:normAutofit/>
           </a:bodyPr>
           <a:lstStyle>
@@ -3489,7 +3595,7 @@
             </a:lvl9pPr>
           </a:lstStyle>
           <a:p>
-            <a:pPr indent="0" lvl="0" marL="0" rtl="0" algn="r">
+            <a:pPr marL="0" lvl="0" indent="0" algn="r" rtl="0">
               <a:spcBef>
                 <a:spcPts val="0"/>
               </a:spcBef>
@@ -3515,11 +3621,11 @@
 </file>
 
 <file path=ppt/slideLayouts/slideLayout6.xml><?xml version="1.0" encoding="utf-8"?>
-<p:sldLayout xmlns:a="http://schemas.openxmlformats.org/drawingml/2006/main" xmlns:r="http://schemas.openxmlformats.org/officeDocument/2006/relationships" xmlns:mc="http://schemas.openxmlformats.org/markup-compatibility/2006" xmlns:mv="urn:schemas-microsoft-com:mac:vml" xmlns:p="http://schemas.openxmlformats.org/presentationml/2006/main" xmlns:c="http://schemas.openxmlformats.org/drawingml/2006/chart" xmlns:dgm="http://schemas.openxmlformats.org/drawingml/2006/diagram" xmlns:o="urn:schemas-microsoft-com:office:office" xmlns:v="urn:schemas-microsoft-com:vml" xmlns:pvml="urn:schemas-microsoft-com:office:powerpoint" xmlns:com="http://schemas.openxmlformats.org/drawingml/2006/compatibility" xmlns:p14="http://schemas.microsoft.com/office/powerpoint/2010/main" xmlns:p15="http://schemas.microsoft.com/office/powerpoint/2012/main" xmlns:ahyp="http://schemas.microsoft.com/office/drawing/2018/hyperlinkcolor" matchingName="One column text">
+<p:sldLayout xmlns:a="http://schemas.openxmlformats.org/drawingml/2006/main" xmlns:r="http://schemas.openxmlformats.org/officeDocument/2006/relationships" xmlns:p="http://schemas.openxmlformats.org/presentationml/2006/main" matchingName="One column text">
   <p:cSld name="ONE_COLUMN_TEXT">
     <p:spTree>
       <p:nvGrpSpPr>
-        <p:cNvPr id="28" name="Shape 28"/>
+        <p:cNvPr id="1" name="Shape 28"/>
         <p:cNvGrpSpPr/>
         <p:nvPr/>
       </p:nvGrpSpPr>
@@ -3534,7 +3640,9 @@
       <p:sp>
         <p:nvSpPr>
           <p:cNvPr id="29" name="Google Shape;29;p7"/>
-          <p:cNvSpPr txBox="1"/>
+          <p:cNvSpPr txBox="1">
+            <a:spLocks noGrp="1"/>
+          </p:cNvSpPr>
           <p:nvPr>
             <p:ph type="title"/>
           </p:nvPr>
@@ -3549,7 +3657,7 @@
           </a:prstGeom>
         </p:spPr>
         <p:txBody>
-          <a:bodyPr anchorCtr="0" anchor="b" bIns="91425" lIns="91425" spcFirstLastPara="1" rIns="91425" wrap="square" tIns="91425">
+          <a:bodyPr spcFirstLastPara="1" wrap="square" lIns="91425" tIns="91425" rIns="91425" bIns="91425" anchor="b" anchorCtr="0">
             <a:normAutofit/>
           </a:bodyPr>
           <a:lstStyle>
@@ -3653,15 +3761,19 @@
               <a:defRPr sz="2400"/>
             </a:lvl9pPr>
           </a:lstStyle>
-          <a:p/>
+          <a:p>
+            <a:endParaRPr/>
+          </a:p>
         </p:txBody>
       </p:sp>
       <p:sp>
         <p:nvSpPr>
           <p:cNvPr id="30" name="Google Shape;30;p7"/>
-          <p:cNvSpPr txBox="1"/>
+          <p:cNvSpPr txBox="1">
+            <a:spLocks noGrp="1"/>
+          </p:cNvSpPr>
           <p:nvPr>
-            <p:ph idx="1" type="body"/>
+            <p:ph type="body" idx="1"/>
           </p:nvPr>
         </p:nvSpPr>
         <p:spPr>
@@ -3674,11 +3786,11 @@
           </a:prstGeom>
         </p:spPr>
         <p:txBody>
-          <a:bodyPr anchorCtr="0" anchor="t" bIns="91425" lIns="91425" spcFirstLastPara="1" rIns="91425" wrap="square" tIns="91425">
+          <a:bodyPr spcFirstLastPara="1" wrap="square" lIns="91425" tIns="91425" rIns="91425" bIns="91425" anchor="t" anchorCtr="0">
             <a:normAutofit/>
           </a:bodyPr>
           <a:lstStyle>
-            <a:lvl1pPr indent="-304800" lvl="0" marL="457200">
+            <a:lvl1pPr marL="457200" lvl="0" indent="-304800">
               <a:spcBef>
                 <a:spcPts val="0"/>
               </a:spcBef>
@@ -3689,7 +3801,7 @@
               <a:buChar char="●"/>
               <a:defRPr sz="1200"/>
             </a:lvl1pPr>
-            <a:lvl2pPr indent="-304800" lvl="1" marL="914400">
+            <a:lvl2pPr marL="914400" lvl="1" indent="-304800">
               <a:spcBef>
                 <a:spcPts val="0"/>
               </a:spcBef>
@@ -3700,7 +3812,7 @@
               <a:buChar char="○"/>
               <a:defRPr sz="1200"/>
             </a:lvl2pPr>
-            <a:lvl3pPr indent="-304800" lvl="2" marL="1371600">
+            <a:lvl3pPr marL="1371600" lvl="2" indent="-304800">
               <a:spcBef>
                 <a:spcPts val="0"/>
               </a:spcBef>
@@ -3711,7 +3823,7 @@
               <a:buChar char="■"/>
               <a:defRPr sz="1200"/>
             </a:lvl3pPr>
-            <a:lvl4pPr indent="-304800" lvl="3" marL="1828800">
+            <a:lvl4pPr marL="1828800" lvl="3" indent="-304800">
               <a:spcBef>
                 <a:spcPts val="0"/>
               </a:spcBef>
@@ -3722,7 +3834,7 @@
               <a:buChar char="●"/>
               <a:defRPr sz="1200"/>
             </a:lvl4pPr>
-            <a:lvl5pPr indent="-304800" lvl="4" marL="2286000">
+            <a:lvl5pPr marL="2286000" lvl="4" indent="-304800">
               <a:spcBef>
                 <a:spcPts val="0"/>
               </a:spcBef>
@@ -3733,7 +3845,7 @@
               <a:buChar char="○"/>
               <a:defRPr sz="1200"/>
             </a:lvl5pPr>
-            <a:lvl6pPr indent="-304800" lvl="5" marL="2743200">
+            <a:lvl6pPr marL="2743200" lvl="5" indent="-304800">
               <a:spcBef>
                 <a:spcPts val="0"/>
               </a:spcBef>
@@ -3744,7 +3856,7 @@
               <a:buChar char="■"/>
               <a:defRPr sz="1200"/>
             </a:lvl6pPr>
-            <a:lvl7pPr indent="-304800" lvl="6" marL="3200400">
+            <a:lvl7pPr marL="3200400" lvl="6" indent="-304800">
               <a:spcBef>
                 <a:spcPts val="0"/>
               </a:spcBef>
@@ -3755,7 +3867,7 @@
               <a:buChar char="●"/>
               <a:defRPr sz="1200"/>
             </a:lvl7pPr>
-            <a:lvl8pPr indent="-304800" lvl="7" marL="3657600">
+            <a:lvl8pPr marL="3657600" lvl="7" indent="-304800">
               <a:spcBef>
                 <a:spcPts val="0"/>
               </a:spcBef>
@@ -3766,7 +3878,7 @@
               <a:buChar char="○"/>
               <a:defRPr sz="1200"/>
             </a:lvl8pPr>
-            <a:lvl9pPr indent="-304800" lvl="8" marL="4114800">
+            <a:lvl9pPr marL="4114800" lvl="8" indent="-304800">
               <a:spcBef>
                 <a:spcPts val="0"/>
               </a:spcBef>
@@ -3778,15 +3890,19 @@
               <a:defRPr sz="1200"/>
             </a:lvl9pPr>
           </a:lstStyle>
-          <a:p/>
+          <a:p>
+            <a:endParaRPr/>
+          </a:p>
         </p:txBody>
       </p:sp>
       <p:sp>
         <p:nvSpPr>
           <p:cNvPr id="31" name="Google Shape;31;p7"/>
-          <p:cNvSpPr txBox="1"/>
+          <p:cNvSpPr txBox="1">
+            <a:spLocks noGrp="1"/>
+          </p:cNvSpPr>
           <p:nvPr>
-            <p:ph idx="12" type="sldNum"/>
+            <p:ph type="sldNum" idx="12"/>
           </p:nvPr>
         </p:nvSpPr>
         <p:spPr>
@@ -3799,7 +3915,7 @@
           </a:prstGeom>
         </p:spPr>
         <p:txBody>
-          <a:bodyPr anchorCtr="0" anchor="ctr" bIns="91425" lIns="91425" spcFirstLastPara="1" rIns="91425" wrap="square" tIns="91425">
+          <a:bodyPr spcFirstLastPara="1" wrap="square" lIns="91425" tIns="91425" rIns="91425" bIns="91425" anchor="ctr" anchorCtr="0">
             <a:normAutofit/>
           </a:bodyPr>
           <a:lstStyle>
@@ -3841,7 +3957,7 @@
             </a:lvl9pPr>
           </a:lstStyle>
           <a:p>
-            <a:pPr indent="0" lvl="0" marL="0" rtl="0" algn="r">
+            <a:pPr marL="0" lvl="0" indent="0" algn="r" rtl="0">
               <a:spcBef>
                 <a:spcPts val="0"/>
               </a:spcBef>
@@ -3867,11 +3983,11 @@
 </file>
 
 <file path=ppt/slideLayouts/slideLayout7.xml><?xml version="1.0" encoding="utf-8"?>
-<p:sldLayout xmlns:a="http://schemas.openxmlformats.org/drawingml/2006/main" xmlns:r="http://schemas.openxmlformats.org/officeDocument/2006/relationships" xmlns:mc="http://schemas.openxmlformats.org/markup-compatibility/2006" xmlns:mv="urn:schemas-microsoft-com:mac:vml" xmlns:p="http://schemas.openxmlformats.org/presentationml/2006/main" xmlns:c="http://schemas.openxmlformats.org/drawingml/2006/chart" xmlns:dgm="http://schemas.openxmlformats.org/drawingml/2006/diagram" xmlns:o="urn:schemas-microsoft-com:office:office" xmlns:v="urn:schemas-microsoft-com:vml" xmlns:pvml="urn:schemas-microsoft-com:office:powerpoint" xmlns:com="http://schemas.openxmlformats.org/drawingml/2006/compatibility" xmlns:p14="http://schemas.microsoft.com/office/powerpoint/2010/main" xmlns:p15="http://schemas.microsoft.com/office/powerpoint/2012/main" xmlns:ahyp="http://schemas.microsoft.com/office/drawing/2018/hyperlinkcolor" matchingName="Main point">
+<p:sldLayout xmlns:a="http://schemas.openxmlformats.org/drawingml/2006/main" xmlns:r="http://schemas.openxmlformats.org/officeDocument/2006/relationships" xmlns:p="http://schemas.openxmlformats.org/presentationml/2006/main" matchingName="Main point">
   <p:cSld name="MAIN_POINT">
     <p:spTree>
       <p:nvGrpSpPr>
-        <p:cNvPr id="32" name="Shape 32"/>
+        <p:cNvPr id="1" name="Shape 32"/>
         <p:cNvGrpSpPr/>
         <p:nvPr/>
       </p:nvGrpSpPr>
@@ -3886,7 +4002,9 @@
       <p:sp>
         <p:nvSpPr>
           <p:cNvPr id="33" name="Google Shape;33;p8"/>
-          <p:cNvSpPr txBox="1"/>
+          <p:cNvSpPr txBox="1">
+            <a:spLocks noGrp="1"/>
+          </p:cNvSpPr>
           <p:nvPr>
             <p:ph type="title"/>
           </p:nvPr>
@@ -3901,7 +4019,7 @@
           </a:prstGeom>
         </p:spPr>
         <p:txBody>
-          <a:bodyPr anchorCtr="0" anchor="ctr" bIns="91425" lIns="91425" spcFirstLastPara="1" rIns="91425" wrap="square" tIns="91425">
+          <a:bodyPr spcFirstLastPara="1" wrap="square" lIns="91425" tIns="91425" rIns="91425" bIns="91425" anchor="ctr" anchorCtr="0">
             <a:normAutofit/>
           </a:bodyPr>
           <a:lstStyle>
@@ -4005,15 +4123,19 @@
               <a:defRPr sz="4800"/>
             </a:lvl9pPr>
           </a:lstStyle>
-          <a:p/>
+          <a:p>
+            <a:endParaRPr/>
+          </a:p>
         </p:txBody>
       </p:sp>
       <p:sp>
         <p:nvSpPr>
           <p:cNvPr id="34" name="Google Shape;34;p8"/>
-          <p:cNvSpPr txBox="1"/>
+          <p:cNvSpPr txBox="1">
+            <a:spLocks noGrp="1"/>
+          </p:cNvSpPr>
           <p:nvPr>
-            <p:ph idx="12" type="sldNum"/>
+            <p:ph type="sldNum" idx="12"/>
           </p:nvPr>
         </p:nvSpPr>
         <p:spPr>
@@ -4026,7 +4148,7 @@
           </a:prstGeom>
         </p:spPr>
         <p:txBody>
-          <a:bodyPr anchorCtr="0" anchor="ctr" bIns="91425" lIns="91425" spcFirstLastPara="1" rIns="91425" wrap="square" tIns="91425">
+          <a:bodyPr spcFirstLastPara="1" wrap="square" lIns="91425" tIns="91425" rIns="91425" bIns="91425" anchor="ctr" anchorCtr="0">
             <a:normAutofit/>
           </a:bodyPr>
           <a:lstStyle>
@@ -4068,7 +4190,7 @@
             </a:lvl9pPr>
           </a:lstStyle>
           <a:p>
-            <a:pPr indent="0" lvl="0" marL="0" rtl="0" algn="r">
+            <a:pPr marL="0" lvl="0" indent="0" algn="r" rtl="0">
               <a:spcBef>
                 <a:spcPts val="0"/>
               </a:spcBef>
@@ -4094,11 +4216,11 @@
 </file>
 
 <file path=ppt/slideLayouts/slideLayout8.xml><?xml version="1.0" encoding="utf-8"?>
-<p:sldLayout xmlns:a="http://schemas.openxmlformats.org/drawingml/2006/main" xmlns:r="http://schemas.openxmlformats.org/officeDocument/2006/relationships" xmlns:mc="http://schemas.openxmlformats.org/markup-compatibility/2006" xmlns:mv="urn:schemas-microsoft-com:mac:vml" xmlns:p="http://schemas.openxmlformats.org/presentationml/2006/main" xmlns:c="http://schemas.openxmlformats.org/drawingml/2006/chart" xmlns:dgm="http://schemas.openxmlformats.org/drawingml/2006/diagram" xmlns:o="urn:schemas-microsoft-com:office:office" xmlns:v="urn:schemas-microsoft-com:vml" xmlns:pvml="urn:schemas-microsoft-com:office:powerpoint" xmlns:com="http://schemas.openxmlformats.org/drawingml/2006/compatibility" xmlns:p14="http://schemas.microsoft.com/office/powerpoint/2010/main" xmlns:p15="http://schemas.microsoft.com/office/powerpoint/2012/main" xmlns:ahyp="http://schemas.microsoft.com/office/drawing/2018/hyperlinkcolor" matchingName="Section title and description">
+<p:sldLayout xmlns:a="http://schemas.openxmlformats.org/drawingml/2006/main" xmlns:r="http://schemas.openxmlformats.org/officeDocument/2006/relationships" xmlns:p="http://schemas.openxmlformats.org/presentationml/2006/main" matchingName="Section title and description">
   <p:cSld name="SECTION_TITLE_AND_DESCRIPTION">
     <p:spTree>
       <p:nvGrpSpPr>
-        <p:cNvPr id="35" name="Shape 35"/>
+        <p:cNvPr id="1" name="Shape 35"/>
         <p:cNvGrpSpPr/>
         <p:nvPr/>
       </p:nvGrpSpPr>
@@ -4132,12 +4254,12 @@
           </a:ln>
         </p:spPr>
         <p:txBody>
-          <a:bodyPr anchorCtr="0" anchor="ctr" bIns="91425" lIns="91425" spcFirstLastPara="1" rIns="91425" wrap="square" tIns="91425">
+          <a:bodyPr spcFirstLastPara="1" wrap="square" lIns="91425" tIns="91425" rIns="91425" bIns="91425" anchor="ctr" anchorCtr="0">
             <a:noAutofit/>
           </a:bodyPr>
           <a:lstStyle/>
           <a:p>
-            <a:pPr indent="0" lvl="0" marL="0" rtl="0" algn="l">
+            <a:pPr marL="0" lvl="0" indent="0" algn="l" rtl="0">
               <a:spcBef>
                 <a:spcPts val="0"/>
               </a:spcBef>
@@ -4146,9 +4268,6 @@
               </a:spcAft>
               <a:buNone/>
             </a:pPr>
-            <a:r>
-              <a:t/>
-            </a:r>
             <a:endParaRPr/>
           </a:p>
         </p:txBody>
@@ -4156,7 +4275,9 @@
       <p:sp>
         <p:nvSpPr>
           <p:cNvPr id="37" name="Google Shape;37;p9"/>
-          <p:cNvSpPr txBox="1"/>
+          <p:cNvSpPr txBox="1">
+            <a:spLocks noGrp="1"/>
+          </p:cNvSpPr>
           <p:nvPr>
             <p:ph type="title"/>
           </p:nvPr>
@@ -4171,7 +4292,7 @@
           </a:prstGeom>
         </p:spPr>
         <p:txBody>
-          <a:bodyPr anchorCtr="0" anchor="b" bIns="91425" lIns="91425" spcFirstLastPara="1" rIns="91425" wrap="square" tIns="91425">
+          <a:bodyPr spcFirstLastPara="1" wrap="square" lIns="91425" tIns="91425" rIns="91425" bIns="91425" anchor="b" anchorCtr="0">
             <a:normAutofit/>
           </a:bodyPr>
           <a:lstStyle>
@@ -4275,15 +4396,19 @@
               <a:defRPr sz="4200"/>
             </a:lvl9pPr>
           </a:lstStyle>
-          <a:p/>
+          <a:p>
+            <a:endParaRPr/>
+          </a:p>
         </p:txBody>
       </p:sp>
       <p:sp>
         <p:nvSpPr>
           <p:cNvPr id="38" name="Google Shape;38;p9"/>
-          <p:cNvSpPr txBox="1"/>
+          <p:cNvSpPr txBox="1">
+            <a:spLocks noGrp="1"/>
+          </p:cNvSpPr>
           <p:nvPr>
-            <p:ph idx="1" type="subTitle"/>
+            <p:ph type="subTitle" idx="1"/>
           </p:nvPr>
         </p:nvSpPr>
         <p:spPr>
@@ -4296,7 +4421,7 @@
           </a:prstGeom>
         </p:spPr>
         <p:txBody>
-          <a:bodyPr anchorCtr="0" anchor="t" bIns="91425" lIns="91425" spcFirstLastPara="1" rIns="91425" wrap="square" tIns="91425">
+          <a:bodyPr spcFirstLastPara="1" wrap="square" lIns="91425" tIns="91425" rIns="91425" bIns="91425" anchor="t" anchorCtr="0">
             <a:normAutofit/>
           </a:bodyPr>
           <a:lstStyle>
@@ -4427,15 +4552,19 @@
               <a:defRPr sz="2100"/>
             </a:lvl9pPr>
           </a:lstStyle>
-          <a:p/>
+          <a:p>
+            <a:endParaRPr/>
+          </a:p>
         </p:txBody>
       </p:sp>
       <p:sp>
         <p:nvSpPr>
           <p:cNvPr id="39" name="Google Shape;39;p9"/>
-          <p:cNvSpPr txBox="1"/>
+          <p:cNvSpPr txBox="1">
+            <a:spLocks noGrp="1"/>
+          </p:cNvSpPr>
           <p:nvPr>
-            <p:ph idx="2" type="body"/>
+            <p:ph type="body" idx="2"/>
           </p:nvPr>
         </p:nvSpPr>
         <p:spPr>
@@ -4448,11 +4577,11 @@
           </a:prstGeom>
         </p:spPr>
         <p:txBody>
-          <a:bodyPr anchorCtr="0" anchor="ctr" bIns="91425" lIns="91425" spcFirstLastPara="1" rIns="91425" wrap="square" tIns="91425">
+          <a:bodyPr spcFirstLastPara="1" wrap="square" lIns="91425" tIns="91425" rIns="91425" bIns="91425" anchor="ctr" anchorCtr="0">
             <a:normAutofit/>
           </a:bodyPr>
           <a:lstStyle>
-            <a:lvl1pPr indent="-342900" lvl="0" marL="457200">
+            <a:lvl1pPr marL="457200" lvl="0" indent="-342900">
               <a:spcBef>
                 <a:spcPts val="0"/>
               </a:spcBef>
@@ -4463,7 +4592,7 @@
               <a:buChar char="●"/>
               <a:defRPr/>
             </a:lvl1pPr>
-            <a:lvl2pPr indent="-317500" lvl="1" marL="914400">
+            <a:lvl2pPr marL="914400" lvl="1" indent="-317500">
               <a:spcBef>
                 <a:spcPts val="0"/>
               </a:spcBef>
@@ -4474,7 +4603,7 @@
               <a:buChar char="○"/>
               <a:defRPr/>
             </a:lvl2pPr>
-            <a:lvl3pPr indent="-317500" lvl="2" marL="1371600">
+            <a:lvl3pPr marL="1371600" lvl="2" indent="-317500">
               <a:spcBef>
                 <a:spcPts val="0"/>
               </a:spcBef>
@@ -4485,7 +4614,7 @@
               <a:buChar char="■"/>
               <a:defRPr/>
             </a:lvl3pPr>
-            <a:lvl4pPr indent="-317500" lvl="3" marL="1828800">
+            <a:lvl4pPr marL="1828800" lvl="3" indent="-317500">
               <a:spcBef>
                 <a:spcPts val="0"/>
               </a:spcBef>
@@ -4496,7 +4625,7 @@
               <a:buChar char="●"/>
               <a:defRPr/>
             </a:lvl4pPr>
-            <a:lvl5pPr indent="-317500" lvl="4" marL="2286000">
+            <a:lvl5pPr marL="2286000" lvl="4" indent="-317500">
               <a:spcBef>
                 <a:spcPts val="0"/>
               </a:spcBef>
@@ -4507,7 +4636,7 @@
               <a:buChar char="○"/>
               <a:defRPr/>
             </a:lvl5pPr>
-            <a:lvl6pPr indent="-317500" lvl="5" marL="2743200">
+            <a:lvl6pPr marL="2743200" lvl="5" indent="-317500">
               <a:spcBef>
                 <a:spcPts val="0"/>
               </a:spcBef>
@@ -4518,7 +4647,7 @@
               <a:buChar char="■"/>
               <a:defRPr/>
             </a:lvl6pPr>
-            <a:lvl7pPr indent="-317500" lvl="6" marL="3200400">
+            <a:lvl7pPr marL="3200400" lvl="6" indent="-317500">
               <a:spcBef>
                 <a:spcPts val="0"/>
               </a:spcBef>
@@ -4529,7 +4658,7 @@
               <a:buChar char="●"/>
               <a:defRPr/>
             </a:lvl7pPr>
-            <a:lvl8pPr indent="-317500" lvl="7" marL="3657600">
+            <a:lvl8pPr marL="3657600" lvl="7" indent="-317500">
               <a:spcBef>
                 <a:spcPts val="0"/>
               </a:spcBef>
@@ -4540,7 +4669,7 @@
               <a:buChar char="○"/>
               <a:defRPr/>
             </a:lvl8pPr>
-            <a:lvl9pPr indent="-317500" lvl="8" marL="4114800">
+            <a:lvl9pPr marL="4114800" lvl="8" indent="-317500">
               <a:spcBef>
                 <a:spcPts val="0"/>
               </a:spcBef>
@@ -4552,15 +4681,19 @@
               <a:defRPr/>
             </a:lvl9pPr>
           </a:lstStyle>
-          <a:p/>
+          <a:p>
+            <a:endParaRPr/>
+          </a:p>
         </p:txBody>
       </p:sp>
       <p:sp>
         <p:nvSpPr>
           <p:cNvPr id="40" name="Google Shape;40;p9"/>
-          <p:cNvSpPr txBox="1"/>
+          <p:cNvSpPr txBox="1">
+            <a:spLocks noGrp="1"/>
+          </p:cNvSpPr>
           <p:nvPr>
-            <p:ph idx="12" type="sldNum"/>
+            <p:ph type="sldNum" idx="12"/>
           </p:nvPr>
         </p:nvSpPr>
         <p:spPr>
@@ -4573,7 +4706,7 @@
           </a:prstGeom>
         </p:spPr>
         <p:txBody>
-          <a:bodyPr anchorCtr="0" anchor="ctr" bIns="91425" lIns="91425" spcFirstLastPara="1" rIns="91425" wrap="square" tIns="91425">
+          <a:bodyPr spcFirstLastPara="1" wrap="square" lIns="91425" tIns="91425" rIns="91425" bIns="91425" anchor="ctr" anchorCtr="0">
             <a:normAutofit/>
           </a:bodyPr>
           <a:lstStyle>
@@ -4615,7 +4748,7 @@
             </a:lvl9pPr>
           </a:lstStyle>
           <a:p>
-            <a:pPr indent="0" lvl="0" marL="0" rtl="0" algn="r">
+            <a:pPr marL="0" lvl="0" indent="0" algn="r" rtl="0">
               <a:spcBef>
                 <a:spcPts val="0"/>
               </a:spcBef>
@@ -4641,11 +4774,11 @@
 </file>
 
 <file path=ppt/slideLayouts/slideLayout9.xml><?xml version="1.0" encoding="utf-8"?>
-<p:sldLayout xmlns:a="http://schemas.openxmlformats.org/drawingml/2006/main" xmlns:r="http://schemas.openxmlformats.org/officeDocument/2006/relationships" xmlns:mc="http://schemas.openxmlformats.org/markup-compatibility/2006" xmlns:mv="urn:schemas-microsoft-com:mac:vml" xmlns:p="http://schemas.openxmlformats.org/presentationml/2006/main" xmlns:c="http://schemas.openxmlformats.org/drawingml/2006/chart" xmlns:dgm="http://schemas.openxmlformats.org/drawingml/2006/diagram" xmlns:o="urn:schemas-microsoft-com:office:office" xmlns:v="urn:schemas-microsoft-com:vml" xmlns:pvml="urn:schemas-microsoft-com:office:powerpoint" xmlns:com="http://schemas.openxmlformats.org/drawingml/2006/compatibility" xmlns:p14="http://schemas.microsoft.com/office/powerpoint/2010/main" xmlns:p15="http://schemas.microsoft.com/office/powerpoint/2012/main" xmlns:ahyp="http://schemas.microsoft.com/office/drawing/2018/hyperlinkcolor" matchingName="Caption">
+<p:sldLayout xmlns:a="http://schemas.openxmlformats.org/drawingml/2006/main" xmlns:r="http://schemas.openxmlformats.org/officeDocument/2006/relationships" xmlns:p="http://schemas.openxmlformats.org/presentationml/2006/main" matchingName="Caption">
   <p:cSld name="CAPTION_ONLY">
     <p:spTree>
       <p:nvGrpSpPr>
-        <p:cNvPr id="41" name="Shape 41"/>
+        <p:cNvPr id="1" name="Shape 41"/>
         <p:cNvGrpSpPr/>
         <p:nvPr/>
       </p:nvGrpSpPr>
@@ -4660,9 +4793,11 @@
       <p:sp>
         <p:nvSpPr>
           <p:cNvPr id="42" name="Google Shape;42;p10"/>
-          <p:cNvSpPr txBox="1"/>
+          <p:cNvSpPr txBox="1">
+            <a:spLocks noGrp="1"/>
+          </p:cNvSpPr>
           <p:nvPr>
-            <p:ph idx="1" type="body"/>
+            <p:ph type="body" idx="1"/>
           </p:nvPr>
         </p:nvSpPr>
         <p:spPr>
@@ -4675,11 +4810,11 @@
           </a:prstGeom>
         </p:spPr>
         <p:txBody>
-          <a:bodyPr anchorCtr="0" anchor="ctr" bIns="91425" lIns="91425" spcFirstLastPara="1" rIns="91425" wrap="square" tIns="91425">
+          <a:bodyPr spcFirstLastPara="1" wrap="square" lIns="91425" tIns="91425" rIns="91425" bIns="91425" anchor="ctr" anchorCtr="0">
             <a:normAutofit/>
           </a:bodyPr>
           <a:lstStyle>
-            <a:lvl1pPr indent="-228600" lvl="0" marL="457200">
+            <a:lvl1pPr marL="457200" lvl="0" indent="-228600">
               <a:lnSpc>
                 <a:spcPct val="100000"/>
               </a:lnSpc>
@@ -4694,15 +4829,19 @@
               <a:defRPr/>
             </a:lvl1pPr>
           </a:lstStyle>
-          <a:p/>
+          <a:p>
+            <a:endParaRPr/>
+          </a:p>
         </p:txBody>
       </p:sp>
       <p:sp>
         <p:nvSpPr>
           <p:cNvPr id="43" name="Google Shape;43;p10"/>
-          <p:cNvSpPr txBox="1"/>
+          <p:cNvSpPr txBox="1">
+            <a:spLocks noGrp="1"/>
+          </p:cNvSpPr>
           <p:nvPr>
-            <p:ph idx="12" type="sldNum"/>
+            <p:ph type="sldNum" idx="12"/>
           </p:nvPr>
         </p:nvSpPr>
         <p:spPr>
@@ -4715,7 +4854,7 @@
           </a:prstGeom>
         </p:spPr>
         <p:txBody>
-          <a:bodyPr anchorCtr="0" anchor="ctr" bIns="91425" lIns="91425" spcFirstLastPara="1" rIns="91425" wrap="square" tIns="91425">
+          <a:bodyPr spcFirstLastPara="1" wrap="square" lIns="91425" tIns="91425" rIns="91425" bIns="91425" anchor="ctr" anchorCtr="0">
             <a:normAutofit/>
           </a:bodyPr>
           <a:lstStyle>
@@ -4757,7 +4896,7 @@
             </a:lvl9pPr>
           </a:lstStyle>
           <a:p>
-            <a:pPr indent="0" lvl="0" marL="0" rtl="0" algn="r">
+            <a:pPr marL="0" lvl="0" indent="0" algn="r" rtl="0">
               <a:spcBef>
                 <a:spcPts val="0"/>
               </a:spcBef>
@@ -4783,18 +4922,19 @@
 </file>
 
 <file path=ppt/slideMasters/slideMaster1.xml><?xml version="1.0" encoding="utf-8"?>
-<p:sldMaster xmlns:a="http://schemas.openxmlformats.org/drawingml/2006/main" xmlns:r="http://schemas.openxmlformats.org/officeDocument/2006/relationships" xmlns:mc="http://schemas.openxmlformats.org/markup-compatibility/2006" xmlns:mv="urn:schemas-microsoft-com:mac:vml" xmlns:p="http://schemas.openxmlformats.org/presentationml/2006/main" xmlns:c="http://schemas.openxmlformats.org/drawingml/2006/chart" xmlns:dgm="http://schemas.openxmlformats.org/drawingml/2006/diagram" xmlns:o="urn:schemas-microsoft-com:office:office" xmlns:v="urn:schemas-microsoft-com:vml" xmlns:pvml="urn:schemas-microsoft-com:office:powerpoint" xmlns:com="http://schemas.openxmlformats.org/drawingml/2006/compatibility" xmlns:p14="http://schemas.microsoft.com/office/powerpoint/2010/main" xmlns:p15="http://schemas.microsoft.com/office/powerpoint/2012/main" xmlns:ahyp="http://schemas.microsoft.com/office/drawing/2018/hyperlinkcolor">
+<p:sldMaster xmlns:a="http://schemas.openxmlformats.org/drawingml/2006/main" xmlns:r="http://schemas.openxmlformats.org/officeDocument/2006/relationships" xmlns:p="http://schemas.openxmlformats.org/presentationml/2006/main">
   <p:cSld name="simple-light-2">
     <p:bg>
       <p:bgPr>
         <a:solidFill>
           <a:schemeClr val="lt1"/>
         </a:solidFill>
+        <a:effectLst/>
       </p:bgPr>
     </p:bg>
     <p:spTree>
       <p:nvGrpSpPr>
-        <p:cNvPr id="5" name="Shape 5"/>
+        <p:cNvPr id="1" name="Shape 5"/>
         <p:cNvGrpSpPr/>
         <p:nvPr/>
       </p:nvGrpSpPr>
@@ -4809,7 +4949,9 @@
       <p:sp>
         <p:nvSpPr>
           <p:cNvPr id="6" name="Google Shape;6;p1"/>
-          <p:cNvSpPr txBox="1"/>
+          <p:cNvSpPr txBox="1">
+            <a:spLocks noGrp="1"/>
+          </p:cNvSpPr>
           <p:nvPr>
             <p:ph type="title"/>
           </p:nvPr>
@@ -4828,7 +4970,7 @@
           </a:ln>
         </p:spPr>
         <p:txBody>
-          <a:bodyPr anchorCtr="0" anchor="t" bIns="91425" lIns="91425" spcFirstLastPara="1" rIns="91425" wrap="square" tIns="91425">
+          <a:bodyPr spcFirstLastPara="1" wrap="square" lIns="91425" tIns="91425" rIns="91425" bIns="91425" anchor="t" anchorCtr="0">
             <a:normAutofit/>
           </a:bodyPr>
           <a:lstStyle>
@@ -4995,15 +5137,19 @@
               </a:defRPr>
             </a:lvl9pPr>
           </a:lstStyle>
-          <a:p/>
+          <a:p>
+            <a:endParaRPr/>
+          </a:p>
         </p:txBody>
       </p:sp>
       <p:sp>
         <p:nvSpPr>
           <p:cNvPr id="7" name="Google Shape;7;p1"/>
-          <p:cNvSpPr txBox="1"/>
+          <p:cNvSpPr txBox="1">
+            <a:spLocks noGrp="1"/>
+          </p:cNvSpPr>
           <p:nvPr>
-            <p:ph idx="1" type="body"/>
+            <p:ph type="body" idx="1"/>
           </p:nvPr>
         </p:nvSpPr>
         <p:spPr>
@@ -5020,11 +5166,11 @@
           </a:ln>
         </p:spPr>
         <p:txBody>
-          <a:bodyPr anchorCtr="0" anchor="t" bIns="91425" lIns="91425" spcFirstLastPara="1" rIns="91425" wrap="square" tIns="91425">
+          <a:bodyPr spcFirstLastPara="1" wrap="square" lIns="91425" tIns="91425" rIns="91425" bIns="91425" anchor="t" anchorCtr="0">
             <a:normAutofit/>
           </a:bodyPr>
           <a:lstStyle>
-            <a:lvl1pPr indent="-342900" lvl="0" marL="457200">
+            <a:lvl1pPr marL="457200" lvl="0" indent="-342900">
               <a:lnSpc>
                 <a:spcPct val="115000"/>
               </a:lnSpc>
@@ -5045,7 +5191,7 @@
                 </a:solidFill>
               </a:defRPr>
             </a:lvl1pPr>
-            <a:lvl2pPr indent="-317500" lvl="1" marL="914400">
+            <a:lvl2pPr marL="914400" lvl="1" indent="-317500">
               <a:lnSpc>
                 <a:spcPct val="115000"/>
               </a:lnSpc>
@@ -5066,7 +5212,7 @@
                 </a:solidFill>
               </a:defRPr>
             </a:lvl2pPr>
-            <a:lvl3pPr indent="-317500" lvl="2" marL="1371600">
+            <a:lvl3pPr marL="1371600" lvl="2" indent="-317500">
               <a:lnSpc>
                 <a:spcPct val="115000"/>
               </a:lnSpc>
@@ -5087,7 +5233,7 @@
                 </a:solidFill>
               </a:defRPr>
             </a:lvl3pPr>
-            <a:lvl4pPr indent="-317500" lvl="3" marL="1828800">
+            <a:lvl4pPr marL="1828800" lvl="3" indent="-317500">
               <a:lnSpc>
                 <a:spcPct val="115000"/>
               </a:lnSpc>
@@ -5108,7 +5254,7 @@
                 </a:solidFill>
               </a:defRPr>
             </a:lvl4pPr>
-            <a:lvl5pPr indent="-317500" lvl="4" marL="2286000">
+            <a:lvl5pPr marL="2286000" lvl="4" indent="-317500">
               <a:lnSpc>
                 <a:spcPct val="115000"/>
               </a:lnSpc>
@@ -5129,7 +5275,7 @@
                 </a:solidFill>
               </a:defRPr>
             </a:lvl5pPr>
-            <a:lvl6pPr indent="-317500" lvl="5" marL="2743200">
+            <a:lvl6pPr marL="2743200" lvl="5" indent="-317500">
               <a:lnSpc>
                 <a:spcPct val="115000"/>
               </a:lnSpc>
@@ -5150,7 +5296,7 @@
                 </a:solidFill>
               </a:defRPr>
             </a:lvl6pPr>
-            <a:lvl7pPr indent="-317500" lvl="6" marL="3200400">
+            <a:lvl7pPr marL="3200400" lvl="6" indent="-317500">
               <a:lnSpc>
                 <a:spcPct val="115000"/>
               </a:lnSpc>
@@ -5171,7 +5317,7 @@
                 </a:solidFill>
               </a:defRPr>
             </a:lvl7pPr>
-            <a:lvl8pPr indent="-317500" lvl="7" marL="3657600">
+            <a:lvl8pPr marL="3657600" lvl="7" indent="-317500">
               <a:lnSpc>
                 <a:spcPct val="115000"/>
               </a:lnSpc>
@@ -5192,7 +5338,7 @@
                 </a:solidFill>
               </a:defRPr>
             </a:lvl8pPr>
-            <a:lvl9pPr indent="-317500" lvl="8" marL="4114800">
+            <a:lvl9pPr marL="4114800" lvl="8" indent="-317500">
               <a:lnSpc>
                 <a:spcPct val="115000"/>
               </a:lnSpc>
@@ -5214,15 +5360,19 @@
               </a:defRPr>
             </a:lvl9pPr>
           </a:lstStyle>
-          <a:p/>
+          <a:p>
+            <a:endParaRPr/>
+          </a:p>
         </p:txBody>
       </p:sp>
       <p:sp>
         <p:nvSpPr>
           <p:cNvPr id="8" name="Google Shape;8;p1"/>
-          <p:cNvSpPr txBox="1"/>
+          <p:cNvSpPr txBox="1">
+            <a:spLocks noGrp="1"/>
+          </p:cNvSpPr>
           <p:nvPr>
-            <p:ph idx="12" type="sldNum"/>
+            <p:ph type="sldNum" idx="12"/>
           </p:nvPr>
         </p:nvSpPr>
         <p:spPr>
@@ -5239,7 +5389,7 @@
           </a:ln>
         </p:spPr>
         <p:txBody>
-          <a:bodyPr anchorCtr="0" anchor="ctr" bIns="91425" lIns="91425" spcFirstLastPara="1" rIns="91425" wrap="square" tIns="91425">
+          <a:bodyPr spcFirstLastPara="1" wrap="square" lIns="91425" tIns="91425" rIns="91425" bIns="91425" anchor="ctr" anchorCtr="0">
             <a:normAutofit/>
           </a:bodyPr>
           <a:lstStyle>
@@ -5317,7 +5467,7 @@
             </a:lvl9pPr>
           </a:lstStyle>
           <a:p>
-            <a:pPr indent="0" lvl="0" marL="0" rtl="0" algn="r">
+            <a:pPr marL="0" lvl="0" indent="0" algn="r" rtl="0">
               <a:spcBef>
                 <a:spcPts val="0"/>
               </a:spcBef>
@@ -5336,7 +5486,7 @@
       </p:sp>
     </p:spTree>
   </p:cSld>
-  <p:clrMap accent1="accent1" accent2="accent2" accent3="accent3" accent4="accent4" accent5="accent5" accent6="accent6" bg1="lt1" bg2="dk2" tx1="dk1" tx2="lt2" folHlink="folHlink" hlink="hlink"/>
+  <p:clrMap bg1="lt1" tx1="dk1" bg2="dk2" tx2="lt2" accent1="accent1" accent2="accent2" accent3="accent3" accent4="accent4" accent5="accent5" accent6="accent6" hlink="hlink" folHlink="folHlink"/>
   <p:sldLayoutIdLst>
     <p:sldLayoutId id="2147483648" r:id="rId1"/>
     <p:sldLayoutId id="2147483649" r:id="rId2"/>
@@ -5350,10 +5500,10 @@
     <p:sldLayoutId id="2147483657" r:id="rId10"/>
     <p:sldLayoutId id="2147483658" r:id="rId11"/>
   </p:sldLayoutIdLst>
-  <p:hf dt="0" ftr="0" hdr="0" sldNum="0"/>
+  <p:hf sldNum="0" hdr="0" ftr="0" dt="0"/>
   <p:txStyles>
     <p:titleStyle>
-      <a:defPPr lvl="0" marR="0" rtl="0" algn="l">
+      <a:defPPr marR="0" lvl="0" algn="l" rtl="0">
         <a:lnSpc>
           <a:spcPct val="100000"/>
         </a:lnSpc>
@@ -5364,7 +5514,7 @@
           <a:spcPts val="0"/>
         </a:spcAft>
       </a:defPPr>
-      <a:lvl1pPr lvl="0" marR="0" rtl="0" algn="l">
+      <a:lvl1pPr marR="0" lvl="0" algn="l" rtl="0">
         <a:lnSpc>
           <a:spcPct val="100000"/>
         </a:lnSpc>
@@ -5378,7 +5528,7 @@
           <a:srgbClr val="000000"/>
         </a:buClr>
         <a:buFont typeface="Arial"/>
-        <a:defRPr b="0" i="0" spc="0" sz="1400" u="none" cap="none" strike="noStrike">
+        <a:defRPr sz="1400" b="0" i="0" u="none" strike="noStrike" cap="none" spc="0">
           <a:solidFill>
             <a:srgbClr val="000000"/>
           </a:solidFill>
@@ -5388,7 +5538,7 @@
           <a:sym typeface="Arial"/>
         </a:defRPr>
       </a:lvl1pPr>
-      <a:lvl2pPr lvl="1" marR="0" rtl="0" algn="l">
+      <a:lvl2pPr marR="0" lvl="1" algn="l" rtl="0">
         <a:lnSpc>
           <a:spcPct val="100000"/>
         </a:lnSpc>
@@ -5402,7 +5552,7 @@
           <a:srgbClr val="000000"/>
         </a:buClr>
         <a:buFont typeface="Arial"/>
-        <a:defRPr b="0" i="0" spc="0" sz="1400" u="none" cap="none" strike="noStrike">
+        <a:defRPr sz="1400" b="0" i="0" u="none" strike="noStrike" cap="none" spc="0">
           <a:solidFill>
             <a:srgbClr val="000000"/>
           </a:solidFill>
@@ -5412,7 +5562,7 @@
           <a:sym typeface="Arial"/>
         </a:defRPr>
       </a:lvl2pPr>
-      <a:lvl3pPr lvl="2" marR="0" rtl="0" algn="l">
+      <a:lvl3pPr marR="0" lvl="2" algn="l" rtl="0">
         <a:lnSpc>
           <a:spcPct val="100000"/>
         </a:lnSpc>
@@ -5426,7 +5576,7 @@
           <a:srgbClr val="000000"/>
         </a:buClr>
         <a:buFont typeface="Arial"/>
-        <a:defRPr b="0" i="0" spc="0" sz="1400" u="none" cap="none" strike="noStrike">
+        <a:defRPr sz="1400" b="0" i="0" u="none" strike="noStrike" cap="none" spc="0">
           <a:solidFill>
             <a:srgbClr val="000000"/>
           </a:solidFill>
@@ -5436,7 +5586,7 @@
           <a:sym typeface="Arial"/>
         </a:defRPr>
       </a:lvl3pPr>
-      <a:lvl4pPr lvl="3" marR="0" rtl="0" algn="l">
+      <a:lvl4pPr marR="0" lvl="3" algn="l" rtl="0">
         <a:lnSpc>
           <a:spcPct val="100000"/>
         </a:lnSpc>
@@ -5450,7 +5600,7 @@
           <a:srgbClr val="000000"/>
         </a:buClr>
         <a:buFont typeface="Arial"/>
-        <a:defRPr b="0" i="0" spc="0" sz="1400" u="none" cap="none" strike="noStrike">
+        <a:defRPr sz="1400" b="0" i="0" u="none" strike="noStrike" cap="none" spc="0">
           <a:solidFill>
             <a:srgbClr val="000000"/>
           </a:solidFill>
@@ -5460,7 +5610,7 @@
           <a:sym typeface="Arial"/>
         </a:defRPr>
       </a:lvl4pPr>
-      <a:lvl5pPr lvl="4" marR="0" rtl="0" algn="l">
+      <a:lvl5pPr marR="0" lvl="4" algn="l" rtl="0">
         <a:lnSpc>
           <a:spcPct val="100000"/>
         </a:lnSpc>
@@ -5474,7 +5624,7 @@
           <a:srgbClr val="000000"/>
         </a:buClr>
         <a:buFont typeface="Arial"/>
-        <a:defRPr b="0" i="0" spc="0" sz="1400" u="none" cap="none" strike="noStrike">
+        <a:defRPr sz="1400" b="0" i="0" u="none" strike="noStrike" cap="none" spc="0">
           <a:solidFill>
             <a:srgbClr val="000000"/>
           </a:solidFill>
@@ -5484,7 +5634,7 @@
           <a:sym typeface="Arial"/>
         </a:defRPr>
       </a:lvl5pPr>
-      <a:lvl6pPr lvl="5" marR="0" rtl="0" algn="l">
+      <a:lvl6pPr marR="0" lvl="5" algn="l" rtl="0">
         <a:lnSpc>
           <a:spcPct val="100000"/>
         </a:lnSpc>
@@ -5498,7 +5648,7 @@
           <a:srgbClr val="000000"/>
         </a:buClr>
         <a:buFont typeface="Arial"/>
-        <a:defRPr b="0" i="0" spc="0" sz="1400" u="none" cap="none" strike="noStrike">
+        <a:defRPr sz="1400" b="0" i="0" u="none" strike="noStrike" cap="none" spc="0">
           <a:solidFill>
             <a:srgbClr val="000000"/>
           </a:solidFill>
@@ -5508,7 +5658,7 @@
           <a:sym typeface="Arial"/>
         </a:defRPr>
       </a:lvl6pPr>
-      <a:lvl7pPr lvl="6" marR="0" rtl="0" algn="l">
+      <a:lvl7pPr marR="0" lvl="6" algn="l" rtl="0">
         <a:lnSpc>
           <a:spcPct val="100000"/>
         </a:lnSpc>
@@ -5522,7 +5672,7 @@
           <a:srgbClr val="000000"/>
         </a:buClr>
         <a:buFont typeface="Arial"/>
-        <a:defRPr b="0" i="0" spc="0" sz="1400" u="none" cap="none" strike="noStrike">
+        <a:defRPr sz="1400" b="0" i="0" u="none" strike="noStrike" cap="none" spc="0">
           <a:solidFill>
             <a:srgbClr val="000000"/>
           </a:solidFill>
@@ -5532,7 +5682,7 @@
           <a:sym typeface="Arial"/>
         </a:defRPr>
       </a:lvl7pPr>
-      <a:lvl8pPr lvl="7" marR="0" rtl="0" algn="l">
+      <a:lvl8pPr marR="0" lvl="7" algn="l" rtl="0">
         <a:lnSpc>
           <a:spcPct val="100000"/>
         </a:lnSpc>
@@ -5546,7 +5696,7 @@
           <a:srgbClr val="000000"/>
         </a:buClr>
         <a:buFont typeface="Arial"/>
-        <a:defRPr b="0" i="0" spc="0" sz="1400" u="none" cap="none" strike="noStrike">
+        <a:defRPr sz="1400" b="0" i="0" u="none" strike="noStrike" cap="none" spc="0">
           <a:solidFill>
             <a:srgbClr val="000000"/>
           </a:solidFill>
@@ -5556,7 +5706,7 @@
           <a:sym typeface="Arial"/>
         </a:defRPr>
       </a:lvl8pPr>
-      <a:lvl9pPr lvl="8" marR="0" rtl="0" algn="l">
+      <a:lvl9pPr marR="0" lvl="8" algn="l" rtl="0">
         <a:lnSpc>
           <a:spcPct val="100000"/>
         </a:lnSpc>
@@ -5570,7 +5720,7 @@
           <a:srgbClr val="000000"/>
         </a:buClr>
         <a:buFont typeface="Arial"/>
-        <a:defRPr b="0" i="0" spc="0" sz="1400" u="none" cap="none" strike="noStrike">
+        <a:defRPr sz="1400" b="0" i="0" u="none" strike="noStrike" cap="none" spc="0">
           <a:solidFill>
             <a:srgbClr val="000000"/>
           </a:solidFill>
@@ -5582,7 +5732,7 @@
       </a:lvl9pPr>
     </p:titleStyle>
     <p:bodyStyle>
-      <a:defPPr lvl="0" marR="0" rtl="0" algn="l">
+      <a:defPPr marR="0" lvl="0" algn="l" rtl="0">
         <a:lnSpc>
           <a:spcPct val="100000"/>
         </a:lnSpc>
@@ -5593,7 +5743,7 @@
           <a:spcPts val="0"/>
         </a:spcAft>
       </a:defPPr>
-      <a:lvl1pPr lvl="0" marR="0" rtl="0" algn="l">
+      <a:lvl1pPr marR="0" lvl="0" algn="l" rtl="0">
         <a:lnSpc>
           <a:spcPct val="100000"/>
         </a:lnSpc>
@@ -5607,7 +5757,7 @@
           <a:srgbClr val="000000"/>
         </a:buClr>
         <a:buFont typeface="Arial"/>
-        <a:defRPr b="0" i="0" spc="0" sz="1400" u="none" cap="none" strike="noStrike">
+        <a:defRPr sz="1400" b="0" i="0" u="none" strike="noStrike" cap="none" spc="0">
           <a:solidFill>
             <a:srgbClr val="000000"/>
           </a:solidFill>
@@ -5617,7 +5767,7 @@
           <a:sym typeface="Arial"/>
         </a:defRPr>
       </a:lvl1pPr>
-      <a:lvl2pPr lvl="1" marR="0" rtl="0" algn="l">
+      <a:lvl2pPr marR="0" lvl="1" algn="l" rtl="0">
         <a:lnSpc>
           <a:spcPct val="100000"/>
         </a:lnSpc>
@@ -5631,7 +5781,7 @@
           <a:srgbClr val="000000"/>
         </a:buClr>
         <a:buFont typeface="Arial"/>
-        <a:defRPr b="0" i="0" spc="0" sz="1400" u="none" cap="none" strike="noStrike">
+        <a:defRPr sz="1400" b="0" i="0" u="none" strike="noStrike" cap="none" spc="0">
           <a:solidFill>
             <a:srgbClr val="000000"/>
           </a:solidFill>
@@ -5641,7 +5791,7 @@
           <a:sym typeface="Arial"/>
         </a:defRPr>
       </a:lvl2pPr>
-      <a:lvl3pPr lvl="2" marR="0" rtl="0" algn="l">
+      <a:lvl3pPr marR="0" lvl="2" algn="l" rtl="0">
         <a:lnSpc>
           <a:spcPct val="100000"/>
         </a:lnSpc>
@@ -5655,7 +5805,7 @@
           <a:srgbClr val="000000"/>
         </a:buClr>
         <a:buFont typeface="Arial"/>
-        <a:defRPr b="0" i="0" spc="0" sz="1400" u="none" cap="none" strike="noStrike">
+        <a:defRPr sz="1400" b="0" i="0" u="none" strike="noStrike" cap="none" spc="0">
           <a:solidFill>
             <a:srgbClr val="000000"/>
           </a:solidFill>
@@ -5665,7 +5815,7 @@
           <a:sym typeface="Arial"/>
         </a:defRPr>
       </a:lvl3pPr>
-      <a:lvl4pPr lvl="3" marR="0" rtl="0" algn="l">
+      <a:lvl4pPr marR="0" lvl="3" algn="l" rtl="0">
         <a:lnSpc>
           <a:spcPct val="100000"/>
         </a:lnSpc>
@@ -5679,7 +5829,7 @@
           <a:srgbClr val="000000"/>
         </a:buClr>
         <a:buFont typeface="Arial"/>
-        <a:defRPr b="0" i="0" spc="0" sz="1400" u="none" cap="none" strike="noStrike">
+        <a:defRPr sz="1400" b="0" i="0" u="none" strike="noStrike" cap="none" spc="0">
           <a:solidFill>
             <a:srgbClr val="000000"/>
           </a:solidFill>
@@ -5689,7 +5839,7 @@
           <a:sym typeface="Arial"/>
         </a:defRPr>
       </a:lvl4pPr>
-      <a:lvl5pPr lvl="4" marR="0" rtl="0" algn="l">
+      <a:lvl5pPr marR="0" lvl="4" algn="l" rtl="0">
         <a:lnSpc>
           <a:spcPct val="100000"/>
         </a:lnSpc>
@@ -5703,7 +5853,7 @@
           <a:srgbClr val="000000"/>
         </a:buClr>
         <a:buFont typeface="Arial"/>
-        <a:defRPr b="0" i="0" spc="0" sz="1400" u="none" cap="none" strike="noStrike">
+        <a:defRPr sz="1400" b="0" i="0" u="none" strike="noStrike" cap="none" spc="0">
           <a:solidFill>
             <a:srgbClr val="000000"/>
           </a:solidFill>
@@ -5713,7 +5863,7 @@
           <a:sym typeface="Arial"/>
         </a:defRPr>
       </a:lvl5pPr>
-      <a:lvl6pPr lvl="5" marR="0" rtl="0" algn="l">
+      <a:lvl6pPr marR="0" lvl="5" algn="l" rtl="0">
         <a:lnSpc>
           <a:spcPct val="100000"/>
         </a:lnSpc>
@@ -5727,7 +5877,7 @@
           <a:srgbClr val="000000"/>
         </a:buClr>
         <a:buFont typeface="Arial"/>
-        <a:defRPr b="0" i="0" spc="0" sz="1400" u="none" cap="none" strike="noStrike">
+        <a:defRPr sz="1400" b="0" i="0" u="none" strike="noStrike" cap="none" spc="0">
           <a:solidFill>
             <a:srgbClr val="000000"/>
           </a:solidFill>
@@ -5737,7 +5887,7 @@
           <a:sym typeface="Arial"/>
         </a:defRPr>
       </a:lvl6pPr>
-      <a:lvl7pPr lvl="6" marR="0" rtl="0" algn="l">
+      <a:lvl7pPr marR="0" lvl="6" algn="l" rtl="0">
         <a:lnSpc>
           <a:spcPct val="100000"/>
         </a:lnSpc>
@@ -5751,7 +5901,7 @@
           <a:srgbClr val="000000"/>
         </a:buClr>
         <a:buFont typeface="Arial"/>
-        <a:defRPr b="0" i="0" spc="0" sz="1400" u="none" cap="none" strike="noStrike">
+        <a:defRPr sz="1400" b="0" i="0" u="none" strike="noStrike" cap="none" spc="0">
           <a:solidFill>
             <a:srgbClr val="000000"/>
           </a:solidFill>
@@ -5761,7 +5911,7 @@
           <a:sym typeface="Arial"/>
         </a:defRPr>
       </a:lvl7pPr>
-      <a:lvl8pPr lvl="7" marR="0" rtl="0" algn="l">
+      <a:lvl8pPr marR="0" lvl="7" algn="l" rtl="0">
         <a:lnSpc>
           <a:spcPct val="100000"/>
         </a:lnSpc>
@@ -5775,7 +5925,7 @@
           <a:srgbClr val="000000"/>
         </a:buClr>
         <a:buFont typeface="Arial"/>
-        <a:defRPr b="0" i="0" spc="0" sz="1400" u="none" cap="none" strike="noStrike">
+        <a:defRPr sz="1400" b="0" i="0" u="none" strike="noStrike" cap="none" spc="0">
           <a:solidFill>
             <a:srgbClr val="000000"/>
           </a:solidFill>
@@ -5785,7 +5935,7 @@
           <a:sym typeface="Arial"/>
         </a:defRPr>
       </a:lvl8pPr>
-      <a:lvl9pPr lvl="8" marR="0" rtl="0" algn="l">
+      <a:lvl9pPr marR="0" lvl="8" algn="l" rtl="0">
         <a:lnSpc>
           <a:spcPct val="100000"/>
         </a:lnSpc>
@@ -5799,7 +5949,7 @@
           <a:srgbClr val="000000"/>
         </a:buClr>
         <a:buFont typeface="Arial"/>
-        <a:defRPr b="0" i="0" spc="0" sz="1400" u="none" cap="none" strike="noStrike">
+        <a:defRPr sz="1400" b="0" i="0" u="none" strike="noStrike" cap="none" spc="0">
           <a:solidFill>
             <a:srgbClr val="000000"/>
           </a:solidFill>
@@ -5811,7 +5961,7 @@
       </a:lvl9pPr>
     </p:bodyStyle>
     <p:otherStyle>
-      <a:defPPr lvl="0" marR="0" rtl="0" algn="l">
+      <a:defPPr marR="0" lvl="0" algn="l" rtl="0">
         <a:lnSpc>
           <a:spcPct val="100000"/>
         </a:lnSpc>
@@ -5822,7 +5972,7 @@
           <a:spcPts val="0"/>
         </a:spcAft>
       </a:defPPr>
-      <a:lvl1pPr lvl="0" marR="0" rtl="0" algn="l">
+      <a:lvl1pPr marR="0" lvl="0" algn="l" rtl="0">
         <a:lnSpc>
           <a:spcPct val="100000"/>
         </a:lnSpc>
@@ -5836,7 +5986,7 @@
           <a:srgbClr val="000000"/>
         </a:buClr>
         <a:buFont typeface="Arial"/>
-        <a:defRPr b="0" i="0" spc="0" sz="1400" u="none" cap="none" strike="noStrike">
+        <a:defRPr sz="1400" b="0" i="0" u="none" strike="noStrike" cap="none" spc="0">
           <a:solidFill>
             <a:srgbClr val="000000"/>
           </a:solidFill>
@@ -5846,7 +5996,7 @@
           <a:sym typeface="Arial"/>
         </a:defRPr>
       </a:lvl1pPr>
-      <a:lvl2pPr lvl="1" marR="0" rtl="0" algn="l">
+      <a:lvl2pPr marR="0" lvl="1" algn="l" rtl="0">
         <a:lnSpc>
           <a:spcPct val="100000"/>
         </a:lnSpc>
@@ -5860,7 +6010,7 @@
           <a:srgbClr val="000000"/>
         </a:buClr>
         <a:buFont typeface="Arial"/>
-        <a:defRPr b="0" i="0" spc="0" sz="1400" u="none" cap="none" strike="noStrike">
+        <a:defRPr sz="1400" b="0" i="0" u="none" strike="noStrike" cap="none" spc="0">
           <a:solidFill>
             <a:srgbClr val="000000"/>
           </a:solidFill>
@@ -5870,7 +6020,7 @@
           <a:sym typeface="Arial"/>
         </a:defRPr>
       </a:lvl2pPr>
-      <a:lvl3pPr lvl="2" marR="0" rtl="0" algn="l">
+      <a:lvl3pPr marR="0" lvl="2" algn="l" rtl="0">
         <a:lnSpc>
           <a:spcPct val="100000"/>
         </a:lnSpc>
@@ -5884,7 +6034,7 @@
           <a:srgbClr val="000000"/>
         </a:buClr>
         <a:buFont typeface="Arial"/>
-        <a:defRPr b="0" i="0" spc="0" sz="1400" u="none" cap="none" strike="noStrike">
+        <a:defRPr sz="1400" b="0" i="0" u="none" strike="noStrike" cap="none" spc="0">
           <a:solidFill>
             <a:srgbClr val="000000"/>
           </a:solidFill>
@@ -5894,7 +6044,7 @@
           <a:sym typeface="Arial"/>
         </a:defRPr>
       </a:lvl3pPr>
-      <a:lvl4pPr lvl="3" marR="0" rtl="0" algn="l">
+      <a:lvl4pPr marR="0" lvl="3" algn="l" rtl="0">
         <a:lnSpc>
           <a:spcPct val="100000"/>
         </a:lnSpc>
@@ -5908,7 +6058,7 @@
           <a:srgbClr val="000000"/>
         </a:buClr>
         <a:buFont typeface="Arial"/>
-        <a:defRPr b="0" i="0" spc="0" sz="1400" u="none" cap="none" strike="noStrike">
+        <a:defRPr sz="1400" b="0" i="0" u="none" strike="noStrike" cap="none" spc="0">
           <a:solidFill>
             <a:srgbClr val="000000"/>
           </a:solidFill>
@@ -5918,7 +6068,7 @@
           <a:sym typeface="Arial"/>
         </a:defRPr>
       </a:lvl4pPr>
-      <a:lvl5pPr lvl="4" marR="0" rtl="0" algn="l">
+      <a:lvl5pPr marR="0" lvl="4" algn="l" rtl="0">
         <a:lnSpc>
           <a:spcPct val="100000"/>
         </a:lnSpc>
@@ -5932,7 +6082,7 @@
           <a:srgbClr val="000000"/>
         </a:buClr>
         <a:buFont typeface="Arial"/>
-        <a:defRPr b="0" i="0" spc="0" sz="1400" u="none" cap="none" strike="noStrike">
+        <a:defRPr sz="1400" b="0" i="0" u="none" strike="noStrike" cap="none" spc="0">
           <a:solidFill>
             <a:srgbClr val="000000"/>
           </a:solidFill>
@@ -5942,7 +6092,7 @@
           <a:sym typeface="Arial"/>
         </a:defRPr>
       </a:lvl5pPr>
-      <a:lvl6pPr lvl="5" marR="0" rtl="0" algn="l">
+      <a:lvl6pPr marR="0" lvl="5" algn="l" rtl="0">
         <a:lnSpc>
           <a:spcPct val="100000"/>
         </a:lnSpc>
@@ -5956,7 +6106,7 @@
           <a:srgbClr val="000000"/>
         </a:buClr>
         <a:buFont typeface="Arial"/>
-        <a:defRPr b="0" i="0" spc="0" sz="1400" u="none" cap="none" strike="noStrike">
+        <a:defRPr sz="1400" b="0" i="0" u="none" strike="noStrike" cap="none" spc="0">
           <a:solidFill>
             <a:srgbClr val="000000"/>
           </a:solidFill>
@@ -5966,7 +6116,7 @@
           <a:sym typeface="Arial"/>
         </a:defRPr>
       </a:lvl6pPr>
-      <a:lvl7pPr lvl="6" marR="0" rtl="0" algn="l">
+      <a:lvl7pPr marR="0" lvl="6" algn="l" rtl="0">
         <a:lnSpc>
           <a:spcPct val="100000"/>
         </a:lnSpc>
@@ -5980,7 +6130,7 @@
           <a:srgbClr val="000000"/>
         </a:buClr>
         <a:buFont typeface="Arial"/>
-        <a:defRPr b="0" i="0" spc="0" sz="1400" u="none" cap="none" strike="noStrike">
+        <a:defRPr sz="1400" b="0" i="0" u="none" strike="noStrike" cap="none" spc="0">
           <a:solidFill>
             <a:srgbClr val="000000"/>
           </a:solidFill>
@@ -5990,7 +6140,7 @@
           <a:sym typeface="Arial"/>
         </a:defRPr>
       </a:lvl7pPr>
-      <a:lvl8pPr lvl="7" marR="0" rtl="0" algn="l">
+      <a:lvl8pPr marR="0" lvl="7" algn="l" rtl="0">
         <a:lnSpc>
           <a:spcPct val="100000"/>
         </a:lnSpc>
@@ -6004,7 +6154,7 @@
           <a:srgbClr val="000000"/>
         </a:buClr>
         <a:buFont typeface="Arial"/>
-        <a:defRPr b="0" i="0" spc="0" sz="1400" u="none" cap="none" strike="noStrike">
+        <a:defRPr sz="1400" b="0" i="0" u="none" strike="noStrike" cap="none" spc="0">
           <a:solidFill>
             <a:srgbClr val="000000"/>
           </a:solidFill>
@@ -6014,7 +6164,7 @@
           <a:sym typeface="Arial"/>
         </a:defRPr>
       </a:lvl8pPr>
-      <a:lvl9pPr lvl="8" marR="0" rtl="0" algn="l">
+      <a:lvl9pPr marR="0" lvl="8" algn="l" rtl="0">
         <a:lnSpc>
           <a:spcPct val="100000"/>
         </a:lnSpc>
@@ -6028,7 +6178,7 @@
           <a:srgbClr val="000000"/>
         </a:buClr>
         <a:buFont typeface="Arial"/>
-        <a:defRPr b="0" i="0" spc="0" sz="1400" u="none" cap="none" strike="noStrike">
+        <a:defRPr sz="1400" b="0" i="0" u="none" strike="noStrike" cap="none" spc="0">
           <a:solidFill>
             <a:srgbClr val="000000"/>
           </a:solidFill>
@@ -6044,18 +6194,19 @@
 </file>
 
 <file path=ppt/slides/slide1.xml><?xml version="1.0" encoding="utf-8"?>
-<p:sld xmlns:a="http://schemas.openxmlformats.org/drawingml/2006/main" xmlns:r="http://schemas.openxmlformats.org/officeDocument/2006/relationships" xmlns:mc="http://schemas.openxmlformats.org/markup-compatibility/2006" xmlns:mv="urn:schemas-microsoft-com:mac:vml" xmlns:p="http://schemas.openxmlformats.org/presentationml/2006/main" xmlns:c="http://schemas.openxmlformats.org/drawingml/2006/chart" xmlns:dgm="http://schemas.openxmlformats.org/drawingml/2006/diagram" xmlns:o="urn:schemas-microsoft-com:office:office" xmlns:v="urn:schemas-microsoft-com:vml" xmlns:pvml="urn:schemas-microsoft-com:office:powerpoint" xmlns:com="http://schemas.openxmlformats.org/drawingml/2006/compatibility" xmlns:p14="http://schemas.microsoft.com/office/powerpoint/2010/main" xmlns:p15="http://schemas.microsoft.com/office/powerpoint/2012/main" xmlns:ahyp="http://schemas.microsoft.com/office/drawing/2018/hyperlinkcolor">
+<p:sld xmlns:a="http://schemas.openxmlformats.org/drawingml/2006/main" xmlns:r="http://schemas.openxmlformats.org/officeDocument/2006/relationships" xmlns:p="http://schemas.openxmlformats.org/presentationml/2006/main">
   <p:cSld>
     <p:bg>
       <p:bgPr>
         <a:solidFill>
           <a:srgbClr val="465A8F"/>
         </a:solidFill>
+        <a:effectLst/>
       </p:bgPr>
     </p:bg>
     <p:spTree>
       <p:nvGrpSpPr>
-        <p:cNvPr id="53" name="Shape 53"/>
+        <p:cNvPr id="1" name="Shape 53"/>
         <p:cNvGrpSpPr/>
         <p:nvPr/>
       </p:nvGrpSpPr>
@@ -6070,7 +6221,9 @@
       <p:sp>
         <p:nvSpPr>
           <p:cNvPr id="54" name="Google Shape;54;p13"/>
-          <p:cNvSpPr txBox="1"/>
+          <p:cNvSpPr txBox="1">
+            <a:spLocks noGrp="1"/>
+          </p:cNvSpPr>
           <p:nvPr>
             <p:ph type="ctrTitle"/>
           </p:nvPr>
@@ -6085,12 +6238,12 @@
           </a:prstGeom>
         </p:spPr>
         <p:txBody>
-          <a:bodyPr anchorCtr="0" anchor="b" bIns="91425" lIns="91425" spcFirstLastPara="1" rIns="91425" wrap="square" tIns="91425">
+          <a:bodyPr spcFirstLastPara="1" wrap="square" lIns="91425" tIns="91425" rIns="91425" bIns="91425" anchor="b" anchorCtr="0">
             <a:noAutofit/>
           </a:bodyPr>
           <a:lstStyle/>
           <a:p>
-            <a:pPr indent="0" lvl="0" marL="0" rtl="0" algn="l">
+            <a:pPr marL="0" lvl="0" indent="0" algn="l" rtl="0">
               <a:spcBef>
                 <a:spcPts val="0"/>
               </a:spcBef>
@@ -6115,7 +6268,7 @@
             </a:endParaRPr>
           </a:p>
           <a:p>
-            <a:pPr indent="0" lvl="0" marL="0" rtl="0" algn="l">
+            <a:pPr marL="0" lvl="0" indent="0" algn="l" rtl="0">
               <a:spcBef>
                 <a:spcPts val="0"/>
               </a:spcBef>
@@ -6140,7 +6293,7 @@
             </a:endParaRPr>
           </a:p>
           <a:p>
-            <a:pPr indent="0" lvl="0" marL="0" rtl="0" algn="l">
+            <a:pPr marL="0" lvl="0" indent="0" algn="l" rtl="0">
               <a:spcBef>
                 <a:spcPts val="0"/>
               </a:spcBef>
@@ -6169,9 +6322,11 @@
       <p:sp>
         <p:nvSpPr>
           <p:cNvPr id="55" name="Google Shape;55;p13"/>
-          <p:cNvSpPr txBox="1"/>
+          <p:cNvSpPr txBox="1">
+            <a:spLocks noGrp="1"/>
+          </p:cNvSpPr>
           <p:nvPr>
-            <p:ph idx="1" type="subTitle"/>
+            <p:ph type="subTitle" idx="1"/>
           </p:nvPr>
         </p:nvSpPr>
         <p:spPr>
@@ -6184,12 +6339,12 @@
           </a:prstGeom>
         </p:spPr>
         <p:txBody>
-          <a:bodyPr anchorCtr="0" anchor="t" bIns="91425" lIns="91425" spcFirstLastPara="1" rIns="91425" wrap="square" tIns="91425">
-            <a:normAutofit lnSpcReduction="20000"/>
+          <a:bodyPr spcFirstLastPara="1" wrap="square" lIns="91425" tIns="91425" rIns="91425" bIns="91425" anchor="t" anchorCtr="0">
+            <a:normAutofit/>
           </a:bodyPr>
           <a:lstStyle/>
           <a:p>
-            <a:pPr indent="0" lvl="0" marL="0" rtl="0" algn="l">
+            <a:pPr marL="0" lvl="0" indent="0" algn="l" rtl="0">
               <a:lnSpc>
                 <a:spcPct val="80000"/>
               </a:lnSpc>
@@ -6217,7 +6372,7 @@
             </a:endParaRPr>
           </a:p>
           <a:p>
-            <a:pPr indent="0" lvl="0" marL="0" rtl="0" algn="l">
+            <a:pPr marL="0" lvl="0" indent="0" algn="l" rtl="0">
               <a:lnSpc>
                 <a:spcPct val="80000"/>
               </a:lnSpc>
@@ -6230,9 +6385,6 @@
               <a:buSzPts val="853"/>
               <a:buNone/>
             </a:pPr>
-            <a:r>
-              <a:t/>
-            </a:r>
             <a:endParaRPr sz="1670">
               <a:solidFill>
                 <a:schemeClr val="accent6"/>
@@ -6240,7 +6392,7 @@
             </a:endParaRPr>
           </a:p>
           <a:p>
-            <a:pPr indent="0" lvl="0" marL="0" rtl="0" algn="l">
+            <a:pPr marL="0" lvl="0" indent="0" algn="l" rtl="0">
               <a:lnSpc>
                 <a:spcPct val="80000"/>
               </a:lnSpc>
@@ -6268,7 +6420,7 @@
             </a:endParaRPr>
           </a:p>
           <a:p>
-            <a:pPr indent="0" lvl="0" marL="0" rtl="0" algn="l">
+            <a:pPr marL="0" lvl="0" indent="0" algn="l" rtl="0">
               <a:lnSpc>
                 <a:spcPct val="80000"/>
               </a:lnSpc>
@@ -6281,9 +6433,6 @@
               <a:buSzPts val="853"/>
               <a:buNone/>
             </a:pPr>
-            <a:r>
-              <a:t/>
-            </a:r>
             <a:endParaRPr sz="1670">
               <a:solidFill>
                 <a:schemeClr val="accent6"/>
@@ -6329,11 +6478,11 @@
 </file>
 
 <file path=ppt/slides/slide2.xml><?xml version="1.0" encoding="utf-8"?>
-<p:sld xmlns:a="http://schemas.openxmlformats.org/drawingml/2006/main" xmlns:r="http://schemas.openxmlformats.org/officeDocument/2006/relationships" xmlns:mc="http://schemas.openxmlformats.org/markup-compatibility/2006" xmlns:mv="urn:schemas-microsoft-com:mac:vml" xmlns:p="http://schemas.openxmlformats.org/presentationml/2006/main" xmlns:c="http://schemas.openxmlformats.org/drawingml/2006/chart" xmlns:dgm="http://schemas.openxmlformats.org/drawingml/2006/diagram" xmlns:o="urn:schemas-microsoft-com:office:office" xmlns:v="urn:schemas-microsoft-com:vml" xmlns:pvml="urn:schemas-microsoft-com:office:powerpoint" xmlns:com="http://schemas.openxmlformats.org/drawingml/2006/compatibility" xmlns:p14="http://schemas.microsoft.com/office/powerpoint/2010/main" xmlns:p15="http://schemas.microsoft.com/office/powerpoint/2012/main" xmlns:ahyp="http://schemas.microsoft.com/office/drawing/2018/hyperlinkcolor">
+<p:sld xmlns:a="http://schemas.openxmlformats.org/drawingml/2006/main" xmlns:r="http://schemas.openxmlformats.org/officeDocument/2006/relationships" xmlns:p="http://schemas.openxmlformats.org/presentationml/2006/main">
   <p:cSld>
     <p:spTree>
       <p:nvGrpSpPr>
-        <p:cNvPr id="60" name="Shape 60"/>
+        <p:cNvPr id="1" name="Shape 60"/>
         <p:cNvGrpSpPr/>
         <p:nvPr/>
       </p:nvGrpSpPr>
@@ -6348,7 +6497,9 @@
       <p:sp>
         <p:nvSpPr>
           <p:cNvPr id="61" name="Google Shape;61;p14"/>
-          <p:cNvSpPr txBox="1"/>
+          <p:cNvSpPr txBox="1">
+            <a:spLocks noGrp="1"/>
+          </p:cNvSpPr>
           <p:nvPr>
             <p:ph type="title"/>
           </p:nvPr>
@@ -6363,12 +6514,12 @@
           </a:prstGeom>
         </p:spPr>
         <p:txBody>
-          <a:bodyPr anchorCtr="0" anchor="t" bIns="91425" lIns="91425" spcFirstLastPara="1" rIns="91425" wrap="square" tIns="91425">
-            <a:normAutofit/>
+          <a:bodyPr spcFirstLastPara="1" wrap="square" lIns="91425" tIns="91425" rIns="91425" bIns="91425" anchor="t" anchorCtr="0">
+            <a:normAutofit fontScale="90000"/>
           </a:bodyPr>
           <a:lstStyle/>
           <a:p>
-            <a:pPr indent="0" lvl="0" marL="0" rtl="0" algn="l">
+            <a:pPr marL="0" lvl="0" indent="0" algn="l" rtl="0">
               <a:lnSpc>
                 <a:spcPct val="115000"/>
               </a:lnSpc>
@@ -6381,14 +6532,14 @@
               <a:buNone/>
             </a:pPr>
             <a:r>
-              <a:rPr b="1" lang="en" sz="2000">
+              <a:rPr lang="en" sz="2000" b="1">
                 <a:solidFill>
                   <a:srgbClr val="1C4587"/>
                 </a:solidFill>
               </a:rPr>
               <a:t>Latar Belakang dan Gambaran Umum</a:t>
             </a:r>
-            <a:endParaRPr b="1" sz="3000">
+            <a:endParaRPr sz="3000" b="1">
               <a:solidFill>
                 <a:srgbClr val="1C4587"/>
               </a:solidFill>
@@ -6399,9 +6550,11 @@
       <p:sp>
         <p:nvSpPr>
           <p:cNvPr id="62" name="Google Shape;62;p14"/>
-          <p:cNvSpPr txBox="1"/>
+          <p:cNvSpPr txBox="1">
+            <a:spLocks noGrp="1"/>
+          </p:cNvSpPr>
           <p:nvPr>
-            <p:ph idx="1" type="body"/>
+            <p:ph type="body" idx="1"/>
           </p:nvPr>
         </p:nvSpPr>
         <p:spPr>
@@ -6417,12 +6570,12 @@
           </a:ln>
         </p:spPr>
         <p:txBody>
-          <a:bodyPr anchorCtr="0" anchor="t" bIns="91425" lIns="91425" spcFirstLastPara="1" rIns="91425" wrap="square" tIns="91425">
+          <a:bodyPr spcFirstLastPara="1" wrap="square" lIns="91425" tIns="91425" rIns="91425" bIns="91425" anchor="t" anchorCtr="0">
             <a:noAutofit/>
           </a:bodyPr>
           <a:lstStyle/>
           <a:p>
-            <a:pPr indent="0" lvl="0" marL="0" rtl="0" algn="l">
+            <a:pPr marL="0" lvl="0" indent="0" algn="l" rtl="0">
               <a:lnSpc>
                 <a:spcPct val="95000"/>
               </a:lnSpc>
@@ -6450,7 +6603,7 @@
             </a:endParaRPr>
           </a:p>
           <a:p>
-            <a:pPr indent="-303848" lvl="0" marL="457200" rtl="0" algn="l">
+            <a:pPr marL="457200" lvl="0" indent="-303848" algn="l" rtl="0">
               <a:lnSpc>
                 <a:spcPct val="95000"/>
               </a:lnSpc>
@@ -6481,7 +6634,7 @@
             </a:endParaRPr>
           </a:p>
           <a:p>
-            <a:pPr indent="-303848" lvl="0" marL="457200" rtl="0" algn="l">
+            <a:pPr marL="457200" lvl="0" indent="-303848" algn="l" rtl="0">
               <a:lnSpc>
                 <a:spcPct val="95000"/>
               </a:lnSpc>
@@ -6512,7 +6665,7 @@
             </a:endParaRPr>
           </a:p>
           <a:p>
-            <a:pPr indent="-303848" lvl="0" marL="457200" rtl="0" algn="l">
+            <a:pPr marL="457200" lvl="0" indent="-303848" algn="l" rtl="0">
               <a:lnSpc>
                 <a:spcPct val="95000"/>
               </a:lnSpc>
@@ -6543,7 +6696,7 @@
             </a:endParaRPr>
           </a:p>
           <a:p>
-            <a:pPr indent="-303848" lvl="0" marL="457200" rtl="0" algn="l">
+            <a:pPr marL="457200" lvl="0" indent="-303848" algn="l" rtl="0">
               <a:lnSpc>
                 <a:spcPct val="95000"/>
               </a:lnSpc>
@@ -6574,7 +6727,7 @@
             </a:endParaRPr>
           </a:p>
           <a:p>
-            <a:pPr indent="0" lvl="0" marL="0" rtl="0" algn="l">
+            <a:pPr marL="0" lvl="0" indent="0" algn="l" rtl="0">
               <a:lnSpc>
                 <a:spcPct val="95000"/>
               </a:lnSpc>
@@ -6602,7 +6755,7 @@
             </a:endParaRPr>
           </a:p>
           <a:p>
-            <a:pPr indent="-303848" lvl="0" marL="457200" rtl="0" algn="l">
+            <a:pPr marL="457200" lvl="0" indent="-303848" algn="l" rtl="0">
               <a:lnSpc>
                 <a:spcPct val="95000"/>
               </a:lnSpc>
@@ -6633,7 +6786,7 @@
             </a:endParaRPr>
           </a:p>
           <a:p>
-            <a:pPr indent="-303848" lvl="0" marL="457200" rtl="0" algn="l">
+            <a:pPr marL="457200" lvl="0" indent="-303848" algn="l" rtl="0">
               <a:lnSpc>
                 <a:spcPct val="95000"/>
               </a:lnSpc>
@@ -6679,7 +6832,7 @@
             </a:endParaRPr>
           </a:p>
           <a:p>
-            <a:pPr indent="-303848" lvl="0" marL="457200" rtl="0" algn="l">
+            <a:pPr marL="457200" lvl="0" indent="-303848" algn="l" rtl="0">
               <a:lnSpc>
                 <a:spcPct val="95000"/>
               </a:lnSpc>
@@ -6710,7 +6863,7 @@
             </a:endParaRPr>
           </a:p>
           <a:p>
-            <a:pPr indent="0" lvl="0" marL="457200" rtl="0" algn="l">
+            <a:pPr marL="457200" lvl="0" indent="0" algn="l" rtl="0">
               <a:lnSpc>
                 <a:spcPct val="95000"/>
               </a:lnSpc>
@@ -6723,9 +6876,6 @@
               <a:buSzPts val="853"/>
               <a:buNone/>
             </a:pPr>
-            <a:r>
-              <a:t/>
-            </a:r>
             <a:endParaRPr sz="1185">
               <a:solidFill>
                 <a:schemeClr val="dk1"/>
@@ -6744,7 +6894,7 @@
           <a:blip r:embed="rId3">
             <a:alphaModFix/>
           </a:blip>
-          <a:srcRect b="0" l="18693" r="0" t="0"/>
+          <a:srcRect l="18693"/>
           <a:stretch/>
         </p:blipFill>
         <p:spPr>
@@ -6846,23 +6996,23 @@
               <a:avLst/>
             </a:prstGeom>
             <a:noFill/>
-            <a:ln cap="flat" cmpd="sng" w="10300">
+            <a:ln w="10300" cap="flat" cmpd="sng">
               <a:solidFill>
                 <a:schemeClr val="accent6"/>
               </a:solidFill>
               <a:prstDash val="solid"/>
               <a:round/>
-              <a:headEnd len="sm" w="sm" type="none"/>
-              <a:tailEnd len="sm" w="sm" type="none"/>
+              <a:headEnd type="none" w="sm" len="sm"/>
+              <a:tailEnd type="none" w="sm" len="sm"/>
             </a:ln>
           </p:spPr>
           <p:txBody>
-            <a:bodyPr anchorCtr="0" anchor="ctr" bIns="98800" lIns="98800" spcFirstLastPara="1" rIns="98800" wrap="square" tIns="98800">
+            <a:bodyPr spcFirstLastPara="1" wrap="square" lIns="98800" tIns="98800" rIns="98800" bIns="98800" anchor="ctr" anchorCtr="0">
               <a:noAutofit/>
             </a:bodyPr>
             <a:lstStyle/>
             <a:p>
-              <a:pPr indent="0" lvl="0" marL="0" rtl="0" algn="ctr">
+              <a:pPr marL="0" lvl="0" indent="0" algn="ctr" rtl="0">
                 <a:spcBef>
                   <a:spcPts val="0"/>
                 </a:spcBef>
@@ -6871,9 +7021,6 @@
                 </a:spcAft>
                 <a:buNone/>
               </a:pPr>
-              <a:r>
-                <a:t/>
-              </a:r>
               <a:endParaRPr sz="1513"/>
             </a:p>
           </p:txBody>
@@ -6893,23 +7040,23 @@
               <a:avLst/>
             </a:prstGeom>
             <a:noFill/>
-            <a:ln cap="flat" cmpd="sng" w="10300">
+            <a:ln w="10300" cap="flat" cmpd="sng">
               <a:solidFill>
                 <a:srgbClr val="00FF00"/>
               </a:solidFill>
               <a:prstDash val="solid"/>
               <a:round/>
-              <a:headEnd len="sm" w="sm" type="none"/>
-              <a:tailEnd len="sm" w="sm" type="none"/>
+              <a:headEnd type="none" w="sm" len="sm"/>
+              <a:tailEnd type="none" w="sm" len="sm"/>
             </a:ln>
           </p:spPr>
           <p:txBody>
-            <a:bodyPr anchorCtr="0" anchor="ctr" bIns="98800" lIns="98800" spcFirstLastPara="1" rIns="98800" wrap="square" tIns="98800">
+            <a:bodyPr spcFirstLastPara="1" wrap="square" lIns="98800" tIns="98800" rIns="98800" bIns="98800" anchor="ctr" anchorCtr="0">
               <a:noAutofit/>
             </a:bodyPr>
             <a:lstStyle/>
             <a:p>
-              <a:pPr indent="0" lvl="0" marL="0" rtl="0" algn="ctr">
+              <a:pPr marL="0" lvl="0" indent="0" algn="ctr" rtl="0">
                 <a:spcBef>
                   <a:spcPts val="0"/>
                 </a:spcBef>
@@ -6918,9 +7065,6 @@
                 </a:spcAft>
                 <a:buNone/>
               </a:pPr>
-              <a:r>
-                <a:t/>
-              </a:r>
               <a:endParaRPr sz="1513"/>
             </a:p>
           </p:txBody>
@@ -6940,23 +7084,23 @@
               <a:avLst/>
             </a:prstGeom>
             <a:noFill/>
-            <a:ln cap="flat" cmpd="sng" w="10300">
+            <a:ln w="10300" cap="flat" cmpd="sng">
               <a:solidFill>
                 <a:schemeClr val="dk1"/>
               </a:solidFill>
               <a:prstDash val="solid"/>
               <a:round/>
-              <a:headEnd len="sm" w="sm" type="none"/>
-              <a:tailEnd len="sm" w="sm" type="none"/>
+              <a:headEnd type="none" w="sm" len="sm"/>
+              <a:tailEnd type="none" w="sm" len="sm"/>
             </a:ln>
           </p:spPr>
           <p:txBody>
-            <a:bodyPr anchorCtr="0" anchor="ctr" bIns="98800" lIns="98800" spcFirstLastPara="1" rIns="98800" wrap="square" tIns="98800">
+            <a:bodyPr spcFirstLastPara="1" wrap="square" lIns="98800" tIns="98800" rIns="98800" bIns="98800" anchor="ctr" anchorCtr="0">
               <a:noAutofit/>
             </a:bodyPr>
             <a:lstStyle/>
             <a:p>
-              <a:pPr indent="0" lvl="0" marL="0" rtl="0" algn="ctr">
+              <a:pPr marL="0" lvl="0" indent="0" algn="ctr" rtl="0">
                 <a:spcBef>
                   <a:spcPts val="0"/>
                 </a:spcBef>
@@ -6965,9 +7109,6 @@
                 </a:spcAft>
                 <a:buNone/>
               </a:pPr>
-              <a:r>
-                <a:t/>
-              </a:r>
               <a:endParaRPr sz="1513"/>
             </a:p>
           </p:txBody>
@@ -6986,29 +7127,29 @@
           </a:xfrm>
           <a:prstGeom prst="roundRect">
             <a:avLst>
-              <a:gd fmla="val 16667" name="adj"/>
+              <a:gd name="adj" fmla="val 16667"/>
             </a:avLst>
           </a:prstGeom>
           <a:solidFill>
             <a:srgbClr val="465A8F"/>
           </a:solidFill>
-          <a:ln cap="flat" cmpd="sng" w="9525">
+          <a:ln w="9525" cap="flat" cmpd="sng">
             <a:solidFill>
               <a:schemeClr val="dk2"/>
             </a:solidFill>
             <a:prstDash val="solid"/>
             <a:round/>
-            <a:headEnd len="sm" w="sm" type="none"/>
-            <a:tailEnd len="sm" w="sm" type="none"/>
+            <a:headEnd type="none" w="sm" len="sm"/>
+            <a:tailEnd type="none" w="sm" len="sm"/>
           </a:ln>
         </p:spPr>
         <p:txBody>
-          <a:bodyPr anchorCtr="0" anchor="ctr" bIns="91425" lIns="91425" spcFirstLastPara="1" rIns="91425" wrap="square" tIns="91425">
+          <a:bodyPr spcFirstLastPara="1" wrap="square" lIns="91425" tIns="91425" rIns="91425" bIns="91425" anchor="ctr" anchorCtr="0">
             <a:noAutofit/>
           </a:bodyPr>
           <a:lstStyle/>
           <a:p>
-            <a:pPr indent="0" lvl="0" marL="0" rtl="0" algn="l">
+            <a:pPr marL="0" lvl="0" indent="0" algn="l" rtl="0">
               <a:spcBef>
                 <a:spcPts val="0"/>
               </a:spcBef>
@@ -7046,31 +7187,31 @@
           </a:xfrm>
           <a:prstGeom prst="wedgeRoundRectCallout">
             <a:avLst>
-              <a:gd fmla="val -80583" name="adj1"/>
-              <a:gd fmla="val -71951" name="adj2"/>
-              <a:gd fmla="val 0" name="adj3"/>
+              <a:gd name="adj1" fmla="val -80583"/>
+              <a:gd name="adj2" fmla="val -71951"/>
+              <a:gd name="adj3" fmla="val 0"/>
             </a:avLst>
           </a:prstGeom>
           <a:solidFill>
             <a:srgbClr val="C9DAF8"/>
           </a:solidFill>
-          <a:ln cap="flat" cmpd="sng" w="9525">
+          <a:ln w="9525" cap="flat" cmpd="sng">
             <a:solidFill>
               <a:schemeClr val="dk2"/>
             </a:solidFill>
             <a:prstDash val="solid"/>
             <a:round/>
-            <a:headEnd len="sm" w="sm" type="none"/>
-            <a:tailEnd len="sm" w="sm" type="none"/>
+            <a:headEnd type="none" w="sm" len="sm"/>
+            <a:tailEnd type="none" w="sm" len="sm"/>
           </a:ln>
         </p:spPr>
         <p:txBody>
-          <a:bodyPr anchorCtr="0" anchor="ctr" bIns="91425" lIns="91425" spcFirstLastPara="1" rIns="91425" wrap="square" tIns="91425">
+          <a:bodyPr spcFirstLastPara="1" wrap="square" lIns="91425" tIns="91425" rIns="91425" bIns="91425" anchor="ctr" anchorCtr="0">
             <a:noAutofit/>
           </a:bodyPr>
           <a:lstStyle/>
           <a:p>
-            <a:pPr indent="0" lvl="0" marL="0" rtl="0" algn="ctr">
+            <a:pPr marL="0" lvl="0" indent="0" algn="ctr" rtl="0">
               <a:spcBef>
                 <a:spcPts val="0"/>
               </a:spcBef>
@@ -7080,10 +7221,10 @@
               <a:buNone/>
             </a:pPr>
             <a:r>
-              <a:rPr i="1" lang="en" sz="700"/>
+              <a:rPr lang="en" sz="700" i="1"/>
               <a:t>“Bayangkan sebuah tangga dengan anak tangga yang diberi nomor dari 0 di bagian bawah hingga 10 di bagian paling atas. Bagian atas tangga (10) mewakili kehidupan terbaik yang mungkin bagi Anda, dan bagian bawah tangga (0) mewakili kehidupan terburuk yang mungkin bagi Anda. Di anak tangga nomor berapa Anda merasa diri Anda berdiri saat ini?” </a:t>
             </a:r>
-            <a:endParaRPr i="1" sz="700"/>
+            <a:endParaRPr sz="700" i="1"/>
           </a:p>
         </p:txBody>
       </p:sp>
@@ -7096,11 +7237,11 @@
 </file>
 
 <file path=ppt/slides/slide3.xml><?xml version="1.0" encoding="utf-8"?>
-<p:sld xmlns:a="http://schemas.openxmlformats.org/drawingml/2006/main" xmlns:r="http://schemas.openxmlformats.org/officeDocument/2006/relationships" xmlns:mc="http://schemas.openxmlformats.org/markup-compatibility/2006" xmlns:mv="urn:schemas-microsoft-com:mac:vml" xmlns:p="http://schemas.openxmlformats.org/presentationml/2006/main" xmlns:c="http://schemas.openxmlformats.org/drawingml/2006/chart" xmlns:dgm="http://schemas.openxmlformats.org/drawingml/2006/diagram" xmlns:o="urn:schemas-microsoft-com:office:office" xmlns:v="urn:schemas-microsoft-com:vml" xmlns:pvml="urn:schemas-microsoft-com:office:powerpoint" xmlns:com="http://schemas.openxmlformats.org/drawingml/2006/compatibility" xmlns:p14="http://schemas.microsoft.com/office/powerpoint/2010/main" xmlns:p15="http://schemas.microsoft.com/office/powerpoint/2012/main" xmlns:ahyp="http://schemas.microsoft.com/office/drawing/2018/hyperlinkcolor">
+<p:sld xmlns:a="http://schemas.openxmlformats.org/drawingml/2006/main" xmlns:r="http://schemas.openxmlformats.org/officeDocument/2006/relationships" xmlns:p="http://schemas.openxmlformats.org/presentationml/2006/main">
   <p:cSld>
     <p:spTree>
       <p:nvGrpSpPr>
-        <p:cNvPr id="75" name="Shape 75"/>
+        <p:cNvPr id="1" name="Shape 75"/>
         <p:cNvGrpSpPr/>
         <p:nvPr/>
       </p:nvGrpSpPr>
@@ -7197,23 +7338,23 @@
               <a:avLst/>
             </a:prstGeom>
             <a:noFill/>
-            <a:ln cap="flat" cmpd="sng" w="9525">
+            <a:ln w="9525" cap="flat" cmpd="sng">
               <a:solidFill>
                 <a:srgbClr val="00FF00"/>
               </a:solidFill>
               <a:prstDash val="solid"/>
               <a:round/>
-              <a:headEnd len="sm" w="sm" type="none"/>
-              <a:tailEnd len="sm" w="sm" type="none"/>
+              <a:headEnd type="none" w="sm" len="sm"/>
+              <a:tailEnd type="none" w="sm" len="sm"/>
             </a:ln>
           </p:spPr>
           <p:txBody>
-            <a:bodyPr anchorCtr="0" anchor="ctr" bIns="91425" lIns="91425" spcFirstLastPara="1" rIns="91425" wrap="square" tIns="91425">
+            <a:bodyPr spcFirstLastPara="1" wrap="square" lIns="91425" tIns="91425" rIns="91425" bIns="91425" anchor="ctr" anchorCtr="0">
               <a:noAutofit/>
             </a:bodyPr>
             <a:lstStyle/>
             <a:p>
-              <a:pPr indent="0" lvl="0" marL="0" rtl="0" algn="ctr">
+              <a:pPr marL="0" lvl="0" indent="0" algn="ctr" rtl="0">
                 <a:spcBef>
                   <a:spcPts val="0"/>
                 </a:spcBef>
@@ -7222,9 +7363,6 @@
                 </a:spcAft>
                 <a:buNone/>
               </a:pPr>
-              <a:r>
-                <a:t/>
-              </a:r>
               <a:endParaRPr/>
             </a:p>
           </p:txBody>
@@ -7233,7 +7371,9 @@
       <p:sp>
         <p:nvSpPr>
           <p:cNvPr id="80" name="Google Shape;80;p15"/>
-          <p:cNvSpPr txBox="1"/>
+          <p:cNvSpPr txBox="1">
+            <a:spLocks noGrp="1"/>
+          </p:cNvSpPr>
           <p:nvPr>
             <p:ph type="title"/>
           </p:nvPr>
@@ -7248,12 +7388,12 @@
           </a:prstGeom>
         </p:spPr>
         <p:txBody>
-          <a:bodyPr anchorCtr="0" anchor="t" bIns="91425" lIns="91425" spcFirstLastPara="1" rIns="91425" wrap="square" tIns="91425">
-            <a:normAutofit/>
+          <a:bodyPr spcFirstLastPara="1" wrap="square" lIns="91425" tIns="91425" rIns="91425" bIns="91425" anchor="t" anchorCtr="0">
+            <a:normAutofit fontScale="90000"/>
           </a:bodyPr>
           <a:lstStyle/>
           <a:p>
-            <a:pPr indent="0" lvl="0" marL="0" marR="0" rtl="0" algn="l">
+            <a:pPr marL="0" marR="0" lvl="0" indent="0" algn="l" rtl="0">
               <a:lnSpc>
                 <a:spcPct val="115000"/>
               </a:lnSpc>
@@ -7266,14 +7406,14 @@
               <a:buNone/>
             </a:pPr>
             <a:r>
-              <a:rPr b="1" lang="en" sz="2000">
+              <a:rPr lang="en" sz="2000" b="1">
                 <a:solidFill>
                   <a:srgbClr val="1C4587"/>
                 </a:solidFill>
               </a:rPr>
               <a:t>Eksplorasi Faktor-faktor Berasosiasi</a:t>
             </a:r>
-            <a:endParaRPr b="1" sz="2000">
+            <a:endParaRPr sz="2000" b="1">
               <a:solidFill>
                 <a:srgbClr val="1C4587"/>
               </a:solidFill>
@@ -7284,9 +7424,11 @@
       <p:sp>
         <p:nvSpPr>
           <p:cNvPr id="81" name="Google Shape;81;p15"/>
-          <p:cNvSpPr txBox="1"/>
+          <p:cNvSpPr txBox="1">
+            <a:spLocks noGrp="1"/>
+          </p:cNvSpPr>
           <p:nvPr>
-            <p:ph idx="1" type="body"/>
+            <p:ph type="body" idx="1"/>
           </p:nvPr>
         </p:nvSpPr>
         <p:spPr>
@@ -7302,12 +7444,12 @@
           </a:ln>
         </p:spPr>
         <p:txBody>
-          <a:bodyPr anchorCtr="0" anchor="t" bIns="91425" lIns="91425" spcFirstLastPara="1" rIns="91425" wrap="square" tIns="91425">
+          <a:bodyPr spcFirstLastPara="1" wrap="square" lIns="91425" tIns="91425" rIns="91425" bIns="91425" anchor="t" anchorCtr="0">
             <a:normAutofit/>
           </a:bodyPr>
           <a:lstStyle/>
           <a:p>
-            <a:pPr indent="-317500" lvl="0" marL="457200" marR="0" rtl="0" algn="l">
+            <a:pPr marL="457200" marR="0" lvl="0" indent="-317500" algn="l" rtl="0">
               <a:lnSpc>
                 <a:spcPct val="95000"/>
               </a:lnSpc>
@@ -7338,7 +7480,7 @@
             </a:endParaRPr>
           </a:p>
           <a:p>
-            <a:pPr indent="-317500" lvl="0" marL="457200" marR="0" rtl="0" algn="l">
+            <a:pPr marL="457200" marR="0" lvl="0" indent="-317500" algn="l" rtl="0">
               <a:lnSpc>
                 <a:spcPct val="95000"/>
               </a:lnSpc>
@@ -7390,31 +7532,31 @@
           </a:xfrm>
           <a:prstGeom prst="wedgeRoundRectCallout">
             <a:avLst>
-              <a:gd fmla="val -80923" name="adj1"/>
-              <a:gd fmla="val -29665" name="adj2"/>
-              <a:gd fmla="val 0" name="adj3"/>
+              <a:gd name="adj1" fmla="val -80923"/>
+              <a:gd name="adj2" fmla="val -29665"/>
+              <a:gd name="adj3" fmla="val 0"/>
             </a:avLst>
           </a:prstGeom>
           <a:solidFill>
             <a:srgbClr val="C9DAF8"/>
           </a:solidFill>
-          <a:ln cap="flat" cmpd="sng" w="9525">
+          <a:ln w="9525" cap="flat" cmpd="sng">
             <a:solidFill>
               <a:schemeClr val="dk2"/>
             </a:solidFill>
             <a:prstDash val="solid"/>
             <a:round/>
-            <a:headEnd len="sm" w="sm" type="none"/>
-            <a:tailEnd len="sm" w="sm" type="none"/>
+            <a:headEnd type="none" w="sm" len="sm"/>
+            <a:tailEnd type="none" w="sm" len="sm"/>
           </a:ln>
         </p:spPr>
         <p:txBody>
-          <a:bodyPr anchorCtr="0" anchor="ctr" bIns="91425" lIns="91425" spcFirstLastPara="1" rIns="91425" wrap="square" tIns="91425">
+          <a:bodyPr spcFirstLastPara="1" wrap="square" lIns="91425" tIns="91425" rIns="91425" bIns="91425" anchor="ctr" anchorCtr="0">
             <a:noAutofit/>
           </a:bodyPr>
           <a:lstStyle/>
           <a:p>
-            <a:pPr indent="0" lvl="0" marL="0" rtl="0" algn="ctr">
+            <a:pPr marL="0" lvl="0" indent="0" algn="ctr" rtl="0">
               <a:spcBef>
                 <a:spcPts val="0"/>
               </a:spcBef>
@@ -7424,10 +7566,10 @@
               <a:buNone/>
             </a:pPr>
             <a:r>
-              <a:rPr i="1" lang="en" sz="1000"/>
+              <a:rPr lang="en" sz="1000" i="1"/>
               <a:t>"Apakah Anda mendonasikan uang untuk amal dalam sebulan terakhir?" </a:t>
             </a:r>
-            <a:endParaRPr i="1" sz="1000"/>
+            <a:endParaRPr sz="1000" i="1"/>
           </a:p>
         </p:txBody>
       </p:sp>
@@ -7444,31 +7586,31 @@
           </a:xfrm>
           <a:prstGeom prst="wedgeRoundRectCallout">
             <a:avLst>
-              <a:gd fmla="val 93129" name="adj1"/>
-              <a:gd fmla="val -31858" name="adj2"/>
-              <a:gd fmla="val 0" name="adj3"/>
+              <a:gd name="adj1" fmla="val 93129"/>
+              <a:gd name="adj2" fmla="val -31858"/>
+              <a:gd name="adj3" fmla="val 0"/>
             </a:avLst>
           </a:prstGeom>
           <a:solidFill>
             <a:srgbClr val="C9DAF8"/>
           </a:solidFill>
-          <a:ln cap="flat" cmpd="sng" w="9525">
+          <a:ln w="9525" cap="flat" cmpd="sng">
             <a:solidFill>
               <a:schemeClr val="dk2"/>
             </a:solidFill>
             <a:prstDash val="solid"/>
             <a:round/>
-            <a:headEnd len="sm" w="sm" type="none"/>
-            <a:tailEnd len="sm" w="sm" type="none"/>
+            <a:headEnd type="none" w="sm" len="sm"/>
+            <a:tailEnd type="none" w="sm" len="sm"/>
           </a:ln>
         </p:spPr>
         <p:txBody>
-          <a:bodyPr anchorCtr="0" anchor="ctr" bIns="91425" lIns="91425" spcFirstLastPara="1" rIns="91425" wrap="square" tIns="91425">
+          <a:bodyPr spcFirstLastPara="1" wrap="square" lIns="91425" tIns="91425" rIns="91425" bIns="91425" anchor="ctr" anchorCtr="0">
             <a:noAutofit/>
           </a:bodyPr>
           <a:lstStyle/>
           <a:p>
-            <a:pPr indent="0" lvl="0" marL="0" rtl="0" algn="ctr">
+            <a:pPr marL="0" lvl="0" indent="0" algn="ctr" rtl="0">
               <a:spcBef>
                 <a:spcPts val="0"/>
               </a:spcBef>
@@ -7478,10 +7620,10 @@
               <a:buNone/>
             </a:pPr>
             <a:r>
-              <a:rPr i="1" lang="en" sz="1000"/>
+              <a:rPr lang="en" sz="1000" i="1"/>
               <a:t>“Apakah Anda merasa puas atau tidak puas dengan kebebasan Anda untuk memilih apa yang akan Anda lakukan dengan hidup Anda?”</a:t>
             </a:r>
-            <a:endParaRPr i="1" sz="1000"/>
+            <a:endParaRPr sz="1000" i="1"/>
           </a:p>
         </p:txBody>
       </p:sp>
@@ -7498,29 +7640,29 @@
           </a:xfrm>
           <a:prstGeom prst="roundRect">
             <a:avLst>
-              <a:gd fmla="val 16667" name="adj"/>
+              <a:gd name="adj" fmla="val 16667"/>
             </a:avLst>
           </a:prstGeom>
           <a:solidFill>
             <a:srgbClr val="465A8F"/>
           </a:solidFill>
-          <a:ln cap="flat" cmpd="sng" w="9525">
+          <a:ln w="9525" cap="flat" cmpd="sng">
             <a:solidFill>
               <a:schemeClr val="dk2"/>
             </a:solidFill>
             <a:prstDash val="solid"/>
             <a:round/>
-            <a:headEnd len="sm" w="sm" type="none"/>
-            <a:tailEnd len="sm" w="sm" type="none"/>
+            <a:headEnd type="none" w="sm" len="sm"/>
+            <a:tailEnd type="none" w="sm" len="sm"/>
           </a:ln>
         </p:spPr>
         <p:txBody>
-          <a:bodyPr anchorCtr="0" anchor="ctr" bIns="91425" lIns="91425" spcFirstLastPara="1" rIns="91425" wrap="square" tIns="91425">
+          <a:bodyPr spcFirstLastPara="1" wrap="square" lIns="91425" tIns="91425" rIns="91425" bIns="91425" anchor="ctr" anchorCtr="0">
             <a:noAutofit/>
           </a:bodyPr>
           <a:lstStyle/>
           <a:p>
-            <a:pPr indent="0" lvl="0" marL="0" rtl="0" algn="l">
+            <a:pPr marL="0" lvl="0" indent="0" algn="l" rtl="0">
               <a:spcBef>
                 <a:spcPts val="0"/>
               </a:spcBef>
@@ -7554,11 +7696,11 @@
 </file>
 
 <file path=ppt/slides/slide4.xml><?xml version="1.0" encoding="utf-8"?>
-<p:sld xmlns:a="http://schemas.openxmlformats.org/drawingml/2006/main" xmlns:r="http://schemas.openxmlformats.org/officeDocument/2006/relationships" xmlns:mc="http://schemas.openxmlformats.org/markup-compatibility/2006" xmlns:mv="urn:schemas-microsoft-com:mac:vml" xmlns:p="http://schemas.openxmlformats.org/presentationml/2006/main" xmlns:c="http://schemas.openxmlformats.org/drawingml/2006/chart" xmlns:dgm="http://schemas.openxmlformats.org/drawingml/2006/diagram" xmlns:o="urn:schemas-microsoft-com:office:office" xmlns:v="urn:schemas-microsoft-com:vml" xmlns:pvml="urn:schemas-microsoft-com:office:powerpoint" xmlns:com="http://schemas.openxmlformats.org/drawingml/2006/compatibility" xmlns:p14="http://schemas.microsoft.com/office/powerpoint/2010/main" xmlns:p15="http://schemas.microsoft.com/office/powerpoint/2012/main" xmlns:ahyp="http://schemas.microsoft.com/office/drawing/2018/hyperlinkcolor">
+<p:sld xmlns:a="http://schemas.openxmlformats.org/drawingml/2006/main" xmlns:r="http://schemas.openxmlformats.org/officeDocument/2006/relationships" xmlns:p="http://schemas.openxmlformats.org/presentationml/2006/main">
   <p:cSld>
     <p:spTree>
       <p:nvGrpSpPr>
-        <p:cNvPr id="88" name="Shape 88"/>
+        <p:cNvPr id="1" name="Shape 88"/>
         <p:cNvGrpSpPr/>
         <p:nvPr/>
       </p:nvGrpSpPr>
@@ -7573,7 +7715,9 @@
       <p:sp>
         <p:nvSpPr>
           <p:cNvPr id="89" name="Google Shape;89;p16"/>
-          <p:cNvSpPr txBox="1"/>
+          <p:cNvSpPr txBox="1">
+            <a:spLocks noGrp="1"/>
+          </p:cNvSpPr>
           <p:nvPr>
             <p:ph type="title"/>
           </p:nvPr>
@@ -7588,12 +7732,12 @@
           </a:prstGeom>
         </p:spPr>
         <p:txBody>
-          <a:bodyPr anchorCtr="0" anchor="t" bIns="91425" lIns="91425" spcFirstLastPara="1" rIns="91425" wrap="square" tIns="91425">
-            <a:normAutofit/>
+          <a:bodyPr spcFirstLastPara="1" wrap="square" lIns="91425" tIns="91425" rIns="91425" bIns="91425" anchor="t" anchorCtr="0">
+            <a:normAutofit fontScale="90000"/>
           </a:bodyPr>
           <a:lstStyle/>
           <a:p>
-            <a:pPr indent="0" lvl="0" marL="0" marR="0" rtl="0" algn="l">
+            <a:pPr marL="0" marR="0" lvl="0" indent="0" algn="l" rtl="0">
               <a:lnSpc>
                 <a:spcPct val="115000"/>
               </a:lnSpc>
@@ -7606,14 +7750,14 @@
               <a:buNone/>
             </a:pPr>
             <a:r>
-              <a:rPr b="1" lang="en" sz="2000">
+              <a:rPr lang="en" sz="2000" b="1">
                 <a:solidFill>
                   <a:srgbClr val="1C4587"/>
                 </a:solidFill>
               </a:rPr>
               <a:t>Perbandingan Skor Indonesia dan Negara ASEAN</a:t>
             </a:r>
-            <a:endParaRPr b="1" sz="2000">
+            <a:endParaRPr sz="2000" b="1">
               <a:solidFill>
                 <a:srgbClr val="1C4587"/>
               </a:solidFill>
@@ -7631,7 +7775,7 @@
           <a:blip r:embed="rId3">
             <a:alphaModFix/>
           </a:blip>
-          <a:srcRect b="0" l="0" r="18858" t="0"/>
+          <a:srcRect r="18858"/>
           <a:stretch/>
         </p:blipFill>
         <p:spPr>
@@ -7658,7 +7802,7 @@
           <a:blip r:embed="rId3">
             <a:alphaModFix/>
           </a:blip>
-          <a:srcRect b="63058" l="80874" r="0" t="7767"/>
+          <a:srcRect l="80874" t="7767" b="63058"/>
           <a:stretch/>
         </p:blipFill>
         <p:spPr>
@@ -7678,9 +7822,11 @@
       <p:sp>
         <p:nvSpPr>
           <p:cNvPr id="92" name="Google Shape;92;p16"/>
-          <p:cNvSpPr txBox="1"/>
+          <p:cNvSpPr txBox="1">
+            <a:spLocks noGrp="1"/>
+          </p:cNvSpPr>
           <p:nvPr>
-            <p:ph idx="1" type="body"/>
+            <p:ph type="body" idx="1"/>
           </p:nvPr>
         </p:nvSpPr>
         <p:spPr>
@@ -7696,12 +7842,12 @@
           </a:ln>
         </p:spPr>
         <p:txBody>
-          <a:bodyPr anchorCtr="0" anchor="t" bIns="91425" lIns="91425" spcFirstLastPara="1" rIns="91425" wrap="square" tIns="91425">
+          <a:bodyPr spcFirstLastPara="1" wrap="square" lIns="91425" tIns="91425" rIns="91425" bIns="91425" anchor="t" anchorCtr="0">
             <a:normAutofit/>
           </a:bodyPr>
           <a:lstStyle/>
           <a:p>
-            <a:pPr indent="-317500" lvl="0" marL="457200" marR="0" rtl="0" algn="l">
+            <a:pPr marL="457200" marR="0" lvl="0" indent="-317500" algn="l" rtl="0">
               <a:lnSpc>
                 <a:spcPct val="150000"/>
               </a:lnSpc>
@@ -7732,7 +7878,7 @@
             </a:endParaRPr>
           </a:p>
           <a:p>
-            <a:pPr indent="-317500" lvl="0" marL="457200" marR="0" rtl="0" algn="l">
+            <a:pPr marL="457200" marR="0" lvl="0" indent="-317500" algn="l" rtl="0">
               <a:lnSpc>
                 <a:spcPct val="150000"/>
               </a:lnSpc>
@@ -7756,14 +7902,14 @@
               </a:rPr>
               <a:t>Relatif stagnan</a:t>
             </a:r>
-            <a:endParaRPr i="1" sz="1400">
+            <a:endParaRPr sz="1400" i="1">
               <a:solidFill>
                 <a:schemeClr val="dk1"/>
               </a:solidFill>
             </a:endParaRPr>
           </a:p>
           <a:p>
-            <a:pPr indent="-317500" lvl="0" marL="457200" marR="0" rtl="0" algn="l">
+            <a:pPr marL="457200" marR="0" lvl="0" indent="-317500" algn="l" rtl="0">
               <a:lnSpc>
                 <a:spcPct val="150000"/>
               </a:lnSpc>
@@ -7808,29 +7954,29 @@
           </a:xfrm>
           <a:prstGeom prst="roundRect">
             <a:avLst>
-              <a:gd fmla="val 16667" name="adj"/>
+              <a:gd name="adj" fmla="val 16667"/>
             </a:avLst>
           </a:prstGeom>
           <a:solidFill>
             <a:srgbClr val="465A8F"/>
           </a:solidFill>
-          <a:ln cap="flat" cmpd="sng" w="9525">
+          <a:ln w="9525" cap="flat" cmpd="sng">
             <a:solidFill>
               <a:schemeClr val="dk2"/>
             </a:solidFill>
             <a:prstDash val="solid"/>
             <a:round/>
-            <a:headEnd len="sm" w="sm" type="none"/>
-            <a:tailEnd len="sm" w="sm" type="none"/>
+            <a:headEnd type="none" w="sm" len="sm"/>
+            <a:tailEnd type="none" w="sm" len="sm"/>
           </a:ln>
         </p:spPr>
         <p:txBody>
-          <a:bodyPr anchorCtr="0" anchor="ctr" bIns="91425" lIns="91425" spcFirstLastPara="1" rIns="91425" wrap="square" tIns="91425">
+          <a:bodyPr spcFirstLastPara="1" wrap="square" lIns="91425" tIns="91425" rIns="91425" bIns="91425" anchor="ctr" anchorCtr="0">
             <a:noAutofit/>
           </a:bodyPr>
           <a:lstStyle/>
           <a:p>
-            <a:pPr indent="0" lvl="0" marL="0" rtl="0" algn="l">
+            <a:pPr marL="0" lvl="0" indent="0" algn="l" rtl="0">
               <a:spcBef>
                 <a:spcPts val="0"/>
               </a:spcBef>
@@ -7872,23 +8018,23 @@
           <a:solidFill>
             <a:schemeClr val="dk1"/>
           </a:solidFill>
-          <a:ln cap="flat" cmpd="sng" w="9525">
+          <a:ln w="9525" cap="flat" cmpd="sng">
             <a:solidFill>
               <a:schemeClr val="dk2"/>
             </a:solidFill>
             <a:prstDash val="solid"/>
             <a:round/>
-            <a:headEnd len="sm" w="sm" type="none"/>
-            <a:tailEnd len="sm" w="sm" type="none"/>
+            <a:headEnd type="none" w="sm" len="sm"/>
+            <a:tailEnd type="none" w="sm" len="sm"/>
           </a:ln>
         </p:spPr>
         <p:txBody>
-          <a:bodyPr anchorCtr="0" anchor="ctr" bIns="91425" lIns="91425" spcFirstLastPara="1" rIns="91425" wrap="square" tIns="91425">
+          <a:bodyPr spcFirstLastPara="1" wrap="square" lIns="91425" tIns="91425" rIns="91425" bIns="91425" anchor="ctr" anchorCtr="0">
             <a:noAutofit/>
           </a:bodyPr>
           <a:lstStyle/>
           <a:p>
-            <a:pPr indent="0" lvl="0" marL="0" rtl="0" algn="ctr">
+            <a:pPr marL="0" lvl="0" indent="0" algn="ctr" rtl="0">
               <a:spcBef>
                 <a:spcPts val="0"/>
               </a:spcBef>
@@ -7897,9 +8043,6 @@
               </a:spcAft>
               <a:buNone/>
             </a:pPr>
-            <a:r>
-              <a:t/>
-            </a:r>
             <a:endParaRPr/>
           </a:p>
         </p:txBody>
@@ -7913,11 +8056,11 @@
 </file>
 
 <file path=ppt/slides/slide5.xml><?xml version="1.0" encoding="utf-8"?>
-<p:sld xmlns:a="http://schemas.openxmlformats.org/drawingml/2006/main" xmlns:r="http://schemas.openxmlformats.org/officeDocument/2006/relationships" xmlns:mc="http://schemas.openxmlformats.org/markup-compatibility/2006" xmlns:mv="urn:schemas-microsoft-com:mac:vml" xmlns:p="http://schemas.openxmlformats.org/presentationml/2006/main" xmlns:c="http://schemas.openxmlformats.org/drawingml/2006/chart" xmlns:dgm="http://schemas.openxmlformats.org/drawingml/2006/diagram" xmlns:o="urn:schemas-microsoft-com:office:office" xmlns:v="urn:schemas-microsoft-com:vml" xmlns:pvml="urn:schemas-microsoft-com:office:powerpoint" xmlns:com="http://schemas.openxmlformats.org/drawingml/2006/compatibility" xmlns:p14="http://schemas.microsoft.com/office/powerpoint/2010/main" xmlns:p15="http://schemas.microsoft.com/office/powerpoint/2012/main" xmlns:ahyp="http://schemas.microsoft.com/office/drawing/2018/hyperlinkcolor">
+<p:sld xmlns:a="http://schemas.openxmlformats.org/drawingml/2006/main" xmlns:r="http://schemas.openxmlformats.org/officeDocument/2006/relationships" xmlns:p="http://schemas.openxmlformats.org/presentationml/2006/main">
   <p:cSld>
     <p:spTree>
       <p:nvGrpSpPr>
-        <p:cNvPr id="98" name="Shape 98"/>
+        <p:cNvPr id="1" name="Shape 98"/>
         <p:cNvGrpSpPr/>
         <p:nvPr/>
       </p:nvGrpSpPr>
@@ -7932,7 +8075,9 @@
       <p:sp>
         <p:nvSpPr>
           <p:cNvPr id="99" name="Google Shape;99;p17"/>
-          <p:cNvSpPr txBox="1"/>
+          <p:cNvSpPr txBox="1">
+            <a:spLocks noGrp="1"/>
+          </p:cNvSpPr>
           <p:nvPr>
             <p:ph type="title"/>
           </p:nvPr>
@@ -7947,12 +8092,12 @@
           </a:prstGeom>
         </p:spPr>
         <p:txBody>
-          <a:bodyPr anchorCtr="0" anchor="t" bIns="91425" lIns="91425" spcFirstLastPara="1" rIns="91425" wrap="square" tIns="91425">
-            <a:normAutofit/>
+          <a:bodyPr spcFirstLastPara="1" wrap="square" lIns="91425" tIns="91425" rIns="91425" bIns="91425" anchor="t" anchorCtr="0">
+            <a:normAutofit fontScale="90000"/>
           </a:bodyPr>
           <a:lstStyle/>
           <a:p>
-            <a:pPr indent="0" lvl="0" marL="0" marR="0" rtl="0" algn="l">
+            <a:pPr marL="0" marR="0" lvl="0" indent="0" algn="l" rtl="0">
               <a:lnSpc>
                 <a:spcPct val="115000"/>
               </a:lnSpc>
@@ -7965,14 +8110,14 @@
               <a:buNone/>
             </a:pPr>
             <a:r>
-              <a:rPr b="1" lang="en" sz="2000">
+              <a:rPr lang="en" sz="2000" b="1">
                 <a:solidFill>
                   <a:srgbClr val="1C4587"/>
                 </a:solidFill>
               </a:rPr>
               <a:t>Perbandingan Skor Indonesia dan Negara dengan GDP Setara</a:t>
             </a:r>
-            <a:endParaRPr b="1" sz="2000">
+            <a:endParaRPr sz="2000" b="1">
               <a:solidFill>
                 <a:srgbClr val="1C4587"/>
               </a:solidFill>
@@ -7993,29 +8138,29 @@
           </a:xfrm>
           <a:prstGeom prst="roundRect">
             <a:avLst>
-              <a:gd fmla="val 16667" name="adj"/>
+              <a:gd name="adj" fmla="val 16667"/>
             </a:avLst>
           </a:prstGeom>
           <a:solidFill>
             <a:srgbClr val="465A8F"/>
           </a:solidFill>
-          <a:ln cap="flat" cmpd="sng" w="9525">
+          <a:ln w="9525" cap="flat" cmpd="sng">
             <a:solidFill>
               <a:schemeClr val="dk2"/>
             </a:solidFill>
             <a:prstDash val="solid"/>
             <a:round/>
-            <a:headEnd len="sm" w="sm" type="none"/>
-            <a:tailEnd len="sm" w="sm" type="none"/>
+            <a:headEnd type="none" w="sm" len="sm"/>
+            <a:tailEnd type="none" w="sm" len="sm"/>
           </a:ln>
         </p:spPr>
         <p:txBody>
-          <a:bodyPr anchorCtr="0" anchor="ctr" bIns="91425" lIns="91425" spcFirstLastPara="1" rIns="91425" wrap="square" tIns="91425">
+          <a:bodyPr spcFirstLastPara="1" wrap="square" lIns="91425" tIns="91425" rIns="91425" bIns="91425" anchor="ctr" anchorCtr="0">
             <a:noAutofit/>
           </a:bodyPr>
           <a:lstStyle/>
           <a:p>
-            <a:pPr indent="0" lvl="0" marL="0" rtl="0" algn="l">
+            <a:pPr marL="0" lvl="0" indent="0" algn="l" rtl="0">
               <a:spcBef>
                 <a:spcPts val="0"/>
               </a:spcBef>
@@ -8050,7 +8195,7 @@
           <a:blip r:embed="rId3">
             <a:alphaModFix/>
           </a:blip>
-          <a:srcRect b="0" l="0" r="23236" t="0"/>
+          <a:srcRect r="23236"/>
           <a:stretch/>
         </p:blipFill>
         <p:spPr>
@@ -8077,7 +8222,7 @@
           <a:blip r:embed="rId3">
             <a:alphaModFix/>
           </a:blip>
-          <a:srcRect b="70566" l="77320" r="0" t="6934"/>
+          <a:srcRect l="77320" t="6934" b="70566"/>
           <a:stretch/>
         </p:blipFill>
         <p:spPr>
@@ -8111,23 +8256,23 @@
           <a:solidFill>
             <a:schemeClr val="dk1"/>
           </a:solidFill>
-          <a:ln cap="flat" cmpd="sng" w="9525">
+          <a:ln w="9525" cap="flat" cmpd="sng">
             <a:solidFill>
               <a:schemeClr val="dk2"/>
             </a:solidFill>
             <a:prstDash val="solid"/>
             <a:round/>
-            <a:headEnd len="sm" w="sm" type="none"/>
-            <a:tailEnd len="sm" w="sm" type="none"/>
+            <a:headEnd type="none" w="sm" len="sm"/>
+            <a:tailEnd type="none" w="sm" len="sm"/>
           </a:ln>
         </p:spPr>
         <p:txBody>
-          <a:bodyPr anchorCtr="0" anchor="ctr" bIns="91425" lIns="91425" spcFirstLastPara="1" rIns="91425" wrap="square" tIns="91425">
+          <a:bodyPr spcFirstLastPara="1" wrap="square" lIns="91425" tIns="91425" rIns="91425" bIns="91425" anchor="ctr" anchorCtr="0">
             <a:noAutofit/>
           </a:bodyPr>
           <a:lstStyle/>
           <a:p>
-            <a:pPr indent="0" lvl="0" marL="0" rtl="0" algn="ctr">
+            <a:pPr marL="0" lvl="0" indent="0" algn="ctr" rtl="0">
               <a:spcBef>
                 <a:spcPts val="0"/>
               </a:spcBef>
@@ -8136,9 +8281,6 @@
               </a:spcAft>
               <a:buNone/>
             </a:pPr>
-            <a:r>
-              <a:t/>
-            </a:r>
             <a:endParaRPr/>
           </a:p>
         </p:txBody>
@@ -8146,9 +8288,11 @@
       <p:sp>
         <p:nvSpPr>
           <p:cNvPr id="104" name="Google Shape;104;p17"/>
-          <p:cNvSpPr txBox="1"/>
+          <p:cNvSpPr txBox="1">
+            <a:spLocks noGrp="1"/>
+          </p:cNvSpPr>
           <p:nvPr>
-            <p:ph idx="1" type="body"/>
+            <p:ph type="body" idx="1"/>
           </p:nvPr>
         </p:nvSpPr>
         <p:spPr>
@@ -8164,12 +8308,12 @@
           </a:ln>
         </p:spPr>
         <p:txBody>
-          <a:bodyPr anchorCtr="0" anchor="t" bIns="91425" lIns="91425" spcFirstLastPara="1" rIns="91425" wrap="square" tIns="91425">
+          <a:bodyPr spcFirstLastPara="1" wrap="square" lIns="91425" tIns="91425" rIns="91425" bIns="91425" anchor="t" anchorCtr="0">
             <a:normAutofit/>
           </a:bodyPr>
           <a:lstStyle/>
           <a:p>
-            <a:pPr indent="-317500" lvl="0" marL="457200" marR="0" rtl="0" algn="l">
+            <a:pPr marL="457200" marR="0" lvl="0" indent="-317500" algn="l" rtl="0">
               <a:lnSpc>
                 <a:spcPct val="150000"/>
               </a:lnSpc>
@@ -8200,7 +8344,7 @@
             </a:endParaRPr>
           </a:p>
           <a:p>
-            <a:pPr indent="-317500" lvl="0" marL="457200" marR="0" rtl="0" algn="l">
+            <a:pPr marL="457200" marR="0" lvl="0" indent="-317500" algn="l" rtl="0">
               <a:lnSpc>
                 <a:spcPct val="150000"/>
               </a:lnSpc>
@@ -8217,20 +8361,12 @@
               <a:buChar char="●"/>
             </a:pPr>
             <a:r>
-              <a:rPr i="1" lang="en" sz="1400">
+              <a:rPr lang="en" sz="1400" i="1">
                 <a:solidFill>
                   <a:schemeClr val="dk1"/>
                 </a:solidFill>
               </a:rPr>
-              <a:t>Tren: </a:t>
-            </a:r>
-            <a:r>
-              <a:rPr i="1" lang="en" sz="1400">
-                <a:solidFill>
-                  <a:schemeClr val="dk1"/>
-                </a:solidFill>
-              </a:rPr>
-              <a:t>Relatif Stabil Naik</a:t>
+              <a:t>Tren: Relatif Stabil Naik</a:t>
             </a:r>
             <a:endParaRPr sz="1400">
               <a:solidFill>
@@ -8239,7 +8375,7 @@
             </a:endParaRPr>
           </a:p>
           <a:p>
-            <a:pPr indent="0" lvl="0" marL="457200" marR="0" rtl="0" algn="l">
+            <a:pPr marL="457200" marR="0" lvl="0" indent="0" algn="l" rtl="0">
               <a:lnSpc>
                 <a:spcPct val="150000"/>
               </a:lnSpc>
@@ -8251,9 +8387,6 @@
               </a:spcAft>
               <a:buNone/>
             </a:pPr>
-            <a:r>
-              <a:t/>
-            </a:r>
             <a:endParaRPr sz="1400">
               <a:solidFill>
                 <a:schemeClr val="dk1"/>
@@ -8271,11 +8404,11 @@
 </file>
 
 <file path=ppt/slides/slide6.xml><?xml version="1.0" encoding="utf-8"?>
-<p:sld xmlns:a="http://schemas.openxmlformats.org/drawingml/2006/main" xmlns:r="http://schemas.openxmlformats.org/officeDocument/2006/relationships" xmlns:mc="http://schemas.openxmlformats.org/markup-compatibility/2006" xmlns:mv="urn:schemas-microsoft-com:mac:vml" xmlns:p="http://schemas.openxmlformats.org/presentationml/2006/main" xmlns:c="http://schemas.openxmlformats.org/drawingml/2006/chart" xmlns:dgm="http://schemas.openxmlformats.org/drawingml/2006/diagram" xmlns:o="urn:schemas-microsoft-com:office:office" xmlns:v="urn:schemas-microsoft-com:vml" xmlns:pvml="urn:schemas-microsoft-com:office:powerpoint" xmlns:com="http://schemas.openxmlformats.org/drawingml/2006/compatibility" xmlns:p14="http://schemas.microsoft.com/office/powerpoint/2010/main" xmlns:p15="http://schemas.microsoft.com/office/powerpoint/2012/main" xmlns:ahyp="http://schemas.microsoft.com/office/drawing/2018/hyperlinkcolor">
+<p:sld xmlns:a="http://schemas.openxmlformats.org/drawingml/2006/main" xmlns:r="http://schemas.openxmlformats.org/officeDocument/2006/relationships" xmlns:p="http://schemas.openxmlformats.org/presentationml/2006/main">
   <p:cSld>
     <p:spTree>
       <p:nvGrpSpPr>
-        <p:cNvPr id="108" name="Shape 108"/>
+        <p:cNvPr id="1" name="Shape 108"/>
         <p:cNvGrpSpPr/>
         <p:nvPr/>
       </p:nvGrpSpPr>
@@ -8300,29 +8433,29 @@
           </a:xfrm>
           <a:prstGeom prst="roundRect">
             <a:avLst>
-              <a:gd fmla="val 16667" name="adj"/>
+              <a:gd name="adj" fmla="val 16667"/>
             </a:avLst>
           </a:prstGeom>
           <a:solidFill>
             <a:srgbClr val="465A8F"/>
           </a:solidFill>
-          <a:ln cap="flat" cmpd="sng" w="9525">
+          <a:ln w="9525" cap="flat" cmpd="sng">
             <a:solidFill>
               <a:schemeClr val="dk2"/>
             </a:solidFill>
             <a:prstDash val="solid"/>
             <a:round/>
-            <a:headEnd len="sm" w="sm" type="none"/>
-            <a:tailEnd len="sm" w="sm" type="none"/>
+            <a:headEnd type="none" w="sm" len="sm"/>
+            <a:tailEnd type="none" w="sm" len="sm"/>
           </a:ln>
         </p:spPr>
         <p:txBody>
-          <a:bodyPr anchorCtr="0" anchor="ctr" bIns="91425" lIns="91425" spcFirstLastPara="1" rIns="91425" wrap="square" tIns="91425">
+          <a:bodyPr spcFirstLastPara="1" wrap="square" lIns="91425" tIns="91425" rIns="91425" bIns="91425" anchor="ctr" anchorCtr="0">
             <a:noAutofit/>
           </a:bodyPr>
           <a:lstStyle/>
           <a:p>
-            <a:pPr indent="0" lvl="0" marL="0" rtl="0" algn="l">
+            <a:pPr marL="0" lvl="0" indent="0" algn="l" rtl="0">
               <a:spcBef>
                 <a:spcPts val="0"/>
               </a:spcBef>
@@ -8332,14 +8465,14 @@
               <a:buNone/>
             </a:pPr>
             <a:r>
-              <a:rPr b="1" lang="en" sz="2000">
+              <a:rPr lang="en" sz="2000" b="1">
                 <a:solidFill>
                   <a:schemeClr val="accent6"/>
                 </a:solidFill>
               </a:rPr>
               <a:t>Perbandingan dengan Data Lain</a:t>
             </a:r>
-            <a:endParaRPr b="1" sz="2000">
+            <a:endParaRPr sz="2000" b="1">
               <a:solidFill>
                 <a:schemeClr val="accent6"/>
               </a:solidFill>
@@ -8350,9 +8483,11 @@
       <p:sp>
         <p:nvSpPr>
           <p:cNvPr id="110" name="Google Shape;110;p18"/>
-          <p:cNvSpPr txBox="1"/>
+          <p:cNvSpPr txBox="1">
+            <a:spLocks noGrp="1"/>
+          </p:cNvSpPr>
           <p:nvPr>
-            <p:ph idx="1" type="body"/>
+            <p:ph type="body" idx="1"/>
           </p:nvPr>
         </p:nvSpPr>
         <p:spPr>
@@ -8368,12 +8503,12 @@
           </a:ln>
         </p:spPr>
         <p:txBody>
-          <a:bodyPr anchorCtr="0" anchor="t" bIns="91425" lIns="91425" spcFirstLastPara="1" rIns="91425" wrap="square" tIns="91425">
+          <a:bodyPr spcFirstLastPara="1" wrap="square" lIns="91425" tIns="91425" rIns="91425" bIns="91425" anchor="t" anchorCtr="0">
             <a:normAutofit/>
           </a:bodyPr>
           <a:lstStyle/>
           <a:p>
-            <a:pPr indent="-330200" lvl="0" marL="457200" rtl="0" algn="l">
+            <a:pPr marL="457200" lvl="0" indent="-330200" algn="l" rtl="0">
               <a:spcBef>
                 <a:spcPts val="0"/>
               </a:spcBef>
@@ -8387,21 +8522,21 @@
               <a:buChar char="●"/>
             </a:pPr>
             <a:r>
-              <a:rPr lang="en" sz="1600">
+              <a:rPr lang="en" sz="1600" dirty="0">
                 <a:solidFill>
                   <a:schemeClr val="dk1"/>
                 </a:solidFill>
               </a:rPr>
               <a:t>Peningkatan Kebahagiaan Subjektif mengejar rata-rata global</a:t>
             </a:r>
-            <a:endParaRPr sz="1600">
+            <a:endParaRPr sz="1600" dirty="0">
               <a:solidFill>
                 <a:schemeClr val="dk1"/>
               </a:solidFill>
             </a:endParaRPr>
           </a:p>
           <a:p>
-            <a:pPr indent="-330200" lvl="0" marL="457200" rtl="0" algn="l">
+            <a:pPr marL="457200" lvl="0" indent="-330200" algn="l" rtl="0">
               <a:spcBef>
                 <a:spcPts val="0"/>
               </a:spcBef>
@@ -8415,21 +8550,21 @@
               <a:buChar char="●"/>
             </a:pPr>
             <a:r>
-              <a:rPr lang="en" sz="1600">
+              <a:rPr lang="en" sz="1600" dirty="0">
                 <a:solidFill>
                   <a:schemeClr val="dk1"/>
                 </a:solidFill>
               </a:rPr>
               <a:t>Posisi Indonesia cukup di tengah, di antara negara dengan GDP setara</a:t>
             </a:r>
-            <a:endParaRPr sz="1600">
+            <a:endParaRPr sz="1600" dirty="0">
               <a:solidFill>
                 <a:schemeClr val="dk1"/>
               </a:solidFill>
             </a:endParaRPr>
           </a:p>
           <a:p>
-            <a:pPr indent="-330200" lvl="0" marL="457200" rtl="0" algn="l">
+            <a:pPr marL="457200" lvl="0" indent="-330200" algn="l" rtl="0">
               <a:spcBef>
                 <a:spcPts val="0"/>
               </a:spcBef>
@@ -8443,21 +8578,21 @@
               <a:buChar char="●"/>
             </a:pPr>
             <a:r>
-              <a:rPr lang="en" sz="1600">
+              <a:rPr lang="en" sz="1600" dirty="0">
                 <a:solidFill>
                   <a:schemeClr val="dk1"/>
                 </a:solidFill>
               </a:rPr>
               <a:t>Pentingnya Rasa Otonomi</a:t>
             </a:r>
-            <a:endParaRPr sz="1500">
+            <a:endParaRPr sz="1500" dirty="0">
               <a:solidFill>
                 <a:schemeClr val="dk1"/>
               </a:solidFill>
             </a:endParaRPr>
           </a:p>
           <a:p>
-            <a:pPr indent="-323850" lvl="0" marL="457200" rtl="0" algn="l">
+            <a:pPr marL="457200" lvl="0" indent="-323850" algn="l" rtl="0">
               <a:spcBef>
                 <a:spcPts val="0"/>
               </a:spcBef>
@@ -8471,14 +8606,14 @@
               <a:buChar char="●"/>
             </a:pPr>
             <a:r>
-              <a:rPr lang="en" sz="1600">
+              <a:rPr lang="en" sz="1600" dirty="0">
                 <a:solidFill>
                   <a:schemeClr val="dk1"/>
                 </a:solidFill>
               </a:rPr>
               <a:t>Kedermawanan Indonesia tertinggi dunia.</a:t>
             </a:r>
-            <a:endParaRPr sz="1500">
+            <a:endParaRPr sz="1500" dirty="0">
               <a:solidFill>
                 <a:schemeClr val="dk1"/>
               </a:solidFill>
@@ -8530,8 +8665,8 @@
         </p:blipFill>
         <p:spPr>
           <a:xfrm>
-            <a:off x="3717790" y="803000"/>
-            <a:ext cx="1708425" cy="2081600"/>
+            <a:off x="3738283" y="893476"/>
+            <a:ext cx="1640542" cy="1991123"/>
           </a:xfrm>
           <a:prstGeom prst="rect">
             <a:avLst/>
@@ -8545,15 +8680,17 @@
       <p:sp>
         <p:nvSpPr>
           <p:cNvPr id="113" name="Google Shape;113;p18"/>
-          <p:cNvSpPr txBox="1"/>
+          <p:cNvSpPr txBox="1">
+            <a:spLocks noGrp="1"/>
+          </p:cNvSpPr>
           <p:nvPr>
-            <p:ph idx="1" type="body"/>
+            <p:ph type="body" idx="1"/>
           </p:nvPr>
         </p:nvSpPr>
         <p:spPr>
           <a:xfrm>
-            <a:off x="3792050" y="3132200"/>
-            <a:ext cx="4572000" cy="1253700"/>
+            <a:off x="3499677" y="3086800"/>
+            <a:ext cx="5156340" cy="1253700"/>
           </a:xfrm>
           <a:prstGeom prst="rect">
             <a:avLst/>
@@ -8563,12 +8700,12 @@
           </a:ln>
         </p:spPr>
         <p:txBody>
-          <a:bodyPr anchorCtr="0" anchor="t" bIns="91425" lIns="91425" spcFirstLastPara="1" rIns="91425" wrap="square" tIns="91425">
+          <a:bodyPr spcFirstLastPara="1" wrap="square" lIns="91425" tIns="91425" rIns="91425" bIns="91425" anchor="t" anchorCtr="0">
             <a:normAutofit lnSpcReduction="10000"/>
           </a:bodyPr>
           <a:lstStyle/>
           <a:p>
-            <a:pPr indent="-323850" lvl="0" marL="457200" rtl="0" algn="l">
+            <a:pPr marL="457200" lvl="0" indent="-323850" algn="l" rtl="0">
               <a:spcBef>
                 <a:spcPts val="0"/>
               </a:spcBef>
@@ -8582,21 +8719,21 @@
               <a:buChar char="●"/>
             </a:pPr>
             <a:r>
-              <a:rPr lang="en" sz="1600">
+              <a:rPr lang="en" sz="1600" dirty="0">
                 <a:solidFill>
                   <a:schemeClr val="dk1"/>
                 </a:solidFill>
               </a:rPr>
               <a:t>Jumlah kelas menengah menyusut (-9.5jt) dari 2019-2024 (BPS, 2024)</a:t>
             </a:r>
-            <a:endParaRPr sz="1600">
+            <a:endParaRPr sz="1600" dirty="0">
               <a:solidFill>
                 <a:schemeClr val="dk1"/>
               </a:solidFill>
             </a:endParaRPr>
           </a:p>
           <a:p>
-            <a:pPr indent="-330200" lvl="0" marL="457200" rtl="0" algn="l">
+            <a:pPr marL="457200" lvl="0" indent="-330200" algn="l" rtl="0">
               <a:spcBef>
                 <a:spcPts val="0"/>
               </a:spcBef>
@@ -8610,14 +8747,14 @@
               <a:buChar char="●"/>
             </a:pPr>
             <a:r>
-              <a:rPr lang="en" sz="1600">
+              <a:rPr lang="en" sz="1600" dirty="0">
                 <a:solidFill>
                   <a:schemeClr val="dk1"/>
                 </a:solidFill>
               </a:rPr>
               <a:t>Secara umum cukup baik kecuali urusan finansial (ISS, 2025)</a:t>
             </a:r>
-            <a:endParaRPr sz="1600">
+            <a:endParaRPr sz="1600" dirty="0">
               <a:solidFill>
                 <a:schemeClr val="dk1"/>
               </a:solidFill>
@@ -8662,11 +8799,11 @@
 </file>
 
 <file path=ppt/slides/slide7.xml><?xml version="1.0" encoding="utf-8"?>
-<p:sld xmlns:a="http://schemas.openxmlformats.org/drawingml/2006/main" xmlns:r="http://schemas.openxmlformats.org/officeDocument/2006/relationships" xmlns:mc="http://schemas.openxmlformats.org/markup-compatibility/2006" xmlns:mv="urn:schemas-microsoft-com:mac:vml" xmlns:p="http://schemas.openxmlformats.org/presentationml/2006/main" xmlns:c="http://schemas.openxmlformats.org/drawingml/2006/chart" xmlns:dgm="http://schemas.openxmlformats.org/drawingml/2006/diagram" xmlns:o="urn:schemas-microsoft-com:office:office" xmlns:v="urn:schemas-microsoft-com:vml" xmlns:pvml="urn:schemas-microsoft-com:office:powerpoint" xmlns:com="http://schemas.openxmlformats.org/drawingml/2006/compatibility" xmlns:p14="http://schemas.microsoft.com/office/powerpoint/2010/main" xmlns:p15="http://schemas.microsoft.com/office/powerpoint/2012/main" xmlns:ahyp="http://schemas.microsoft.com/office/drawing/2018/hyperlinkcolor">
+<p:sld xmlns:a="http://schemas.openxmlformats.org/drawingml/2006/main" xmlns:r="http://schemas.openxmlformats.org/officeDocument/2006/relationships" xmlns:p="http://schemas.openxmlformats.org/presentationml/2006/main">
   <p:cSld>
     <p:spTree>
       <p:nvGrpSpPr>
-        <p:cNvPr id="118" name="Shape 118"/>
+        <p:cNvPr id="1" name="Shape 118"/>
         <p:cNvGrpSpPr/>
         <p:nvPr/>
       </p:nvGrpSpPr>
@@ -8691,29 +8828,29 @@
           </a:xfrm>
           <a:prstGeom prst="roundRect">
             <a:avLst>
-              <a:gd fmla="val 16667" name="adj"/>
+              <a:gd name="adj" fmla="val 16667"/>
             </a:avLst>
           </a:prstGeom>
           <a:solidFill>
             <a:srgbClr val="465A8F"/>
           </a:solidFill>
-          <a:ln cap="flat" cmpd="sng" w="9525">
+          <a:ln w="9525" cap="flat" cmpd="sng">
             <a:solidFill>
               <a:schemeClr val="dk2"/>
             </a:solidFill>
             <a:prstDash val="solid"/>
             <a:round/>
-            <a:headEnd len="sm" w="sm" type="none"/>
-            <a:tailEnd len="sm" w="sm" type="none"/>
+            <a:headEnd type="none" w="sm" len="sm"/>
+            <a:tailEnd type="none" w="sm" len="sm"/>
           </a:ln>
         </p:spPr>
         <p:txBody>
-          <a:bodyPr anchorCtr="0" anchor="ctr" bIns="91425" lIns="91425" spcFirstLastPara="1" rIns="91425" wrap="square" tIns="91425">
+          <a:bodyPr spcFirstLastPara="1" wrap="square" lIns="91425" tIns="91425" rIns="91425" bIns="91425" anchor="ctr" anchorCtr="0">
             <a:noAutofit/>
           </a:bodyPr>
           <a:lstStyle/>
           <a:p>
-            <a:pPr indent="0" lvl="0" marL="0" rtl="0" algn="l">
+            <a:pPr marL="0" lvl="0" indent="0" algn="l" rtl="0">
               <a:spcBef>
                 <a:spcPts val="0"/>
               </a:spcBef>
@@ -8723,14 +8860,14 @@
               <a:buNone/>
             </a:pPr>
             <a:r>
-              <a:rPr b="1" lang="en" sz="2000">
+              <a:rPr lang="en" sz="2000" b="1">
                 <a:solidFill>
                   <a:schemeClr val="accent6"/>
                 </a:solidFill>
               </a:rPr>
               <a:t>Kesimpulan</a:t>
             </a:r>
-            <a:endParaRPr b="1" sz="2000">
+            <a:endParaRPr sz="2000" b="1">
               <a:solidFill>
                 <a:schemeClr val="accent6"/>
               </a:solidFill>
@@ -8746,8 +8883,8 @@
         </p:nvSpPr>
         <p:spPr>
           <a:xfrm>
-            <a:off x="1889250" y="2218375"/>
-            <a:ext cx="4880700" cy="1392900"/>
+            <a:off x="1996475" y="2561665"/>
+            <a:ext cx="4880700" cy="1908184"/>
           </a:xfrm>
           <a:prstGeom prst="rect">
             <a:avLst/>
@@ -8758,113 +8895,74 @@
           </a:ln>
         </p:spPr>
         <p:txBody>
-          <a:bodyPr anchorCtr="0" anchor="t" bIns="91425" lIns="91425" spcFirstLastPara="1" rIns="91425" wrap="square" tIns="91425">
+          <a:bodyPr spcFirstLastPara="1" wrap="square" lIns="91425" tIns="91425" rIns="91425" bIns="91425" anchor="t" anchorCtr="0">
             <a:spAutoFit/>
           </a:bodyPr>
           <a:lstStyle/>
           <a:p>
-            <a:pPr indent="0" lvl="0" marL="0" rtl="0" algn="ctr">
-              <a:spcBef>
-                <a:spcPts val="0"/>
-              </a:spcBef>
-              <a:spcAft>
-                <a:spcPts val="0"/>
-              </a:spcAft>
-              <a:buNone/>
-            </a:pPr>
+            <a:pPr lvl="0" algn="ctr"/>
             <a:r>
-              <a:rPr lang="en" sz="1350">
-                <a:solidFill>
-                  <a:srgbClr val="222222"/>
-                </a:solidFill>
+              <a:rPr lang="en-US" i="1" dirty="0">
                 <a:highlight>
                   <a:srgbClr val="FFFFFF"/>
                 </a:highlight>
-                <a:latin typeface="Lora"/>
-                <a:ea typeface="Lora"/>
-                <a:cs typeface="Lora"/>
-                <a:sym typeface="Lora"/>
+                <a:latin typeface="Lora" pitchFamily="2" charset="0"/>
               </a:rPr>
-              <a:t>“When injustice is accepted as normal, what actually occurs is symbolic violence. High levels of flourishing amidst structural poverty are a sign of adaptation to suffering, not progress.</a:t>
+              <a:t>“The Indonesian people are not lacking in generosity, meaning of life, and resilience to endure suffering. However, what is clearly lacking in this country are clean institutions, a humane economy, a serving politics, and just policies.”</a:t>
             </a:r>
-            <a:r>
-              <a:rPr lang="en" sz="1100">
-                <a:solidFill>
-                  <a:schemeClr val="dk1"/>
-                </a:solidFill>
-              </a:rPr>
-              <a:t>”</a:t>
-            </a:r>
-            <a:endParaRPr sz="1100">
-              <a:solidFill>
-                <a:schemeClr val="dk1"/>
-              </a:solidFill>
+          </a:p>
+          <a:p>
+            <a:pPr lvl="0" algn="ctr"/>
+            <a:endParaRPr lang="en-US" i="1" dirty="0">
+              <a:highlight>
+                <a:srgbClr val="FFFFFF"/>
+              </a:highlight>
+              <a:latin typeface="Lora" pitchFamily="2" charset="0"/>
             </a:endParaRPr>
           </a:p>
           <a:p>
-            <a:pPr indent="0" lvl="0" marL="0" rtl="0" algn="ctr">
-              <a:spcBef>
-                <a:spcPts val="0"/>
-              </a:spcBef>
-              <a:spcAft>
-                <a:spcPts val="0"/>
-              </a:spcAft>
-              <a:buNone/>
-            </a:pPr>
-            <a:br>
-              <a:rPr lang="en" sz="1100">
-                <a:solidFill>
-                  <a:schemeClr val="dk1"/>
-                </a:solidFill>
-              </a:rPr>
-            </a:br>
+            <a:pPr lvl="0" algn="ctr"/>
             <a:r>
-              <a:rPr lang="en" sz="1100">
-                <a:solidFill>
-                  <a:schemeClr val="dk1"/>
-                </a:solidFill>
-              </a:rPr>
-              <a:t>– </a:t>
-            </a:r>
-            <a:r>
-              <a:rPr lang="en" sz="1350">
-                <a:solidFill>
-                  <a:srgbClr val="222222"/>
-                </a:solidFill>
+              <a:rPr lang="en-US" i="1" dirty="0">
                 <a:highlight>
                   <a:srgbClr val="FFFFFF"/>
                 </a:highlight>
-                <a:latin typeface="Lora"/>
-                <a:ea typeface="Lora"/>
-                <a:cs typeface="Lora"/>
-                <a:sym typeface="Lora"/>
+                <a:latin typeface="Lora" pitchFamily="2" charset="0"/>
               </a:rPr>
-              <a:t>Pierre Bourdieu</a:t>
+              <a:t>The Paradox of “Happy” People</a:t>
             </a:r>
+          </a:p>
+          <a:p>
+            <a:pPr lvl="0" algn="ctr"/>
             <a:r>
-              <a:rPr lang="en" sz="1100">
-                <a:solidFill>
-                  <a:schemeClr val="dk1"/>
-                </a:solidFill>
+              <a:rPr lang="en-US" i="1" dirty="0">
+                <a:highlight>
+                  <a:srgbClr val="FFFFFF"/>
+                </a:highlight>
+                <a:latin typeface="Lora" pitchFamily="2" charset="0"/>
               </a:rPr>
-              <a:t> –</a:t>
+              <a:t>(Kompas, 2026)</a:t>
             </a:r>
-            <a:endParaRPr/>
+            <a:endParaRPr i="1" dirty="0">
+              <a:latin typeface="Lora" pitchFamily="2" charset="0"/>
+            </a:endParaRPr>
           </a:p>
         </p:txBody>
       </p:sp>
       <p:sp>
         <p:nvSpPr>
           <p:cNvPr id="121" name="Google Shape;121;p19"/>
-          <p:cNvSpPr txBox="1"/>
+          <p:cNvSpPr txBox="1">
+            <a:spLocks noGrp="1"/>
+          </p:cNvSpPr>
           <p:nvPr>
-            <p:ph idx="1" type="body"/>
+            <p:ph type="body" idx="1"/>
           </p:nvPr>
         </p:nvSpPr>
         <p:spPr>
           <a:xfrm>
             <a:off x="311525" y="1057650"/>
-            <a:ext cx="8250600" cy="3028200"/>
+            <a:ext cx="8250600" cy="1349374"/>
           </a:xfrm>
           <a:prstGeom prst="rect">
             <a:avLst/>
@@ -8874,12 +8972,12 @@
           </a:ln>
         </p:spPr>
         <p:txBody>
-          <a:bodyPr anchorCtr="0" anchor="t" bIns="91425" lIns="91425" spcFirstLastPara="1" rIns="91425" wrap="square" tIns="91425">
+          <a:bodyPr spcFirstLastPara="1" wrap="square" lIns="91425" tIns="91425" rIns="91425" bIns="91425" anchor="t" anchorCtr="0">
             <a:normAutofit/>
           </a:bodyPr>
           <a:lstStyle/>
           <a:p>
-            <a:pPr indent="-323850" lvl="0" marL="457200" rtl="0" algn="l">
+            <a:pPr marL="457200" lvl="0" indent="-323850" algn="l" rtl="0">
               <a:spcBef>
                 <a:spcPts val="0"/>
               </a:spcBef>
@@ -8893,21 +8991,21 @@
               <a:buChar char="●"/>
             </a:pPr>
             <a:r>
-              <a:rPr lang="en" sz="1600">
+              <a:rPr lang="en" sz="1600" dirty="0">
                 <a:solidFill>
                   <a:schemeClr val="dk1"/>
                 </a:solidFill>
               </a:rPr>
               <a:t>Secara subjective, tingkat kebahagiaan Indonesia mengejar rata-rata global</a:t>
             </a:r>
-            <a:endParaRPr sz="1600">
+            <a:endParaRPr sz="1600" dirty="0">
               <a:solidFill>
                 <a:schemeClr val="dk1"/>
               </a:solidFill>
             </a:endParaRPr>
           </a:p>
           <a:p>
-            <a:pPr indent="-330200" lvl="0" marL="457200" rtl="0" algn="l">
+            <a:pPr marL="457200" lvl="0" indent="-330200" algn="l" rtl="0">
               <a:spcBef>
                 <a:spcPts val="0"/>
               </a:spcBef>
@@ -8921,21 +9019,21 @@
               <a:buChar char="●"/>
             </a:pPr>
             <a:r>
-              <a:rPr lang="en" sz="1600">
+              <a:rPr lang="en" sz="1600" dirty="0">
                 <a:solidFill>
                   <a:schemeClr val="dk1"/>
                 </a:solidFill>
               </a:rPr>
               <a:t>Indonesia stagnan dibanding ASEAN  dan negara GDP setara</a:t>
             </a:r>
-            <a:endParaRPr sz="1600">
+            <a:endParaRPr sz="1600" dirty="0">
               <a:solidFill>
                 <a:schemeClr val="dk1"/>
               </a:solidFill>
             </a:endParaRPr>
           </a:p>
           <a:p>
-            <a:pPr indent="-330200" lvl="0" marL="457200" rtl="0" algn="l">
+            <a:pPr marL="457200" lvl="0" indent="-330200" algn="l" rtl="0">
               <a:spcBef>
                 <a:spcPts val="0"/>
               </a:spcBef>
@@ -8949,14 +9047,14 @@
               <a:buChar char="●"/>
             </a:pPr>
             <a:r>
-              <a:rPr lang="en" sz="1600">
+              <a:rPr lang="en" sz="1600" dirty="0">
                 <a:solidFill>
                   <a:schemeClr val="dk1"/>
                 </a:solidFill>
               </a:rPr>
-              <a:t>Kontradiksi kebahagiaan subjective vs kondisi ekonomi riil.</a:t>
+              <a:t>Kontradiksi kebahagiaan subjective vs kondisi riil ekonomi.</a:t>
             </a:r>
-            <a:endParaRPr sz="1600">
+            <a:endParaRPr sz="1600" dirty="0">
               <a:solidFill>
                 <a:schemeClr val="dk1"/>
               </a:solidFill>
@@ -8973,7 +9071,288 @@
 </file>
 
 <file path=ppt/theme/theme1.xml><?xml version="1.0" encoding="utf-8"?>
-<a:theme xmlns:a="http://schemas.openxmlformats.org/drawingml/2006/main" xmlns:r="http://schemas.openxmlformats.org/officeDocument/2006/relationships">
+<a:theme xmlns:a="http://schemas.openxmlformats.org/drawingml/2006/main" name="Simple Light">
+  <a:themeElements>
+    <a:clrScheme name="Simple Light">
+      <a:dk1>
+        <a:srgbClr val="000000"/>
+      </a:dk1>
+      <a:lt1>
+        <a:srgbClr val="FFFFFF"/>
+      </a:lt1>
+      <a:dk2>
+        <a:srgbClr val="595959"/>
+      </a:dk2>
+      <a:lt2>
+        <a:srgbClr val="EEEEEE"/>
+      </a:lt2>
+      <a:accent1>
+        <a:srgbClr val="4285F4"/>
+      </a:accent1>
+      <a:accent2>
+        <a:srgbClr val="212121"/>
+      </a:accent2>
+      <a:accent3>
+        <a:srgbClr val="78909C"/>
+      </a:accent3>
+      <a:accent4>
+        <a:srgbClr val="FFAB40"/>
+      </a:accent4>
+      <a:accent5>
+        <a:srgbClr val="0097A7"/>
+      </a:accent5>
+      <a:accent6>
+        <a:srgbClr val="EEFF41"/>
+      </a:accent6>
+      <a:hlink>
+        <a:srgbClr val="0097A7"/>
+      </a:hlink>
+      <a:folHlink>
+        <a:srgbClr val="0097A7"/>
+      </a:folHlink>
+    </a:clrScheme>
+    <a:fontScheme name="Office">
+      <a:majorFont>
+        <a:latin typeface="Arial"/>
+        <a:ea typeface=""/>
+        <a:cs typeface=""/>
+        <a:font script="Jpan" typeface="ＭＳ Ｐゴシック"/>
+        <a:font script="Hang" typeface="맑은 고딕"/>
+        <a:font script="Hans" typeface="宋体"/>
+        <a:font script="Hant" typeface="新細明體"/>
+        <a:font script="Arab" typeface="Times New Roman"/>
+        <a:font script="Hebr" typeface="Times New Roman"/>
+        <a:font script="Thai" typeface="Angsana New"/>
+        <a:font script="Ethi" typeface="Nyala"/>
+        <a:font script="Beng" typeface="Vrinda"/>
+        <a:font script="Gujr" typeface="Shruti"/>
+        <a:font script="Khmr" typeface="MoolBoran"/>
+        <a:font script="Knda" typeface="Tunga"/>
+        <a:font script="Guru" typeface="Raavi"/>
+        <a:font script="Cans" typeface="Euphemia"/>
+        <a:font script="Cher" typeface="Plantagenet Cherokee"/>
+        <a:font script="Yiii" typeface="Microsoft Yi Baiti"/>
+        <a:font script="Tibt" typeface="Microsoft Himalaya"/>
+        <a:font script="Thaa" typeface="MV Boli"/>
+        <a:font script="Deva" typeface="Mangal"/>
+        <a:font script="Telu" typeface="Gautami"/>
+        <a:font script="Taml" typeface="Latha"/>
+        <a:font script="Syrc" typeface="Estrangelo Edessa"/>
+        <a:font script="Orya" typeface="Kalinga"/>
+        <a:font script="Mlym" typeface="Kartika"/>
+        <a:font script="Laoo" typeface="DokChampa"/>
+        <a:font script="Sinh" typeface="Iskoola Pota"/>
+        <a:font script="Mong" typeface="Mongolian Baiti"/>
+        <a:font script="Viet" typeface="Times New Roman"/>
+        <a:font script="Uigh" typeface="Microsoft Uighur"/>
+        <a:font script="Geor" typeface="Sylfaen"/>
+      </a:majorFont>
+      <a:minorFont>
+        <a:latin typeface="Arial"/>
+        <a:ea typeface=""/>
+        <a:cs typeface=""/>
+        <a:font script="Jpan" typeface="ＭＳ Ｐゴシック"/>
+        <a:font script="Hang" typeface="맑은 고딕"/>
+        <a:font script="Hans" typeface="宋体"/>
+        <a:font script="Hant" typeface="新細明體"/>
+        <a:font script="Arab" typeface="Arial"/>
+        <a:font script="Hebr" typeface="Arial"/>
+        <a:font script="Thai" typeface="Cordia New"/>
+        <a:font script="Ethi" typeface="Nyala"/>
+        <a:font script="Beng" typeface="Vrinda"/>
+        <a:font script="Gujr" typeface="Shruti"/>
+        <a:font script="Khmr" typeface="DaunPenh"/>
+        <a:font script="Knda" typeface="Tunga"/>
+        <a:font script="Guru" typeface="Raavi"/>
+        <a:font script="Cans" typeface="Euphemia"/>
+        <a:font script="Cher" typeface="Plantagenet Cherokee"/>
+        <a:font script="Yiii" typeface="Microsoft Yi Baiti"/>
+        <a:font script="Tibt" typeface="Microsoft Himalaya"/>
+        <a:font script="Thaa" typeface="MV Boli"/>
+        <a:font script="Deva" typeface="Mangal"/>
+        <a:font script="Telu" typeface="Gautami"/>
+        <a:font script="Taml" typeface="Latha"/>
+        <a:font script="Syrc" typeface="Estrangelo Edessa"/>
+        <a:font script="Orya" typeface="Kalinga"/>
+        <a:font script="Mlym" typeface="Kartika"/>
+        <a:font script="Laoo" typeface="DokChampa"/>
+        <a:font script="Sinh" typeface="Iskoola Pota"/>
+        <a:font script="Mong" typeface="Mongolian Baiti"/>
+        <a:font script="Viet" typeface="Arial"/>
+        <a:font script="Uigh" typeface="Microsoft Uighur"/>
+        <a:font script="Geor" typeface="Sylfaen"/>
+      </a:minorFont>
+    </a:fontScheme>
+    <a:fmtScheme name="Office">
+      <a:fillStyleLst>
+        <a:solidFill>
+          <a:schemeClr val="phClr"/>
+        </a:solidFill>
+        <a:gradFill rotWithShape="1">
+          <a:gsLst>
+            <a:gs pos="0">
+              <a:schemeClr val="phClr">
+                <a:tint val="50000"/>
+                <a:satMod val="300000"/>
+              </a:schemeClr>
+            </a:gs>
+            <a:gs pos="35000">
+              <a:schemeClr val="phClr">
+                <a:tint val="37000"/>
+                <a:satMod val="300000"/>
+              </a:schemeClr>
+            </a:gs>
+            <a:gs pos="100000">
+              <a:schemeClr val="phClr">
+                <a:tint val="15000"/>
+                <a:satMod val="350000"/>
+              </a:schemeClr>
+            </a:gs>
+          </a:gsLst>
+          <a:lin ang="16200000" scaled="1"/>
+        </a:gradFill>
+        <a:gradFill rotWithShape="1">
+          <a:gsLst>
+            <a:gs pos="0">
+              <a:schemeClr val="phClr">
+                <a:tint val="100000"/>
+                <a:shade val="100000"/>
+                <a:satMod val="130000"/>
+              </a:schemeClr>
+            </a:gs>
+            <a:gs pos="100000">
+              <a:schemeClr val="phClr">
+                <a:tint val="50000"/>
+                <a:shade val="100000"/>
+                <a:satMod val="350000"/>
+              </a:schemeClr>
+            </a:gs>
+          </a:gsLst>
+          <a:lin ang="16200000" scaled="0"/>
+        </a:gradFill>
+      </a:fillStyleLst>
+      <a:lnStyleLst>
+        <a:ln w="9525" cap="flat" cmpd="sng" algn="ctr">
+          <a:solidFill>
+            <a:schemeClr val="phClr">
+              <a:shade val="95000"/>
+              <a:satMod val="105000"/>
+            </a:schemeClr>
+          </a:solidFill>
+          <a:prstDash val="solid"/>
+        </a:ln>
+        <a:ln w="25400" cap="flat" cmpd="sng" algn="ctr">
+          <a:solidFill>
+            <a:schemeClr val="phClr"/>
+          </a:solidFill>
+          <a:prstDash val="solid"/>
+        </a:ln>
+        <a:ln w="38100" cap="flat" cmpd="sng" algn="ctr">
+          <a:solidFill>
+            <a:schemeClr val="phClr"/>
+          </a:solidFill>
+          <a:prstDash val="solid"/>
+        </a:ln>
+      </a:lnStyleLst>
+      <a:effectStyleLst>
+        <a:effectStyle>
+          <a:effectLst>
+            <a:outerShdw blurRad="40000" dist="20000" dir="5400000" rotWithShape="0">
+              <a:srgbClr val="000000">
+                <a:alpha val="38000"/>
+              </a:srgbClr>
+            </a:outerShdw>
+          </a:effectLst>
+        </a:effectStyle>
+        <a:effectStyle>
+          <a:effectLst>
+            <a:outerShdw blurRad="40000" dist="23000" dir="5400000" rotWithShape="0">
+              <a:srgbClr val="000000">
+                <a:alpha val="35000"/>
+              </a:srgbClr>
+            </a:outerShdw>
+          </a:effectLst>
+        </a:effectStyle>
+        <a:effectStyle>
+          <a:effectLst>
+            <a:outerShdw blurRad="40000" dist="23000" dir="5400000" rotWithShape="0">
+              <a:srgbClr val="000000">
+                <a:alpha val="35000"/>
+              </a:srgbClr>
+            </a:outerShdw>
+          </a:effectLst>
+          <a:scene3d>
+            <a:camera prst="orthographicFront">
+              <a:rot lat="0" lon="0" rev="0"/>
+            </a:camera>
+            <a:lightRig rig="threePt" dir="t">
+              <a:rot lat="0" lon="0" rev="1200000"/>
+            </a:lightRig>
+          </a:scene3d>
+          <a:sp3d>
+            <a:bevelT w="63500" h="25400"/>
+          </a:sp3d>
+        </a:effectStyle>
+      </a:effectStyleLst>
+      <a:bgFillStyleLst>
+        <a:solidFill>
+          <a:schemeClr val="phClr"/>
+        </a:solidFill>
+        <a:gradFill rotWithShape="1">
+          <a:gsLst>
+            <a:gs pos="0">
+              <a:schemeClr val="phClr">
+                <a:tint val="40000"/>
+                <a:satMod val="350000"/>
+              </a:schemeClr>
+            </a:gs>
+            <a:gs pos="40000">
+              <a:schemeClr val="phClr">
+                <a:tint val="45000"/>
+                <a:shade val="99000"/>
+                <a:satMod val="350000"/>
+              </a:schemeClr>
+            </a:gs>
+            <a:gs pos="100000">
+              <a:schemeClr val="phClr">
+                <a:shade val="20000"/>
+                <a:satMod val="255000"/>
+              </a:schemeClr>
+            </a:gs>
+          </a:gsLst>
+          <a:path path="circle">
+            <a:fillToRect l="50000" t="-80000" r="50000" b="180000"/>
+          </a:path>
+        </a:gradFill>
+        <a:gradFill rotWithShape="1">
+          <a:gsLst>
+            <a:gs pos="0">
+              <a:schemeClr val="phClr">
+                <a:tint val="80000"/>
+                <a:satMod val="300000"/>
+              </a:schemeClr>
+            </a:gs>
+            <a:gs pos="100000">
+              <a:schemeClr val="phClr">
+                <a:shade val="30000"/>
+                <a:satMod val="200000"/>
+              </a:schemeClr>
+            </a:gs>
+          </a:gsLst>
+          <a:path path="circle">
+            <a:fillToRect l="50000" t="50000" r="50000" b="50000"/>
+          </a:path>
+        </a:gradFill>
+      </a:bgFillStyleLst>
+    </a:fmtScheme>
+  </a:themeElements>
+  <a:objectDefaults/>
+  <a:extraClrSchemeLst/>
+</a:theme>
+</file>
+
+<file path=ppt/theme/theme2.xml><?xml version="1.0" encoding="utf-8"?>
+<a:theme xmlns:a="http://schemas.openxmlformats.org/drawingml/2006/main">
   <a:themeElements>
     <a:clrScheme name="Default">
       <a:dk1>
@@ -9248,284 +9627,7 @@
       </a:bgFillStyleLst>
     </a:fmtScheme>
   </a:themeElements>
-</a:theme>
-</file>
-
-<file path=ppt/theme/theme2.xml><?xml version="1.0" encoding="utf-8"?>
-<a:theme xmlns:a="http://schemas.openxmlformats.org/drawingml/2006/main" xmlns:r="http://schemas.openxmlformats.org/officeDocument/2006/relationships" name="Simple Light">
-  <a:themeElements>
-    <a:clrScheme name="Simple Light">
-      <a:dk1>
-        <a:srgbClr val="000000"/>
-      </a:dk1>
-      <a:lt1>
-        <a:srgbClr val="FFFFFF"/>
-      </a:lt1>
-      <a:dk2>
-        <a:srgbClr val="595959"/>
-      </a:dk2>
-      <a:lt2>
-        <a:srgbClr val="EEEEEE"/>
-      </a:lt2>
-      <a:accent1>
-        <a:srgbClr val="4285F4"/>
-      </a:accent1>
-      <a:accent2>
-        <a:srgbClr val="212121"/>
-      </a:accent2>
-      <a:accent3>
-        <a:srgbClr val="78909C"/>
-      </a:accent3>
-      <a:accent4>
-        <a:srgbClr val="FFAB40"/>
-      </a:accent4>
-      <a:accent5>
-        <a:srgbClr val="0097A7"/>
-      </a:accent5>
-      <a:accent6>
-        <a:srgbClr val="EEFF41"/>
-      </a:accent6>
-      <a:hlink>
-        <a:srgbClr val="0097A7"/>
-      </a:hlink>
-      <a:folHlink>
-        <a:srgbClr val="0097A7"/>
-      </a:folHlink>
-    </a:clrScheme>
-    <a:fontScheme name="Office">
-      <a:majorFont>
-        <a:latin typeface="Arial"/>
-        <a:ea typeface=""/>
-        <a:cs typeface=""/>
-        <a:font script="Jpan" typeface="ＭＳ Ｐゴシック"/>
-        <a:font script="Hang" typeface="맑은 고딕"/>
-        <a:font script="Hans" typeface="宋体"/>
-        <a:font script="Hant" typeface="新細明體"/>
-        <a:font script="Arab" typeface="Times New Roman"/>
-        <a:font script="Hebr" typeface="Times New Roman"/>
-        <a:font script="Thai" typeface="Angsana New"/>
-        <a:font script="Ethi" typeface="Nyala"/>
-        <a:font script="Beng" typeface="Vrinda"/>
-        <a:font script="Gujr" typeface="Shruti"/>
-        <a:font script="Khmr" typeface="MoolBoran"/>
-        <a:font script="Knda" typeface="Tunga"/>
-        <a:font script="Guru" typeface="Raavi"/>
-        <a:font script="Cans" typeface="Euphemia"/>
-        <a:font script="Cher" typeface="Plantagenet Cherokee"/>
-        <a:font script="Yiii" typeface="Microsoft Yi Baiti"/>
-        <a:font script="Tibt" typeface="Microsoft Himalaya"/>
-        <a:font script="Thaa" typeface="MV Boli"/>
-        <a:font script="Deva" typeface="Mangal"/>
-        <a:font script="Telu" typeface="Gautami"/>
-        <a:font script="Taml" typeface="Latha"/>
-        <a:font script="Syrc" typeface="Estrangelo Edessa"/>
-        <a:font script="Orya" typeface="Kalinga"/>
-        <a:font script="Mlym" typeface="Kartika"/>
-        <a:font script="Laoo" typeface="DokChampa"/>
-        <a:font script="Sinh" typeface="Iskoola Pota"/>
-        <a:font script="Mong" typeface="Mongolian Baiti"/>
-        <a:font script="Viet" typeface="Times New Roman"/>
-        <a:font script="Uigh" typeface="Microsoft Uighur"/>
-        <a:font script="Geor" typeface="Sylfaen"/>
-      </a:majorFont>
-      <a:minorFont>
-        <a:latin typeface="Arial"/>
-        <a:ea typeface=""/>
-        <a:cs typeface=""/>
-        <a:font script="Jpan" typeface="ＭＳ Ｐゴシック"/>
-        <a:font script="Hang" typeface="맑은 고딕"/>
-        <a:font script="Hans" typeface="宋体"/>
-        <a:font script="Hant" typeface="新細明體"/>
-        <a:font script="Arab" typeface="Arial"/>
-        <a:font script="Hebr" typeface="Arial"/>
-        <a:font script="Thai" typeface="Cordia New"/>
-        <a:font script="Ethi" typeface="Nyala"/>
-        <a:font script="Beng" typeface="Vrinda"/>
-        <a:font script="Gujr" typeface="Shruti"/>
-        <a:font script="Khmr" typeface="DaunPenh"/>
-        <a:font script="Knda" typeface="Tunga"/>
-        <a:font script="Guru" typeface="Raavi"/>
-        <a:font script="Cans" typeface="Euphemia"/>
-        <a:font script="Cher" typeface="Plantagenet Cherokee"/>
-        <a:font script="Yiii" typeface="Microsoft Yi Baiti"/>
-        <a:font script="Tibt" typeface="Microsoft Himalaya"/>
-        <a:font script="Thaa" typeface="MV Boli"/>
-        <a:font script="Deva" typeface="Mangal"/>
-        <a:font script="Telu" typeface="Gautami"/>
-        <a:font script="Taml" typeface="Latha"/>
-        <a:font script="Syrc" typeface="Estrangelo Edessa"/>
-        <a:font script="Orya" typeface="Kalinga"/>
-        <a:font script="Mlym" typeface="Kartika"/>
-        <a:font script="Laoo" typeface="DokChampa"/>
-        <a:font script="Sinh" typeface="Iskoola Pota"/>
-        <a:font script="Mong" typeface="Mongolian Baiti"/>
-        <a:font script="Viet" typeface="Arial"/>
-        <a:font script="Uigh" typeface="Microsoft Uighur"/>
-        <a:font script="Geor" typeface="Sylfaen"/>
-      </a:minorFont>
-    </a:fontScheme>
-    <a:fmtScheme name="Office">
-      <a:fillStyleLst>
-        <a:solidFill>
-          <a:schemeClr val="phClr"/>
-        </a:solidFill>
-        <a:gradFill rotWithShape="1">
-          <a:gsLst>
-            <a:gs pos="0">
-              <a:schemeClr val="phClr">
-                <a:tint val="50000"/>
-                <a:satMod val="300000"/>
-              </a:schemeClr>
-            </a:gs>
-            <a:gs pos="35000">
-              <a:schemeClr val="phClr">
-                <a:tint val="37000"/>
-                <a:satMod val="300000"/>
-              </a:schemeClr>
-            </a:gs>
-            <a:gs pos="100000">
-              <a:schemeClr val="phClr">
-                <a:tint val="15000"/>
-                <a:satMod val="350000"/>
-              </a:schemeClr>
-            </a:gs>
-          </a:gsLst>
-          <a:lin ang="16200000" scaled="1"/>
-        </a:gradFill>
-        <a:gradFill rotWithShape="1">
-          <a:gsLst>
-            <a:gs pos="0">
-              <a:schemeClr val="phClr">
-                <a:tint val="100000"/>
-                <a:shade val="100000"/>
-                <a:satMod val="130000"/>
-              </a:schemeClr>
-            </a:gs>
-            <a:gs pos="100000">
-              <a:schemeClr val="phClr">
-                <a:tint val="50000"/>
-                <a:shade val="100000"/>
-                <a:satMod val="350000"/>
-              </a:schemeClr>
-            </a:gs>
-          </a:gsLst>
-          <a:lin ang="16200000" scaled="0"/>
-        </a:gradFill>
-      </a:fillStyleLst>
-      <a:lnStyleLst>
-        <a:ln w="9525" cap="flat" cmpd="sng" algn="ctr">
-          <a:solidFill>
-            <a:schemeClr val="phClr">
-              <a:shade val="95000"/>
-              <a:satMod val="105000"/>
-            </a:schemeClr>
-          </a:solidFill>
-          <a:prstDash val="solid"/>
-        </a:ln>
-        <a:ln w="25400" cap="flat" cmpd="sng" algn="ctr">
-          <a:solidFill>
-            <a:schemeClr val="phClr"/>
-          </a:solidFill>
-          <a:prstDash val="solid"/>
-        </a:ln>
-        <a:ln w="38100" cap="flat" cmpd="sng" algn="ctr">
-          <a:solidFill>
-            <a:schemeClr val="phClr"/>
-          </a:solidFill>
-          <a:prstDash val="solid"/>
-        </a:ln>
-      </a:lnStyleLst>
-      <a:effectStyleLst>
-        <a:effectStyle>
-          <a:effectLst>
-            <a:outerShdw blurRad="40000" dist="20000" dir="5400000" rotWithShape="0">
-              <a:srgbClr val="000000">
-                <a:alpha val="38000"/>
-              </a:srgbClr>
-            </a:outerShdw>
-          </a:effectLst>
-        </a:effectStyle>
-        <a:effectStyle>
-          <a:effectLst>
-            <a:outerShdw blurRad="40000" dist="23000" dir="5400000" rotWithShape="0">
-              <a:srgbClr val="000000">
-                <a:alpha val="35000"/>
-              </a:srgbClr>
-            </a:outerShdw>
-          </a:effectLst>
-        </a:effectStyle>
-        <a:effectStyle>
-          <a:effectLst>
-            <a:outerShdw blurRad="40000" dist="23000" dir="5400000" rotWithShape="0">
-              <a:srgbClr val="000000">
-                <a:alpha val="35000"/>
-              </a:srgbClr>
-            </a:outerShdw>
-          </a:effectLst>
-          <a:scene3d>
-            <a:camera prst="orthographicFront">
-              <a:rot lat="0" lon="0" rev="0"/>
-            </a:camera>
-            <a:lightRig rig="threePt" dir="t">
-              <a:rot lat="0" lon="0" rev="1200000"/>
-            </a:lightRig>
-          </a:scene3d>
-          <a:sp3d>
-            <a:bevelT w="63500" h="25400"/>
-          </a:sp3d>
-        </a:effectStyle>
-      </a:effectStyleLst>
-      <a:bgFillStyleLst>
-        <a:solidFill>
-          <a:schemeClr val="phClr"/>
-        </a:solidFill>
-        <a:gradFill rotWithShape="1">
-          <a:gsLst>
-            <a:gs pos="0">
-              <a:schemeClr val="phClr">
-                <a:tint val="40000"/>
-                <a:satMod val="350000"/>
-              </a:schemeClr>
-            </a:gs>
-            <a:gs pos="40000">
-              <a:schemeClr val="phClr">
-                <a:tint val="45000"/>
-                <a:shade val="99000"/>
-                <a:satMod val="350000"/>
-              </a:schemeClr>
-            </a:gs>
-            <a:gs pos="100000">
-              <a:schemeClr val="phClr">
-                <a:shade val="20000"/>
-                <a:satMod val="255000"/>
-              </a:schemeClr>
-            </a:gs>
-          </a:gsLst>
-          <a:path path="circle">
-            <a:fillToRect l="50000" t="-80000" r="50000" b="180000"/>
-          </a:path>
-        </a:gradFill>
-        <a:gradFill rotWithShape="1">
-          <a:gsLst>
-            <a:gs pos="0">
-              <a:schemeClr val="phClr">
-                <a:tint val="80000"/>
-                <a:satMod val="300000"/>
-              </a:schemeClr>
-            </a:gs>
-            <a:gs pos="100000">
-              <a:schemeClr val="phClr">
-                <a:shade val="30000"/>
-                <a:satMod val="200000"/>
-              </a:schemeClr>
-            </a:gs>
-          </a:gsLst>
-          <a:path path="circle">
-            <a:fillToRect l="50000" t="50000" r="50000" b="50000"/>
-          </a:path>
-        </a:gradFill>
-      </a:bgFillStyleLst>
-    </a:fmtScheme>
-  </a:themeElements>
+  <a:objectDefaults/>
+  <a:extraClrSchemeLst/>
 </a:theme>
 </file>